--- a/presentation/PYD411_midsem_presentation.pptx
+++ b/presentation/PYD411_midsem_presentation.pptx
@@ -13,6 +13,7 @@
     <p:sldId id="261" r:id="rId13"/>
     <p:sldId id="262" r:id="rId14"/>
     <p:sldId id="263" r:id="rId15"/>
+    <p:sldId id="264" r:id="rId16"/>
   </p:sldIdLst>
   <p:sldSz cx="12191695" cy="6858000" type="screen4x3"/>
   <p:notesSz cx="6858000" cy="9144000"/>
@@ -719,7 +720,7 @@
           <a:lstStyle/>
           <a:p>
             <a:r>
-              <a:t>Version 1 showed that uniform polarity can translate a cell but cannot deform it. Introducing a spatial gradient in treadmilling near the substrate produces the leading protrusion, with a transition near w0 approximately 0.8.</a:t>
+              <a:t>At every timestep we compute the functional derivatives of the free energy, update the polarization P by its relaxation and advection equation, form the active force from P, obtain the velocity either from the full Stokes solve or the local Darcy law of Version 4, assemble the total transport velocity u, and use u and mu to advance phi. The loop then repeats for the next timestep.</a:t>
             </a:r>
           </a:p>
         </p:txBody>
@@ -789,7 +790,7 @@
           <a:lstStyle/>
           <a:p>
             <a:r>
-              <a:t>The full model shows that anchoring of the polarization at the boundary is the dominant control on planar shape. Adding hydrodynamic flow changes the elongated shape by only about two percent, motivating a friction-dominated reduction.</a:t>
+              <a:t>Version 1 showed that uniform polarity can translate a cell but cannot deform it. Introducing a spatial gradient in treadmilling near the substrate produces the leading protrusion, with a transition near w0 approximately 0.8.</a:t>
             </a:r>
           </a:p>
         </p:txBody>
@@ -859,7 +860,7 @@
           <a:lstStyle/>
           <a:p>
             <a:r>
-              <a:t>At the cell scale the viscous contribution is only about zero point six percent of friction, so we use a friction-dominated force balance. The active stress gives a local velocity, eliminating the global Stokes solve. The resulting cell crawls steadily, reproduces the comparable full-model result, and is substantially cheaper.</a:t>
+              <a:t>The full model shows that anchoring of the polarization at the boundary is the dominant control on planar shape. Adding hydrodynamic flow changes the elongated shape by only about two percent, motivating a friction-dominated reduction.</a:t>
             </a:r>
           </a:p>
         </p:txBody>
@@ -929,7 +930,7 @@
           <a:lstStyle/>
           <a:p>
             <a:r>
-              <a:t>The main outcome is not simply a faster simulation. We identified which mechanisms control the observed behaviour and reduced the model while retaining the essential single-cell crawling dynamics.</a:t>
+              <a:t>At the cell scale the viscous contribution is only about zero point six percent of friction, so we use a friction-dominated force balance. The active stress gives a local velocity, eliminating the global Stokes solve. The resulting cell crawls steadily, reproduces the comparable full-model result, and is substantially cheaper.</a:t>
             </a:r>
           </a:p>
         </p:txBody>
@@ -955,6 +956,76 @@
 </file>
 
 <file path=ppt/notesSlides/notesSlide8.xml><?xml version="1.0" encoding="utf-8"?>
+<p:notes xmlns:a="http://schemas.openxmlformats.org/drawingml/2006/main" xmlns:p="http://schemas.openxmlformats.org/presentationml/2006/main" xmlns:r="http://schemas.openxmlformats.org/officeDocument/2006/relationships">
+  <p:cSld>
+    <p:spTree>
+      <p:nvGrpSpPr>
+        <p:cNvPr id="1" name=""/>
+        <p:cNvGrpSpPr/>
+        <p:nvPr/>
+      </p:nvGrpSpPr>
+      <p:grpSpPr>
+        <a:xfrm>
+          <a:off x="0" y="0"/>
+          <a:ext cx="0" cy="0"/>
+          <a:chOff x="0" y="0"/>
+          <a:chExt cx="0" cy="0"/>
+        </a:xfrm>
+      </p:grpSpPr>
+      <p:sp>
+        <p:nvSpPr>
+          <p:cNvPr id="2" name="Slide Image Placeholder 1"/>
+          <p:cNvSpPr>
+            <a:spLocks noGrp="1"/>
+          </p:cNvSpPr>
+          <p:nvPr>
+            <p:ph type="sldImg" idx="2"/>
+          </p:nvPr>
+        </p:nvSpPr>
+        <p:spPr/>
+      </p:sp>
+      <p:sp>
+        <p:nvSpPr>
+          <p:cNvPr id="3" name="Notes Placeholder 2"/>
+          <p:cNvSpPr>
+            <a:spLocks noGrp="1"/>
+          </p:cNvSpPr>
+          <p:nvPr>
+            <p:ph type="body" idx="3" sz="quarter"/>
+          </p:nvPr>
+        </p:nvSpPr>
+        <p:spPr/>
+        <p:txBody>
+          <a:bodyPr/>
+          <a:lstStyle/>
+          <a:p>
+            <a:r>
+              <a:t>The main outcome is not simply a faster simulation. We identified which mechanisms control the observed behaviour and reduced the model while retaining the essential single-cell crawling dynamics.</a:t>
+            </a:r>
+          </a:p>
+        </p:txBody>
+      </p:sp>
+      <p:sp>
+        <p:nvSpPr>
+          <p:cNvPr id="4" name="Slide Number Placeholder 3"/>
+          <p:cNvSpPr>
+            <a:spLocks noGrp="1"/>
+          </p:cNvSpPr>
+          <p:nvPr>
+            <p:ph type="sldNum" idx="5" sz="quarter"/>
+          </p:nvPr>
+        </p:nvSpPr>
+        <p:spPr/>
+      </p:sp>
+    </p:spTree>
+  </p:cSld>
+  <p:clrMapOvr>
+    <a:masterClrMapping/>
+  </p:clrMapOvr>
+</p:notes>
+</file>
+
+<file path=ppt/notesSlides/notesSlide9.xml><?xml version="1.0" encoding="utf-8"?>
 <p:notes xmlns:a="http://schemas.openxmlformats.org/drawingml/2006/main" xmlns:p="http://schemas.openxmlformats.org/presentationml/2006/main" xmlns:r="http://schemas.openxmlformats.org/officeDocument/2006/relationships">
   <p:cSld>
     <p:spTree>
@@ -4419,7 +4490,7 @@
                 </a:solidFill>
                 <a:latin typeface="Calibri"/>
               </a:rPr>
-              <a:t>8 minutes  ·  8 slides  ·  2 minutes for discussion</a:t>
+              <a:t>8 minutes  ·  9 slides  ·  2 minutes for discussion</a:t>
             </a:r>
           </a:p>
         </p:txBody>
@@ -4739,7 +4810,7 @@
                 </a:solidFill>
                 <a:latin typeface="Calibri"/>
               </a:rPr>
-              <a:t>2 / 8</a:t>
+              <a:t>2 / 9</a:t>
             </a:r>
           </a:p>
         </p:txBody>
@@ -6601,7 +6672,7 @@
                 </a:solidFill>
                 <a:latin typeface="Calibri"/>
               </a:rPr>
-              <a:t>3 / 8</a:t>
+              <a:t>3 / 9</a:t>
             </a:r>
           </a:p>
         </p:txBody>
@@ -8031,14 +8102,56 @@
                 </a:solidFill>
                 <a:latin typeface="Calibri"/>
               </a:rPr>
-              <a:t>From a translating disc to a leading protrusion</a:t>
-            </a:r>
-          </a:p>
-        </p:txBody>
-      </p:sp>
-      <p:sp>
-        <p:nvSpPr>
-          <p:cNvPr id="6" name="Rectangle 5"/>
+              <a:t>How the cell is simulated</a:t>
+            </a:r>
+          </a:p>
+        </p:txBody>
+      </p:sp>
+      <p:sp>
+        <p:nvSpPr>
+          <p:cNvPr id="6" name="TextBox 5"/>
+          <p:cNvSpPr txBox="1"/>
+          <p:nvPr/>
+        </p:nvSpPr>
+        <p:spPr>
+          <a:xfrm>
+            <a:off x="365760" y="457200"/>
+            <a:ext cx="11338560" cy="292608"/>
+          </a:xfrm>
+          <a:prstGeom prst="rect">
+            <a:avLst/>
+          </a:prstGeom>
+          <a:noFill/>
+        </p:spPr>
+        <p:txBody>
+          <a:bodyPr wrap="square" lIns="54864" rIns="54864" tIns="27432" bIns="18288">
+            <a:spAutoFit/>
+          </a:bodyPr>
+          <a:lstStyle/>
+          <a:p>
+            <a:pPr algn="l">
+              <a:spcBef>
+                <a:spcPts val="0"/>
+              </a:spcBef>
+              <a:spcAft>
+                <a:spcPts val="0"/>
+              </a:spcAft>
+            </a:pPr>
+            <a:r>
+              <a:rPr sz="1250" b="0" i="0">
+                <a:solidFill>
+                  <a:srgbClr val="C5D4DE"/>
+                </a:solidFill>
+                <a:latin typeface="Calibri"/>
+              </a:rPr>
+              <a:t>Coupled evolution of cell shape, actin polarity and active motion</a:t>
+            </a:r>
+          </a:p>
+        </p:txBody>
+      </p:sp>
+      <p:sp>
+        <p:nvSpPr>
+          <p:cNvPr id="7" name="Rectangle 6"/>
           <p:cNvSpPr/>
           <p:nvPr/>
         </p:nvSpPr>
@@ -8082,7 +8195,7 @@
       </p:sp>
       <p:sp>
         <p:nvSpPr>
-          <p:cNvPr id="7" name="TextBox 6"/>
+          <p:cNvPr id="8" name="TextBox 7"/>
           <p:cNvSpPr txBox="1"/>
           <p:nvPr/>
         </p:nvSpPr>
@@ -8124,7 +8237,7 @@
       </p:sp>
       <p:sp>
         <p:nvSpPr>
-          <p:cNvPr id="8" name="TextBox 7"/>
+          <p:cNvPr id="9" name="TextBox 8"/>
           <p:cNvSpPr txBox="1"/>
           <p:nvPr/>
         </p:nvSpPr>
@@ -8159,7 +8272,2349 @@
                 </a:solidFill>
                 <a:latin typeface="Calibri"/>
               </a:rPr>
-              <a:t>4 / 8</a:t>
+              <a:t>4 / 9</a:t>
+            </a:r>
+          </a:p>
+        </p:txBody>
+      </p:sp>
+      <p:sp>
+        <p:nvSpPr>
+          <p:cNvPr id="10" name="Rounded Rectangle 9"/>
+          <p:cNvSpPr/>
+          <p:nvPr/>
+        </p:nvSpPr>
+        <p:spPr>
+          <a:xfrm>
+            <a:off x="4160520" y="868680"/>
+            <a:ext cx="3840480" cy="310896"/>
+          </a:xfrm>
+          <a:prstGeom prst="roundRect">
+            <a:avLst>
+              <a:gd name="adj" fmla="val 12000"/>
+            </a:avLst>
+          </a:prstGeom>
+          <a:solidFill>
+            <a:srgbClr val="EFF5F7"/>
+          </a:solidFill>
+          <a:ln w="15875">
+            <a:solidFill>
+              <a:srgbClr val="1A7A6D"/>
+            </a:solidFill>
+          </a:ln>
+          <a:effectLst/>
+        </p:spPr>
+        <p:style>
+          <a:lnRef idx="1">
+            <a:schemeClr val="accent1"/>
+          </a:lnRef>
+          <a:fillRef idx="3">
+            <a:schemeClr val="accent1"/>
+          </a:fillRef>
+          <a:effectRef idx="2">
+            <a:schemeClr val="accent1"/>
+          </a:effectRef>
+          <a:fontRef idx="minor">
+            <a:schemeClr val="lt1"/>
+          </a:fontRef>
+        </p:style>
+        <p:txBody>
+          <a:bodyPr rtlCol="0" anchor="ctr"/>
+          <a:lstStyle/>
+          <a:p>
+            <a:pPr algn="ctr"/>
+          </a:p>
+        </p:txBody>
+      </p:sp>
+      <p:sp>
+        <p:nvSpPr>
+          <p:cNvPr id="11" name="TextBox 10"/>
+          <p:cNvSpPr txBox="1"/>
+          <p:nvPr/>
+        </p:nvSpPr>
+        <p:spPr>
+          <a:xfrm>
+            <a:off x="4160520" y="868680"/>
+            <a:ext cx="3840480" cy="310896"/>
+          </a:xfrm>
+          <a:prstGeom prst="rect">
+            <a:avLst/>
+          </a:prstGeom>
+          <a:noFill/>
+        </p:spPr>
+        <p:txBody>
+          <a:bodyPr wrap="square" lIns="54864" rIns="54864" tIns="27432" bIns="18288" anchor="ctr">
+            <a:spAutoFit/>
+          </a:bodyPr>
+          <a:lstStyle/>
+          <a:p>
+            <a:pPr algn="ctr">
+              <a:spcBef>
+                <a:spcPts val="0"/>
+              </a:spcBef>
+              <a:spcAft>
+                <a:spcPts val="300"/>
+              </a:spcAft>
+            </a:pPr>
+            <a:r>
+              <a:rPr sz="1500" b="0" i="0">
+                <a:solidFill>
+                  <a:srgbClr val="0B3D5C"/>
+                </a:solidFill>
+                <a:latin typeface="Cambria Math"/>
+              </a:rPr>
+              <a:t>φ</a:t>
+            </a:r>
+            <a:r>
+              <a:rPr sz="1500" b="0" i="0" baseline="30000">
+                <a:solidFill>
+                  <a:srgbClr val="0B3D5C"/>
+                </a:solidFill>
+                <a:latin typeface="Cambria Math"/>
+              </a:rPr>
+              <a:t>n</a:t>
+            </a:r>
+            <a:r>
+              <a:rPr sz="1500" b="0" i="0">
+                <a:solidFill>
+                  <a:srgbClr val="0B3D5C"/>
+                </a:solidFill>
+                <a:latin typeface="Cambria Math"/>
+              </a:rPr>
+              <a:t>, </a:t>
+            </a:r>
+            <a:r>
+              <a:rPr sz="1500" b="1" i="0">
+                <a:solidFill>
+                  <a:srgbClr val="0B3D5C"/>
+                </a:solidFill>
+                <a:latin typeface="Cambria Math"/>
+              </a:rPr>
+              <a:t>P</a:t>
+            </a:r>
+            <a:r>
+              <a:rPr sz="1500" b="0" i="0" baseline="30000">
+                <a:solidFill>
+                  <a:srgbClr val="0B3D5C"/>
+                </a:solidFill>
+                <a:latin typeface="Cambria Math"/>
+              </a:rPr>
+              <a:t>n</a:t>
+            </a:r>
+          </a:p>
+        </p:txBody>
+      </p:sp>
+      <p:sp>
+        <p:nvSpPr>
+          <p:cNvPr id="12" name="TextBox 11"/>
+          <p:cNvSpPr txBox="1"/>
+          <p:nvPr/>
+        </p:nvSpPr>
+        <p:spPr>
+          <a:xfrm>
+            <a:off x="0" y="1188720"/>
+            <a:ext cx="12191695" cy="137160"/>
+          </a:xfrm>
+          <a:prstGeom prst="rect">
+            <a:avLst/>
+          </a:prstGeom>
+          <a:noFill/>
+        </p:spPr>
+        <p:txBody>
+          <a:bodyPr wrap="square" lIns="54864" rIns="54864" tIns="27432" bIns="18288">
+            <a:spAutoFit/>
+          </a:bodyPr>
+          <a:lstStyle/>
+          <a:p>
+            <a:pPr algn="ctr">
+              <a:spcBef>
+                <a:spcPts val="0"/>
+              </a:spcBef>
+              <a:spcAft>
+                <a:spcPts val="0"/>
+              </a:spcAft>
+            </a:pPr>
+            <a:r>
+              <a:rPr sz="1300" b="1" i="0">
+                <a:solidFill>
+                  <a:srgbClr val="1A7A6D"/>
+                </a:solidFill>
+                <a:latin typeface="Calibri"/>
+              </a:rPr>
+              <a:t>↓</a:t>
+            </a:r>
+          </a:p>
+        </p:txBody>
+      </p:sp>
+      <p:sp>
+        <p:nvSpPr>
+          <p:cNvPr id="13" name="Rounded Rectangle 12"/>
+          <p:cNvSpPr/>
+          <p:nvPr/>
+        </p:nvSpPr>
+        <p:spPr>
+          <a:xfrm>
+            <a:off x="2880360" y="1335024"/>
+            <a:ext cx="6446520" cy="457200"/>
+          </a:xfrm>
+          <a:prstGeom prst="roundRect">
+            <a:avLst>
+              <a:gd name="adj" fmla="val 12000"/>
+            </a:avLst>
+          </a:prstGeom>
+          <a:solidFill>
+            <a:srgbClr val="EFF5F7"/>
+          </a:solidFill>
+          <a:ln w="15875">
+            <a:solidFill>
+              <a:srgbClr val="1A7A6D"/>
+            </a:solidFill>
+          </a:ln>
+          <a:effectLst/>
+        </p:spPr>
+        <p:style>
+          <a:lnRef idx="1">
+            <a:schemeClr val="accent1"/>
+          </a:lnRef>
+          <a:fillRef idx="3">
+            <a:schemeClr val="accent1"/>
+          </a:fillRef>
+          <a:effectRef idx="2">
+            <a:schemeClr val="accent1"/>
+          </a:effectRef>
+          <a:fontRef idx="minor">
+            <a:schemeClr val="lt1"/>
+          </a:fontRef>
+        </p:style>
+        <p:txBody>
+          <a:bodyPr rtlCol="0" anchor="ctr"/>
+          <a:lstStyle/>
+          <a:p>
+            <a:pPr algn="ctr"/>
+          </a:p>
+        </p:txBody>
+      </p:sp>
+      <p:sp>
+        <p:nvSpPr>
+          <p:cNvPr id="14" name="TextBox 13"/>
+          <p:cNvSpPr txBox="1"/>
+          <p:nvPr/>
+        </p:nvSpPr>
+        <p:spPr>
+          <a:xfrm>
+            <a:off x="2880360" y="1335024"/>
+            <a:ext cx="6446520" cy="457200"/>
+          </a:xfrm>
+          <a:prstGeom prst="rect">
+            <a:avLst/>
+          </a:prstGeom>
+          <a:noFill/>
+        </p:spPr>
+        <p:txBody>
+          <a:bodyPr wrap="square" lIns="54864" rIns="54864" tIns="27432" bIns="18288" anchor="ctr">
+            <a:spAutoFit/>
+          </a:bodyPr>
+          <a:lstStyle/>
+          <a:p>
+            <a:pPr algn="ctr">
+              <a:spcBef>
+                <a:spcPts val="0"/>
+              </a:spcBef>
+              <a:spcAft>
+                <a:spcPts val="300"/>
+              </a:spcAft>
+            </a:pPr>
+            <a:r>
+              <a:rPr sz="1050" b="1" i="0">
+                <a:solidFill>
+                  <a:srgbClr val="1A7A6D"/>
+                </a:solidFill>
+                <a:latin typeface="Cambria Math"/>
+              </a:rPr>
+              <a:t>FREE ENERGY   </a:t>
+            </a:r>
+            <a:r>
+              <a:rPr sz="1350" b="0" i="0">
+                <a:solidFill>
+                  <a:srgbClr val="0B3D5C"/>
+                </a:solidFill>
+                <a:latin typeface="Cambria Math"/>
+              </a:rPr>
+              <a:t>μ = δF/δφ</a:t>
+            </a:r>
+            <a:r>
+              <a:rPr sz="1350" b="0" i="0">
+                <a:solidFill>
+                  <a:srgbClr val="0B3D5C"/>
+                </a:solidFill>
+                <a:latin typeface="Cambria Math"/>
+              </a:rPr>
+              <a:t>      δF/δ</a:t>
+            </a:r>
+            <a:r>
+              <a:rPr sz="1350" b="1" i="0">
+                <a:solidFill>
+                  <a:srgbClr val="0B3D5C"/>
+                </a:solidFill>
+                <a:latin typeface="Cambria Math"/>
+              </a:rPr>
+              <a:t>P</a:t>
+            </a:r>
+          </a:p>
+        </p:txBody>
+      </p:sp>
+      <p:sp>
+        <p:nvSpPr>
+          <p:cNvPr id="15" name="TextBox 14"/>
+          <p:cNvSpPr txBox="1"/>
+          <p:nvPr/>
+        </p:nvSpPr>
+        <p:spPr>
+          <a:xfrm>
+            <a:off x="2880360" y="1810512"/>
+            <a:ext cx="6446520" cy="146304"/>
+          </a:xfrm>
+          <a:prstGeom prst="rect">
+            <a:avLst/>
+          </a:prstGeom>
+          <a:noFill/>
+        </p:spPr>
+        <p:txBody>
+          <a:bodyPr wrap="square" lIns="54864" rIns="54864" tIns="27432" bIns="18288">
+            <a:spAutoFit/>
+          </a:bodyPr>
+          <a:lstStyle/>
+          <a:p>
+            <a:pPr algn="ctr">
+              <a:spcBef>
+                <a:spcPts val="0"/>
+              </a:spcBef>
+              <a:spcAft>
+                <a:spcPts val="0"/>
+              </a:spcAft>
+            </a:pPr>
+            <a:r>
+              <a:rPr sz="1000" b="0" i="0">
+                <a:solidFill>
+                  <a:srgbClr val="4B5563"/>
+                </a:solidFill>
+                <a:latin typeface="Calibri"/>
+              </a:rPr>
+              <a:t>μ → shape evolution      δF/δP → polarization relaxation</a:t>
+            </a:r>
+          </a:p>
+        </p:txBody>
+      </p:sp>
+      <p:sp>
+        <p:nvSpPr>
+          <p:cNvPr id="16" name="TextBox 15"/>
+          <p:cNvSpPr txBox="1"/>
+          <p:nvPr/>
+        </p:nvSpPr>
+        <p:spPr>
+          <a:xfrm>
+            <a:off x="0" y="1975104"/>
+            <a:ext cx="12191695" cy="137160"/>
+          </a:xfrm>
+          <a:prstGeom prst="rect">
+            <a:avLst/>
+          </a:prstGeom>
+          <a:noFill/>
+        </p:spPr>
+        <p:txBody>
+          <a:bodyPr wrap="square" lIns="54864" rIns="54864" tIns="27432" bIns="18288">
+            <a:spAutoFit/>
+          </a:bodyPr>
+          <a:lstStyle/>
+          <a:p>
+            <a:pPr algn="ctr">
+              <a:spcBef>
+                <a:spcPts val="0"/>
+              </a:spcBef>
+              <a:spcAft>
+                <a:spcPts val="0"/>
+              </a:spcAft>
+            </a:pPr>
+            <a:r>
+              <a:rPr sz="1300" b="1" i="0">
+                <a:solidFill>
+                  <a:srgbClr val="1A7A6D"/>
+                </a:solidFill>
+                <a:latin typeface="Calibri"/>
+              </a:rPr>
+              <a:t>↓</a:t>
+            </a:r>
+          </a:p>
+        </p:txBody>
+      </p:sp>
+      <p:sp>
+        <p:nvSpPr>
+          <p:cNvPr id="17" name="Rounded Rectangle 16"/>
+          <p:cNvSpPr/>
+          <p:nvPr/>
+        </p:nvSpPr>
+        <p:spPr>
+          <a:xfrm>
+            <a:off x="320040" y="2121408"/>
+            <a:ext cx="5532120" cy="640080"/>
+          </a:xfrm>
+          <a:prstGeom prst="roundRect">
+            <a:avLst>
+              <a:gd name="adj" fmla="val 12000"/>
+            </a:avLst>
+          </a:prstGeom>
+          <a:solidFill>
+            <a:srgbClr val="EFF5F7"/>
+          </a:solidFill>
+          <a:ln w="15875">
+            <a:solidFill>
+              <a:srgbClr val="1A7A6D"/>
+            </a:solidFill>
+          </a:ln>
+          <a:effectLst/>
+        </p:spPr>
+        <p:style>
+          <a:lnRef idx="1">
+            <a:schemeClr val="accent1"/>
+          </a:lnRef>
+          <a:fillRef idx="3">
+            <a:schemeClr val="accent1"/>
+          </a:fillRef>
+          <a:effectRef idx="2">
+            <a:schemeClr val="accent1"/>
+          </a:effectRef>
+          <a:fontRef idx="minor">
+            <a:schemeClr val="lt1"/>
+          </a:fontRef>
+        </p:style>
+        <p:txBody>
+          <a:bodyPr rtlCol="0" anchor="ctr"/>
+          <a:lstStyle/>
+          <a:p>
+            <a:pPr algn="ctr"/>
+          </a:p>
+        </p:txBody>
+      </p:sp>
+      <p:sp>
+        <p:nvSpPr>
+          <p:cNvPr id="18" name="TextBox 17"/>
+          <p:cNvSpPr txBox="1"/>
+          <p:nvPr/>
+        </p:nvSpPr>
+        <p:spPr>
+          <a:xfrm>
+            <a:off x="320040" y="2121408"/>
+            <a:ext cx="5532120" cy="640080"/>
+          </a:xfrm>
+          <a:prstGeom prst="rect">
+            <a:avLst/>
+          </a:prstGeom>
+          <a:noFill/>
+        </p:spPr>
+        <p:txBody>
+          <a:bodyPr wrap="square" lIns="54864" rIns="54864" tIns="27432" bIns="18288" anchor="ctr">
+            <a:spAutoFit/>
+          </a:bodyPr>
+          <a:lstStyle/>
+          <a:p>
+            <a:pPr algn="ctr">
+              <a:spcBef>
+                <a:spcPts val="0"/>
+              </a:spcBef>
+              <a:spcAft>
+                <a:spcPts val="200"/>
+              </a:spcAft>
+            </a:pPr>
+            <a:r>
+              <a:rPr sz="1100" b="1" i="0">
+                <a:solidFill>
+                  <a:srgbClr val="1A7A6D"/>
+                </a:solidFill>
+                <a:latin typeface="Cambria Math"/>
+              </a:rPr>
+              <a:t>UPDATE P   </a:t>
+            </a:r>
+            <a:r>
+              <a:rPr sz="1200" b="0" i="0">
+                <a:solidFill>
+                  <a:srgbClr val="0B3D5C"/>
+                </a:solidFill>
+                <a:latin typeface="Cambria Math"/>
+              </a:rPr>
+              <a:t>(P</a:t>
+            </a:r>
+            <a:r>
+              <a:rPr sz="1050" b="0" i="0" baseline="30000">
+                <a:solidFill>
+                  <a:srgbClr val="0B3D5C"/>
+                </a:solidFill>
+                <a:latin typeface="Cambria Math"/>
+              </a:rPr>
+              <a:t>n</a:t>
+            </a:r>
+            <a:r>
+              <a:rPr sz="1200" b="0" i="0">
+                <a:solidFill>
+                  <a:srgbClr val="0B3D5C"/>
+                </a:solidFill>
+                <a:latin typeface="Cambria Math"/>
+              </a:rPr>
+              <a:t> → P</a:t>
+            </a:r>
+            <a:r>
+              <a:rPr sz="1050" b="0" i="0" baseline="30000">
+                <a:solidFill>
+                  <a:srgbClr val="0B3D5C"/>
+                </a:solidFill>
+                <a:latin typeface="Cambria Math"/>
+              </a:rPr>
+              <a:t>n+1</a:t>
+            </a:r>
+            <a:r>
+              <a:rPr sz="1200" b="0" i="0">
+                <a:solidFill>
+                  <a:srgbClr val="0B3D5C"/>
+                </a:solidFill>
+                <a:latin typeface="Cambria Math"/>
+              </a:rPr>
+              <a:t>)</a:t>
+            </a:r>
+          </a:p>
+          <a:p>
+            <a:pPr algn="ctr">
+              <a:spcBef>
+                <a:spcPts val="0"/>
+              </a:spcBef>
+              <a:spcAft>
+                <a:spcPts val="200"/>
+              </a:spcAft>
+            </a:pPr>
+            <a:r>
+              <a:rPr sz="1200" b="0" i="0">
+                <a:solidFill>
+                  <a:srgbClr val="0B3D5C"/>
+                </a:solidFill>
+                <a:latin typeface="Cambria Math"/>
+              </a:rPr>
+              <a:t>∂</a:t>
+            </a:r>
+            <a:r>
+              <a:rPr sz="1200" b="0" i="0" baseline="-25000">
+                <a:solidFill>
+                  <a:srgbClr val="0B3D5C"/>
+                </a:solidFill>
+                <a:latin typeface="Cambria Math"/>
+              </a:rPr>
+              <a:t>t</a:t>
+            </a:r>
+            <a:r>
+              <a:rPr sz="1200" b="1" i="0">
+                <a:solidFill>
+                  <a:srgbClr val="0B3D5C"/>
+                </a:solidFill>
+                <a:latin typeface="Cambria Math"/>
+              </a:rPr>
+              <a:t>P</a:t>
+            </a:r>
+            <a:r>
+              <a:rPr sz="1200" b="0" i="0">
+                <a:solidFill>
+                  <a:srgbClr val="0B3D5C"/>
+                </a:solidFill>
+                <a:latin typeface="Cambria Math"/>
+              </a:rPr>
+              <a:t> + (</a:t>
+            </a:r>
+            <a:r>
+              <a:rPr sz="1200" b="1" i="0">
+                <a:solidFill>
+                  <a:srgbClr val="0B3D5C"/>
+                </a:solidFill>
+                <a:latin typeface="Cambria Math"/>
+              </a:rPr>
+              <a:t>u</a:t>
+            </a:r>
+            <a:r>
+              <a:rPr sz="1200" b="0" i="0">
+                <a:solidFill>
+                  <a:srgbClr val="0B3D5C"/>
+                </a:solidFill>
+                <a:latin typeface="Cambria Math"/>
+              </a:rPr>
+              <a:t>·∇)</a:t>
+            </a:r>
+            <a:r>
+              <a:rPr sz="1200" b="1" i="0">
+                <a:solidFill>
+                  <a:srgbClr val="0B3D5C"/>
+                </a:solidFill>
+                <a:latin typeface="Cambria Math"/>
+              </a:rPr>
+              <a:t>P</a:t>
+            </a:r>
+            <a:r>
+              <a:rPr sz="1200" b="0" i="0">
+                <a:solidFill>
+                  <a:srgbClr val="0B3D5C"/>
+                </a:solidFill>
+                <a:latin typeface="Cambria Math"/>
+              </a:rPr>
+              <a:t> = −Ω·</a:t>
+            </a:r>
+            <a:r>
+              <a:rPr sz="1200" b="1" i="0">
+                <a:solidFill>
+                  <a:srgbClr val="0B3D5C"/>
+                </a:solidFill>
+                <a:latin typeface="Cambria Math"/>
+              </a:rPr>
+              <a:t>P</a:t>
+            </a:r>
+            <a:r>
+              <a:rPr sz="1200" b="0" i="0">
+                <a:solidFill>
+                  <a:srgbClr val="0B3D5C"/>
+                </a:solidFill>
+                <a:latin typeface="Cambria Math"/>
+              </a:rPr>
+              <a:t> + χD·</a:t>
+            </a:r>
+            <a:r>
+              <a:rPr sz="1200" b="1" i="0">
+                <a:solidFill>
+                  <a:srgbClr val="0B3D5C"/>
+                </a:solidFill>
+                <a:latin typeface="Cambria Math"/>
+              </a:rPr>
+              <a:t>P</a:t>
+            </a:r>
+            <a:r>
+              <a:rPr sz="1200" b="0" i="0">
+                <a:solidFill>
+                  <a:srgbClr val="0B3D5C"/>
+                </a:solidFill>
+                <a:latin typeface="Cambria Math"/>
+              </a:rPr>
+              <a:t> − h/Γ</a:t>
+            </a:r>
+          </a:p>
+        </p:txBody>
+      </p:sp>
+      <p:sp>
+        <p:nvSpPr>
+          <p:cNvPr id="19" name="TextBox 18"/>
+          <p:cNvSpPr txBox="1"/>
+          <p:nvPr/>
+        </p:nvSpPr>
+        <p:spPr>
+          <a:xfrm>
+            <a:off x="320040" y="2779776"/>
+            <a:ext cx="5532120" cy="137160"/>
+          </a:xfrm>
+          <a:prstGeom prst="rect">
+            <a:avLst/>
+          </a:prstGeom>
+          <a:noFill/>
+        </p:spPr>
+        <p:txBody>
+          <a:bodyPr wrap="square" lIns="54864" rIns="54864" tIns="27432" bIns="18288">
+            <a:spAutoFit/>
+          </a:bodyPr>
+          <a:lstStyle/>
+          <a:p>
+            <a:pPr algn="ctr">
+              <a:spcBef>
+                <a:spcPts val="0"/>
+              </a:spcBef>
+              <a:spcAft>
+                <a:spcPts val="0"/>
+              </a:spcAft>
+            </a:pPr>
+            <a:r>
+              <a:rPr sz="950" b="0" i="0">
+                <a:solidFill>
+                  <a:srgbClr val="4B5563"/>
+                </a:solidFill>
+                <a:latin typeface="Calibri"/>
+              </a:rPr>
+              <a:t>advection + relaxation terms  ·  P: local direction &amp; strength of actin</a:t>
+            </a:r>
+          </a:p>
+        </p:txBody>
+      </p:sp>
+      <p:sp>
+        <p:nvSpPr>
+          <p:cNvPr id="20" name="TextBox 19"/>
+          <p:cNvSpPr txBox="1"/>
+          <p:nvPr/>
+        </p:nvSpPr>
+        <p:spPr>
+          <a:xfrm>
+            <a:off x="320040" y="2944368"/>
+            <a:ext cx="5532120" cy="137160"/>
+          </a:xfrm>
+          <a:prstGeom prst="rect">
+            <a:avLst/>
+          </a:prstGeom>
+          <a:noFill/>
+        </p:spPr>
+        <p:txBody>
+          <a:bodyPr wrap="square" lIns="54864" rIns="54864" tIns="27432" bIns="18288">
+            <a:spAutoFit/>
+          </a:bodyPr>
+          <a:lstStyle/>
+          <a:p>
+            <a:pPr algn="ctr">
+              <a:spcBef>
+                <a:spcPts val="0"/>
+              </a:spcBef>
+              <a:spcAft>
+                <a:spcPts val="0"/>
+              </a:spcAft>
+            </a:pPr>
+            <a:r>
+              <a:rPr sz="1200" b="1" i="0">
+                <a:solidFill>
+                  <a:srgbClr val="1A7A6D"/>
+                </a:solidFill>
+                <a:latin typeface="Calibri"/>
+              </a:rPr>
+              <a:t>↓</a:t>
+            </a:r>
+          </a:p>
+        </p:txBody>
+      </p:sp>
+      <p:sp>
+        <p:nvSpPr>
+          <p:cNvPr id="21" name="Rounded Rectangle 20"/>
+          <p:cNvSpPr/>
+          <p:nvPr/>
+        </p:nvSpPr>
+        <p:spPr>
+          <a:xfrm>
+            <a:off x="320040" y="3090672"/>
+            <a:ext cx="5532120" cy="420624"/>
+          </a:xfrm>
+          <a:prstGeom prst="roundRect">
+            <a:avLst>
+              <a:gd name="adj" fmla="val 12000"/>
+            </a:avLst>
+          </a:prstGeom>
+          <a:solidFill>
+            <a:srgbClr val="EFF5F7"/>
+          </a:solidFill>
+          <a:ln w="15875">
+            <a:solidFill>
+              <a:srgbClr val="1A7A6D"/>
+            </a:solidFill>
+          </a:ln>
+          <a:effectLst/>
+        </p:spPr>
+        <p:style>
+          <a:lnRef idx="1">
+            <a:schemeClr val="accent1"/>
+          </a:lnRef>
+          <a:fillRef idx="3">
+            <a:schemeClr val="accent1"/>
+          </a:fillRef>
+          <a:effectRef idx="2">
+            <a:schemeClr val="accent1"/>
+          </a:effectRef>
+          <a:fontRef idx="minor">
+            <a:schemeClr val="lt1"/>
+          </a:fontRef>
+        </p:style>
+        <p:txBody>
+          <a:bodyPr rtlCol="0" anchor="ctr"/>
+          <a:lstStyle/>
+          <a:p>
+            <a:pPr algn="ctr"/>
+          </a:p>
+        </p:txBody>
+      </p:sp>
+      <p:sp>
+        <p:nvSpPr>
+          <p:cNvPr id="22" name="TextBox 21"/>
+          <p:cNvSpPr txBox="1"/>
+          <p:nvPr/>
+        </p:nvSpPr>
+        <p:spPr>
+          <a:xfrm>
+            <a:off x="320040" y="3090672"/>
+            <a:ext cx="5532120" cy="420624"/>
+          </a:xfrm>
+          <a:prstGeom prst="rect">
+            <a:avLst/>
+          </a:prstGeom>
+          <a:noFill/>
+        </p:spPr>
+        <p:txBody>
+          <a:bodyPr wrap="square" lIns="54864" rIns="54864" tIns="27432" bIns="18288" anchor="ctr">
+            <a:spAutoFit/>
+          </a:bodyPr>
+          <a:lstStyle/>
+          <a:p>
+            <a:pPr algn="ctr">
+              <a:spcBef>
+                <a:spcPts val="0"/>
+              </a:spcBef>
+              <a:spcAft>
+                <a:spcPts val="300"/>
+              </a:spcAft>
+            </a:pPr>
+            <a:r>
+              <a:rPr sz="1500" b="0" i="0">
+                <a:solidFill>
+                  <a:srgbClr val="0B3D5C"/>
+                </a:solidFill>
+                <a:latin typeface="Cambria Math"/>
+              </a:rPr>
+              <a:t>f</a:t>
+            </a:r>
+            <a:r>
+              <a:rPr sz="1500" b="0" i="0" baseline="-25000">
+                <a:solidFill>
+                  <a:srgbClr val="0B3D5C"/>
+                </a:solidFill>
+                <a:latin typeface="Cambria Math"/>
+              </a:rPr>
+              <a:t>act</a:t>
+            </a:r>
+            <a:r>
+              <a:rPr sz="1400" b="0" i="0">
+                <a:solidFill>
+                  <a:srgbClr val="0B3D5C"/>
+                </a:solidFill>
+                <a:latin typeface="Cambria Math"/>
+              </a:rPr>
+              <a:t> = −ζ ∇·(φ</a:t>
+            </a:r>
+            <a:r>
+              <a:rPr sz="1500" b="1" i="0">
+                <a:solidFill>
+                  <a:srgbClr val="0B3D5C"/>
+                </a:solidFill>
+                <a:latin typeface="Cambria Math"/>
+              </a:rPr>
+              <a:t>P</a:t>
+            </a:r>
+            <a:r>
+              <a:rPr sz="1500" b="1" i="0">
+                <a:solidFill>
+                  <a:srgbClr val="0B3D5C"/>
+                </a:solidFill>
+                <a:latin typeface="Cambria Math"/>
+              </a:rPr>
+              <a:t>P</a:t>
+            </a:r>
+            <a:r>
+              <a:rPr sz="1400" b="0" i="0">
+                <a:solidFill>
+                  <a:srgbClr val="0B3D5C"/>
+                </a:solidFill>
+                <a:latin typeface="Cambria Math"/>
+              </a:rPr>
+              <a:t>)</a:t>
+            </a:r>
+          </a:p>
+        </p:txBody>
+      </p:sp>
+      <p:sp>
+        <p:nvSpPr>
+          <p:cNvPr id="23" name="TextBox 22"/>
+          <p:cNvSpPr txBox="1"/>
+          <p:nvPr/>
+        </p:nvSpPr>
+        <p:spPr>
+          <a:xfrm>
+            <a:off x="320040" y="3529584"/>
+            <a:ext cx="5532120" cy="137160"/>
+          </a:xfrm>
+          <a:prstGeom prst="rect">
+            <a:avLst/>
+          </a:prstGeom>
+          <a:noFill/>
+        </p:spPr>
+        <p:txBody>
+          <a:bodyPr wrap="square" lIns="54864" rIns="54864" tIns="27432" bIns="18288">
+            <a:spAutoFit/>
+          </a:bodyPr>
+          <a:lstStyle/>
+          <a:p>
+            <a:pPr algn="ctr">
+              <a:spcBef>
+                <a:spcPts val="0"/>
+              </a:spcBef>
+              <a:spcAft>
+                <a:spcPts val="0"/>
+              </a:spcAft>
+            </a:pPr>
+            <a:r>
+              <a:rPr sz="950" b="0" i="0">
+                <a:solidFill>
+                  <a:srgbClr val="4B5563"/>
+                </a:solidFill>
+                <a:latin typeface="Calibri"/>
+              </a:rPr>
+              <a:t>polarised actomyosin stress drives cytoplasmic motion</a:t>
+            </a:r>
+          </a:p>
+        </p:txBody>
+      </p:sp>
+      <p:sp>
+        <p:nvSpPr>
+          <p:cNvPr id="24" name="TextBox 23"/>
+          <p:cNvSpPr txBox="1"/>
+          <p:nvPr/>
+        </p:nvSpPr>
+        <p:spPr>
+          <a:xfrm>
+            <a:off x="320040" y="3675888"/>
+            <a:ext cx="5532120" cy="137160"/>
+          </a:xfrm>
+          <a:prstGeom prst="rect">
+            <a:avLst/>
+          </a:prstGeom>
+          <a:noFill/>
+        </p:spPr>
+        <p:txBody>
+          <a:bodyPr wrap="square" lIns="54864" rIns="54864" tIns="27432" bIns="18288">
+            <a:spAutoFit/>
+          </a:bodyPr>
+          <a:lstStyle/>
+          <a:p>
+            <a:pPr algn="ctr">
+              <a:spcBef>
+                <a:spcPts val="0"/>
+              </a:spcBef>
+              <a:spcAft>
+                <a:spcPts val="0"/>
+              </a:spcAft>
+            </a:pPr>
+            <a:r>
+              <a:rPr sz="1200" b="1" i="0">
+                <a:solidFill>
+                  <a:srgbClr val="1A7A6D"/>
+                </a:solidFill>
+                <a:latin typeface="Calibri"/>
+              </a:rPr>
+              <a:t>↓</a:t>
+            </a:r>
+          </a:p>
+        </p:txBody>
+      </p:sp>
+      <p:sp>
+        <p:nvSpPr>
+          <p:cNvPr id="25" name="Rounded Rectangle 24"/>
+          <p:cNvSpPr/>
+          <p:nvPr/>
+        </p:nvSpPr>
+        <p:spPr>
+          <a:xfrm>
+            <a:off x="320040" y="3822192"/>
+            <a:ext cx="5532120" cy="658368"/>
+          </a:xfrm>
+          <a:prstGeom prst="roundRect">
+            <a:avLst>
+              <a:gd name="adj" fmla="val 12000"/>
+            </a:avLst>
+          </a:prstGeom>
+          <a:solidFill>
+            <a:srgbClr val="EFF5F7"/>
+          </a:solidFill>
+          <a:ln w="15875">
+            <a:solidFill>
+              <a:srgbClr val="1A7A6D"/>
+            </a:solidFill>
+          </a:ln>
+          <a:effectLst/>
+        </p:spPr>
+        <p:style>
+          <a:lnRef idx="1">
+            <a:schemeClr val="accent1"/>
+          </a:lnRef>
+          <a:fillRef idx="3">
+            <a:schemeClr val="accent1"/>
+          </a:fillRef>
+          <a:effectRef idx="2">
+            <a:schemeClr val="accent1"/>
+          </a:effectRef>
+          <a:fontRef idx="minor">
+            <a:schemeClr val="lt1"/>
+          </a:fontRef>
+        </p:style>
+        <p:txBody>
+          <a:bodyPr rtlCol="0" anchor="ctr"/>
+          <a:lstStyle/>
+          <a:p>
+            <a:pPr algn="ctr"/>
+          </a:p>
+        </p:txBody>
+      </p:sp>
+      <p:sp>
+        <p:nvSpPr>
+          <p:cNvPr id="26" name="Rectangle 25"/>
+          <p:cNvSpPr/>
+          <p:nvPr/>
+        </p:nvSpPr>
+        <p:spPr>
+          <a:xfrm>
+            <a:off x="3081528" y="3867912"/>
+            <a:ext cx="9144" cy="566928"/>
+          </a:xfrm>
+          <a:prstGeom prst="rect">
+            <a:avLst/>
+          </a:prstGeom>
+          <a:solidFill>
+            <a:srgbClr val="D0D7DE"/>
+          </a:solidFill>
+          <a:ln>
+            <a:noFill/>
+          </a:ln>
+          <a:effectLst/>
+        </p:spPr>
+        <p:style>
+          <a:lnRef idx="1">
+            <a:schemeClr val="accent1"/>
+          </a:lnRef>
+          <a:fillRef idx="3">
+            <a:schemeClr val="accent1"/>
+          </a:fillRef>
+          <a:effectRef idx="2">
+            <a:schemeClr val="accent1"/>
+          </a:effectRef>
+          <a:fontRef idx="minor">
+            <a:schemeClr val="lt1"/>
+          </a:fontRef>
+        </p:style>
+        <p:txBody>
+          <a:bodyPr rtlCol="0" anchor="ctr"/>
+          <a:lstStyle/>
+          <a:p>
+            <a:pPr algn="ctr"/>
+          </a:p>
+        </p:txBody>
+      </p:sp>
+      <p:sp>
+        <p:nvSpPr>
+          <p:cNvPr id="27" name="TextBox 26"/>
+          <p:cNvSpPr txBox="1"/>
+          <p:nvPr/>
+        </p:nvSpPr>
+        <p:spPr>
+          <a:xfrm>
+            <a:off x="320040" y="3849624"/>
+            <a:ext cx="2766060" cy="603504"/>
+          </a:xfrm>
+          <a:prstGeom prst="rect">
+            <a:avLst/>
+          </a:prstGeom>
+          <a:noFill/>
+        </p:spPr>
+        <p:txBody>
+          <a:bodyPr wrap="square" lIns="54864" rIns="54864" tIns="27432" bIns="18288">
+            <a:spAutoFit/>
+          </a:bodyPr>
+          <a:lstStyle/>
+          <a:p>
+            <a:pPr algn="ctr">
+              <a:spcBef>
+                <a:spcPts val="0"/>
+              </a:spcBef>
+              <a:spcAft>
+                <a:spcPts val="100"/>
+              </a:spcAft>
+            </a:pPr>
+            <a:r>
+              <a:rPr sz="1000" b="1" i="0">
+                <a:solidFill>
+                  <a:srgbClr val="0B3D5C"/>
+                </a:solidFill>
+                <a:latin typeface="Calibri"/>
+              </a:rPr>
+              <a:t>Full model</a:t>
+            </a:r>
+          </a:p>
+          <a:p>
+            <a:pPr algn="ctr">
+              <a:spcBef>
+                <a:spcPts val="0"/>
+              </a:spcBef>
+              <a:spcAft>
+                <a:spcPts val="100"/>
+              </a:spcAft>
+            </a:pPr>
+            <a:r>
+              <a:rPr sz="1000" b="0" i="0">
+                <a:solidFill>
+                  <a:srgbClr val="1F2937"/>
+                </a:solidFill>
+                <a:latin typeface="Cambria Math"/>
+              </a:rPr>
+              <a:t>0=−∇p+η∇</a:t>
+            </a:r>
+            <a:r>
+              <a:rPr sz="950" b="0" i="0" baseline="30000">
+                <a:solidFill>
+                  <a:srgbClr val="1F2937"/>
+                </a:solidFill>
+                <a:latin typeface="Cambria Math"/>
+              </a:rPr>
+              <a:t>2</a:t>
+            </a:r>
+            <a:r>
+              <a:rPr sz="1000" b="1" i="0">
+                <a:solidFill>
+                  <a:srgbClr val="1F2937"/>
+                </a:solidFill>
+                <a:latin typeface="Cambria Math"/>
+              </a:rPr>
+              <a:t>v</a:t>
+            </a:r>
+            <a:r>
+              <a:rPr sz="1000" b="0" i="0">
+                <a:solidFill>
+                  <a:srgbClr val="1F2937"/>
+                </a:solidFill>
+                <a:latin typeface="Cambria Math"/>
+              </a:rPr>
+              <a:t>−ξ</a:t>
+            </a:r>
+            <a:r>
+              <a:rPr sz="1000" b="1" i="0">
+                <a:solidFill>
+                  <a:srgbClr val="1F2937"/>
+                </a:solidFill>
+                <a:latin typeface="Cambria Math"/>
+              </a:rPr>
+              <a:t>v</a:t>
+            </a:r>
+            <a:r>
+              <a:rPr sz="1000" b="1" i="1">
+                <a:solidFill>
+                  <a:srgbClr val="1F2937"/>
+                </a:solidFill>
+                <a:latin typeface="Cambria Math"/>
+              </a:rPr>
+              <a:t>+f</a:t>
+            </a:r>
+          </a:p>
+          <a:p>
+            <a:pPr algn="ctr">
+              <a:spcBef>
+                <a:spcPts val="0"/>
+              </a:spcBef>
+              <a:spcAft>
+                <a:spcPts val="0"/>
+              </a:spcAft>
+            </a:pPr>
+            <a:r>
+              <a:rPr sz="900" b="0" i="0">
+                <a:solidFill>
+                  <a:srgbClr val="4B5563"/>
+                </a:solidFill>
+                <a:latin typeface="Calibri"/>
+              </a:rPr>
+              <a:t>→ solve Stokes</a:t>
+            </a:r>
+          </a:p>
+        </p:txBody>
+      </p:sp>
+      <p:sp>
+        <p:nvSpPr>
+          <p:cNvPr id="28" name="TextBox 27"/>
+          <p:cNvSpPr txBox="1"/>
+          <p:nvPr/>
+        </p:nvSpPr>
+        <p:spPr>
+          <a:xfrm>
+            <a:off x="3086100" y="3849624"/>
+            <a:ext cx="2766060" cy="603504"/>
+          </a:xfrm>
+          <a:prstGeom prst="rect">
+            <a:avLst/>
+          </a:prstGeom>
+          <a:noFill/>
+        </p:spPr>
+        <p:txBody>
+          <a:bodyPr wrap="square" lIns="54864" rIns="54864" tIns="27432" bIns="18288">
+            <a:spAutoFit/>
+          </a:bodyPr>
+          <a:lstStyle/>
+          <a:p>
+            <a:pPr algn="ctr">
+              <a:spcBef>
+                <a:spcPts val="0"/>
+              </a:spcBef>
+              <a:spcAft>
+                <a:spcPts val="100"/>
+              </a:spcAft>
+            </a:pPr>
+            <a:r>
+              <a:rPr sz="1000" b="1" i="0">
+                <a:solidFill>
+                  <a:srgbClr val="1A7A6D"/>
+                </a:solidFill>
+                <a:latin typeface="Calibri"/>
+              </a:rPr>
+              <a:t>Version 4</a:t>
+            </a:r>
+          </a:p>
+          <a:p>
+            <a:pPr algn="ctr">
+              <a:spcBef>
+                <a:spcPts val="0"/>
+              </a:spcBef>
+              <a:spcAft>
+                <a:spcPts val="100"/>
+              </a:spcAft>
+            </a:pPr>
+            <a:r>
+              <a:rPr sz="1250" b="1" i="0">
+                <a:solidFill>
+                  <a:srgbClr val="0B3D5C"/>
+                </a:solidFill>
+                <a:latin typeface="Cambria Math"/>
+              </a:rPr>
+              <a:t>v</a:t>
+            </a:r>
+            <a:r>
+              <a:rPr sz="1250" b="1" i="1">
+                <a:solidFill>
+                  <a:srgbClr val="0B3D5C"/>
+                </a:solidFill>
+                <a:latin typeface="Cambria Math"/>
+              </a:rPr>
+              <a:t> = f</a:t>
+            </a:r>
+            <a:r>
+              <a:rPr sz="1250" b="0" i="0">
+                <a:solidFill>
+                  <a:srgbClr val="0B3D5C"/>
+                </a:solidFill>
+                <a:latin typeface="Cambria Math"/>
+              </a:rPr>
+              <a:t>/ξ</a:t>
+            </a:r>
+          </a:p>
+          <a:p>
+            <a:pPr algn="ctr">
+              <a:spcBef>
+                <a:spcPts val="0"/>
+              </a:spcBef>
+              <a:spcAft>
+                <a:spcPts val="0"/>
+              </a:spcAft>
+            </a:pPr>
+            <a:r>
+              <a:rPr sz="1000" b="0" i="0">
+                <a:solidFill>
+                  <a:srgbClr val="1F2937"/>
+                </a:solidFill>
+                <a:latin typeface="Cambria Math"/>
+              </a:rPr>
+              <a:t>= −(ζ/ξ)∇·(φ</a:t>
+            </a:r>
+            <a:r>
+              <a:rPr sz="1000" b="1" i="0">
+                <a:solidFill>
+                  <a:srgbClr val="1F2937"/>
+                </a:solidFill>
+                <a:latin typeface="Cambria Math"/>
+              </a:rPr>
+              <a:t>P</a:t>
+            </a:r>
+            <a:r>
+              <a:rPr sz="1000" b="1" i="0">
+                <a:solidFill>
+                  <a:srgbClr val="1F2937"/>
+                </a:solidFill>
+                <a:latin typeface="Cambria Math"/>
+              </a:rPr>
+              <a:t>P</a:t>
+            </a:r>
+            <a:r>
+              <a:rPr sz="1000" b="0" i="0">
+                <a:solidFill>
+                  <a:srgbClr val="1F2937"/>
+                </a:solidFill>
+                <a:latin typeface="Cambria Math"/>
+              </a:rPr>
+              <a:t>)</a:t>
+            </a:r>
+          </a:p>
+        </p:txBody>
+      </p:sp>
+      <p:sp>
+        <p:nvSpPr>
+          <p:cNvPr id="29" name="TextBox 28"/>
+          <p:cNvSpPr txBox="1"/>
+          <p:nvPr/>
+        </p:nvSpPr>
+        <p:spPr>
+          <a:xfrm>
+            <a:off x="320040" y="4498848"/>
+            <a:ext cx="5532120" cy="137160"/>
+          </a:xfrm>
+          <a:prstGeom prst="rect">
+            <a:avLst/>
+          </a:prstGeom>
+          <a:noFill/>
+        </p:spPr>
+        <p:txBody>
+          <a:bodyPr wrap="square" lIns="54864" rIns="54864" tIns="27432" bIns="18288">
+            <a:spAutoFit/>
+          </a:bodyPr>
+          <a:lstStyle/>
+          <a:p>
+            <a:pPr algn="ctr">
+              <a:spcBef>
+                <a:spcPts val="0"/>
+              </a:spcBef>
+              <a:spcAft>
+                <a:spcPts val="0"/>
+              </a:spcAft>
+            </a:pPr>
+            <a:r>
+              <a:rPr sz="950" b="0" i="0">
+                <a:solidFill>
+                  <a:srgbClr val="4B5563"/>
+                </a:solidFill>
+                <a:latin typeface="Calibri"/>
+              </a:rPr>
+              <a:t>V4: local velocity — no global pressure / Stokes solve</a:t>
+            </a:r>
+          </a:p>
+        </p:txBody>
+      </p:sp>
+      <p:sp>
+        <p:nvSpPr>
+          <p:cNvPr id="30" name="TextBox 29"/>
+          <p:cNvSpPr txBox="1"/>
+          <p:nvPr/>
+        </p:nvSpPr>
+        <p:spPr>
+          <a:xfrm>
+            <a:off x="320040" y="4645152"/>
+            <a:ext cx="5532120" cy="137160"/>
+          </a:xfrm>
+          <a:prstGeom prst="rect">
+            <a:avLst/>
+          </a:prstGeom>
+          <a:noFill/>
+        </p:spPr>
+        <p:txBody>
+          <a:bodyPr wrap="square" lIns="54864" rIns="54864" tIns="27432" bIns="18288">
+            <a:spAutoFit/>
+          </a:bodyPr>
+          <a:lstStyle/>
+          <a:p>
+            <a:pPr algn="ctr">
+              <a:spcBef>
+                <a:spcPts val="0"/>
+              </a:spcBef>
+              <a:spcAft>
+                <a:spcPts val="0"/>
+              </a:spcAft>
+            </a:pPr>
+            <a:r>
+              <a:rPr sz="1200" b="1" i="0">
+                <a:solidFill>
+                  <a:srgbClr val="1A7A6D"/>
+                </a:solidFill>
+                <a:latin typeface="Calibri"/>
+              </a:rPr>
+              <a:t>↓</a:t>
+            </a:r>
+          </a:p>
+        </p:txBody>
+      </p:sp>
+      <p:sp>
+        <p:nvSpPr>
+          <p:cNvPr id="31" name="Rounded Rectangle 30"/>
+          <p:cNvSpPr/>
+          <p:nvPr/>
+        </p:nvSpPr>
+        <p:spPr>
+          <a:xfrm>
+            <a:off x="320040" y="4791456"/>
+            <a:ext cx="5532120" cy="420624"/>
+          </a:xfrm>
+          <a:prstGeom prst="roundRect">
+            <a:avLst>
+              <a:gd name="adj" fmla="val 12000"/>
+            </a:avLst>
+          </a:prstGeom>
+          <a:solidFill>
+            <a:srgbClr val="E8F3F1"/>
+          </a:solidFill>
+          <a:ln w="15875">
+            <a:solidFill>
+              <a:srgbClr val="1A7A6D"/>
+            </a:solidFill>
+          </a:ln>
+          <a:effectLst/>
+        </p:spPr>
+        <p:style>
+          <a:lnRef idx="1">
+            <a:schemeClr val="accent1"/>
+          </a:lnRef>
+          <a:fillRef idx="3">
+            <a:schemeClr val="accent1"/>
+          </a:fillRef>
+          <a:effectRef idx="2">
+            <a:schemeClr val="accent1"/>
+          </a:effectRef>
+          <a:fontRef idx="minor">
+            <a:schemeClr val="lt1"/>
+          </a:fontRef>
+        </p:style>
+        <p:txBody>
+          <a:bodyPr rtlCol="0" anchor="ctr"/>
+          <a:lstStyle/>
+          <a:p>
+            <a:pPr algn="ctr"/>
+          </a:p>
+        </p:txBody>
+      </p:sp>
+      <p:sp>
+        <p:nvSpPr>
+          <p:cNvPr id="32" name="TextBox 31"/>
+          <p:cNvSpPr txBox="1"/>
+          <p:nvPr/>
+        </p:nvSpPr>
+        <p:spPr>
+          <a:xfrm>
+            <a:off x="320040" y="4791456"/>
+            <a:ext cx="5532120" cy="420624"/>
+          </a:xfrm>
+          <a:prstGeom prst="rect">
+            <a:avLst/>
+          </a:prstGeom>
+          <a:noFill/>
+        </p:spPr>
+        <p:txBody>
+          <a:bodyPr wrap="square" lIns="54864" rIns="54864" tIns="27432" bIns="18288" anchor="ctr">
+            <a:spAutoFit/>
+          </a:bodyPr>
+          <a:lstStyle/>
+          <a:p>
+            <a:pPr algn="ctr">
+              <a:spcBef>
+                <a:spcPts val="0"/>
+              </a:spcBef>
+              <a:spcAft>
+                <a:spcPts val="300"/>
+              </a:spcAft>
+            </a:pPr>
+            <a:r>
+              <a:rPr sz="1700" b="1" i="0">
+                <a:solidFill>
+                  <a:srgbClr val="0B3D5C"/>
+                </a:solidFill>
+                <a:latin typeface="Cambria Math"/>
+              </a:rPr>
+              <a:t>u</a:t>
+            </a:r>
+            <a:r>
+              <a:rPr sz="1500" b="0" i="0">
+                <a:solidFill>
+                  <a:srgbClr val="0B3D5C"/>
+                </a:solidFill>
+                <a:latin typeface="Cambria Math"/>
+              </a:rPr>
+              <a:t>  =  </a:t>
+            </a:r>
+            <a:r>
+              <a:rPr sz="1700" b="1" i="0">
+                <a:solidFill>
+                  <a:srgbClr val="0B3D5C"/>
+                </a:solidFill>
+                <a:latin typeface="Cambria Math"/>
+              </a:rPr>
+              <a:t>v</a:t>
+            </a:r>
+            <a:r>
+              <a:rPr sz="1500" b="0" i="0">
+                <a:solidFill>
+                  <a:srgbClr val="0B3D5C"/>
+                </a:solidFill>
+                <a:latin typeface="Cambria Math"/>
+              </a:rPr>
+              <a:t>  +  w</a:t>
+            </a:r>
+            <a:r>
+              <a:rPr sz="1500" b="0" i="0" baseline="-25000">
+                <a:solidFill>
+                  <a:srgbClr val="0B3D5C"/>
+                </a:solidFill>
+                <a:latin typeface="Cambria Math"/>
+              </a:rPr>
+              <a:t>0</a:t>
+            </a:r>
+            <a:r>
+              <a:rPr sz="1700" b="1" i="0">
+                <a:solidFill>
+                  <a:srgbClr val="0B3D5C"/>
+                </a:solidFill>
+                <a:latin typeface="Cambria Math"/>
+              </a:rPr>
+              <a:t>P</a:t>
+            </a:r>
+          </a:p>
+        </p:txBody>
+      </p:sp>
+      <p:sp>
+        <p:nvSpPr>
+          <p:cNvPr id="33" name="TextBox 32"/>
+          <p:cNvSpPr txBox="1"/>
+          <p:nvPr/>
+        </p:nvSpPr>
+        <p:spPr>
+          <a:xfrm>
+            <a:off x="320040" y="5230368"/>
+            <a:ext cx="5532120" cy="146304"/>
+          </a:xfrm>
+          <a:prstGeom prst="rect">
+            <a:avLst/>
+          </a:prstGeom>
+          <a:noFill/>
+        </p:spPr>
+        <p:txBody>
+          <a:bodyPr wrap="square" lIns="54864" rIns="54864" tIns="27432" bIns="18288">
+            <a:spAutoFit/>
+          </a:bodyPr>
+          <a:lstStyle/>
+          <a:p>
+            <a:pPr algn="ctr">
+              <a:spcBef>
+                <a:spcPts val="0"/>
+              </a:spcBef>
+              <a:spcAft>
+                <a:spcPts val="0"/>
+              </a:spcAft>
+            </a:pPr>
+            <a:r>
+              <a:rPr sz="950" b="0" i="0">
+                <a:solidFill>
+                  <a:srgbClr val="4B5563"/>
+                </a:solidFill>
+                <a:latin typeface="Calibri"/>
+              </a:rPr>
+              <a:t>v: mechanical / friction-driven motion  ·  w₀P: actin treadmilling</a:t>
+            </a:r>
+          </a:p>
+        </p:txBody>
+      </p:sp>
+      <p:sp>
+        <p:nvSpPr>
+          <p:cNvPr id="34" name="Rounded Rectangle 33"/>
+          <p:cNvSpPr/>
+          <p:nvPr/>
+        </p:nvSpPr>
+        <p:spPr>
+          <a:xfrm>
+            <a:off x="6080760" y="2121408"/>
+            <a:ext cx="5788152" cy="3255264"/>
+          </a:xfrm>
+          <a:prstGeom prst="roundRect">
+            <a:avLst>
+              <a:gd name="adj" fmla="val 8000"/>
+            </a:avLst>
+          </a:prstGeom>
+          <a:solidFill>
+            <a:srgbClr val="E8F3F1"/>
+          </a:solidFill>
+          <a:ln w="15875">
+            <a:solidFill>
+              <a:srgbClr val="1A7A6D"/>
+            </a:solidFill>
+          </a:ln>
+          <a:effectLst/>
+        </p:spPr>
+        <p:style>
+          <a:lnRef idx="1">
+            <a:schemeClr val="accent1"/>
+          </a:lnRef>
+          <a:fillRef idx="3">
+            <a:schemeClr val="accent1"/>
+          </a:fillRef>
+          <a:effectRef idx="2">
+            <a:schemeClr val="accent1"/>
+          </a:effectRef>
+          <a:fontRef idx="minor">
+            <a:schemeClr val="lt1"/>
+          </a:fontRef>
+        </p:style>
+        <p:txBody>
+          <a:bodyPr rtlCol="0" anchor="ctr"/>
+          <a:lstStyle/>
+          <a:p>
+            <a:pPr algn="ctr"/>
+          </a:p>
+        </p:txBody>
+      </p:sp>
+      <p:sp>
+        <p:nvSpPr>
+          <p:cNvPr id="35" name="TextBox 34"/>
+          <p:cNvSpPr txBox="1"/>
+          <p:nvPr/>
+        </p:nvSpPr>
+        <p:spPr>
+          <a:xfrm>
+            <a:off x="6263640" y="2231136"/>
+            <a:ext cx="5422392" cy="3035808"/>
+          </a:xfrm>
+          <a:prstGeom prst="rect">
+            <a:avLst/>
+          </a:prstGeom>
+          <a:noFill/>
+        </p:spPr>
+        <p:txBody>
+          <a:bodyPr wrap="square" lIns="54864" rIns="54864" tIns="27432" bIns="18288" anchor="t">
+            <a:spAutoFit/>
+          </a:bodyPr>
+          <a:lstStyle/>
+          <a:p>
+            <a:pPr algn="l">
+              <a:spcBef>
+                <a:spcPts val="0"/>
+              </a:spcBef>
+              <a:spcAft>
+                <a:spcPts val="800"/>
+              </a:spcAft>
+            </a:pPr>
+            <a:r>
+              <a:rPr sz="1300" b="1" i="0">
+                <a:solidFill>
+                  <a:srgbClr val="1A7A6D"/>
+                </a:solidFill>
+                <a:latin typeface="Calibri"/>
+              </a:rPr>
+              <a:t>UPDATE φ   (φⁿ → φⁿ⁺¹)</a:t>
+            </a:r>
+          </a:p>
+          <a:p>
+            <a:pPr algn="ctr">
+              <a:spcBef>
+                <a:spcPts val="0"/>
+              </a:spcBef>
+              <a:spcAft>
+                <a:spcPts val="1000"/>
+              </a:spcAft>
+            </a:pPr>
+            <a:r>
+              <a:rPr sz="1600" b="0" i="0">
+                <a:solidFill>
+                  <a:srgbClr val="0B3D5C"/>
+                </a:solidFill>
+                <a:latin typeface="Cambria Math"/>
+              </a:rPr>
+              <a:t>∂</a:t>
+            </a:r>
+            <a:r>
+              <a:rPr sz="1600" b="0" i="0" baseline="-25000">
+                <a:solidFill>
+                  <a:srgbClr val="0B3D5C"/>
+                </a:solidFill>
+                <a:latin typeface="Cambria Math"/>
+              </a:rPr>
+              <a:t>t</a:t>
+            </a:r>
+            <a:r>
+              <a:rPr sz="1600" b="0" i="1">
+                <a:solidFill>
+                  <a:srgbClr val="0B3D5C"/>
+                </a:solidFill>
+                <a:latin typeface="Cambria Math"/>
+              </a:rPr>
+              <a:t>φ</a:t>
+            </a:r>
+            <a:r>
+              <a:rPr sz="1600" b="0" i="0">
+                <a:solidFill>
+                  <a:srgbClr val="0B3D5C"/>
+                </a:solidFill>
+                <a:latin typeface="Cambria Math"/>
+              </a:rPr>
+              <a:t> + ∇·(φ</a:t>
+            </a:r>
+            <a:r>
+              <a:rPr sz="1600" b="1" i="0">
+                <a:solidFill>
+                  <a:srgbClr val="0B3D5C"/>
+                </a:solidFill>
+                <a:latin typeface="Cambria Math"/>
+              </a:rPr>
+              <a:t>u</a:t>
+            </a:r>
+            <a:r>
+              <a:rPr sz="1600" b="0" i="0">
+                <a:solidFill>
+                  <a:srgbClr val="0B3D5C"/>
+                </a:solidFill>
+                <a:latin typeface="Cambria Math"/>
+              </a:rPr>
+              <a:t>)</a:t>
+            </a:r>
+            <a:r>
+              <a:rPr sz="1600" b="0" i="0">
+                <a:solidFill>
+                  <a:srgbClr val="0B3D5C"/>
+                </a:solidFill>
+                <a:latin typeface="Cambria Math"/>
+              </a:rPr>
+              <a:t> = −M[μ − Λ g(φ)]</a:t>
+            </a:r>
+          </a:p>
+          <a:p>
+            <a:pPr algn="ctr">
+              <a:spcAft>
+                <a:spcPts val="1000"/>
+              </a:spcAft>
+            </a:pPr>
+            <a:r>
+              <a:rPr sz="1200" b="0" i="0">
+                <a:solidFill>
+                  <a:srgbClr val="1F2937"/>
+                </a:solidFill>
+                <a:latin typeface="Calibri"/>
+              </a:rPr>
+              <a:t>uses  </a:t>
+            </a:r>
+            <a:r>
+              <a:rPr sz="1200" b="1" i="0">
+                <a:solidFill>
+                  <a:srgbClr val="1A7A6D"/>
+                </a:solidFill>
+                <a:latin typeface="Calibri"/>
+              </a:rPr>
+              <a:t>u</a:t>
+            </a:r>
+            <a:r>
+              <a:rPr sz="1200" b="0" i="0">
+                <a:solidFill>
+                  <a:srgbClr val="1F2937"/>
+                </a:solidFill>
+                <a:latin typeface="Calibri"/>
+              </a:rPr>
+              <a:t>  (transport) and  </a:t>
+            </a:r>
+            <a:r>
+              <a:rPr sz="1200" b="1" i="0">
+                <a:solidFill>
+                  <a:srgbClr val="1A7A6D"/>
+                </a:solidFill>
+                <a:latin typeface="Calibri"/>
+              </a:rPr>
+              <a:t>μ</a:t>
+            </a:r>
+            <a:r>
+              <a:rPr sz="1200" b="0" i="0">
+                <a:solidFill>
+                  <a:srgbClr val="1F2937"/>
+                </a:solidFill>
+                <a:latin typeface="Calibri"/>
+              </a:rPr>
+              <a:t>  (from the free energy)</a:t>
+            </a:r>
+          </a:p>
+          <a:p>
+            <a:pPr algn="ctr">
+              <a:spcBef>
+                <a:spcPts val="0"/>
+              </a:spcBef>
+              <a:spcAft>
+                <a:spcPts val="1000"/>
+              </a:spcAft>
+            </a:pPr>
+            <a:r>
+              <a:rPr sz="1250" b="0" i="0">
+                <a:solidFill>
+                  <a:srgbClr val="1F2937"/>
+                </a:solidFill>
+                <a:latin typeface="Calibri"/>
+              </a:rPr>
+              <a:t>φ determines the cell boundary and therefore the cell shape.</a:t>
+            </a:r>
+          </a:p>
+          <a:p>
+            <a:pPr algn="ctr">
+              <a:spcBef>
+                <a:spcPts val="0"/>
+              </a:spcBef>
+              <a:spcAft>
+                <a:spcPts val="0"/>
+              </a:spcAft>
+            </a:pPr>
+            <a:r>
+              <a:rPr sz="1000" b="0" i="0">
+                <a:solidFill>
+                  <a:srgbClr val="4B5563"/>
+                </a:solidFill>
+                <a:latin typeface="Calibri"/>
+              </a:rPr>
+              <a:t>g(φ) = φ(1−φ),   Λ enforces area / volume conservation</a:t>
+            </a:r>
+          </a:p>
+        </p:txBody>
+      </p:sp>
+      <p:sp>
+        <p:nvSpPr>
+          <p:cNvPr id="36" name="TextBox 35"/>
+          <p:cNvSpPr txBox="1"/>
+          <p:nvPr/>
+        </p:nvSpPr>
+        <p:spPr>
+          <a:xfrm>
+            <a:off x="320040" y="5431536"/>
+            <a:ext cx="11548872" cy="219456"/>
+          </a:xfrm>
+          <a:prstGeom prst="rect">
+            <a:avLst/>
+          </a:prstGeom>
+          <a:noFill/>
+        </p:spPr>
+        <p:txBody>
+          <a:bodyPr wrap="square" lIns="54864" rIns="54864" tIns="27432" bIns="18288">
+            <a:spAutoFit/>
+          </a:bodyPr>
+          <a:lstStyle/>
+          <a:p>
+            <a:pPr algn="ctr"/>
+            <a:r>
+              <a:rPr sz="1250" b="1" i="0">
+                <a:solidFill>
+                  <a:srgbClr val="1A7A6D"/>
+                </a:solidFill>
+                <a:latin typeface="Calibri"/>
+              </a:rPr>
+              <a:t>↻  </a:t>
+            </a:r>
+            <a:r>
+              <a:rPr sz="1250" b="1" i="1">
+                <a:solidFill>
+                  <a:srgbClr val="0B3D5C"/>
+                </a:solidFill>
+                <a:latin typeface="Calibri"/>
+              </a:rPr>
+              <a:t>φ</a:t>
+            </a:r>
+            <a:r>
+              <a:rPr sz="950" b="1" i="0" baseline="30000">
+                <a:solidFill>
+                  <a:srgbClr val="0B3D5C"/>
+                </a:solidFill>
+                <a:latin typeface="Calibri"/>
+              </a:rPr>
+              <a:t>n+1</a:t>
+            </a:r>
+            <a:r>
+              <a:rPr sz="1250" b="1" i="0">
+                <a:solidFill>
+                  <a:srgbClr val="0B3D5C"/>
+                </a:solidFill>
+                <a:latin typeface="Calibri"/>
+              </a:rPr>
+              <a:t>, </a:t>
+            </a:r>
+            <a:r>
+              <a:rPr sz="1250" b="1" i="0">
+                <a:solidFill>
+                  <a:srgbClr val="0B3D5C"/>
+                </a:solidFill>
+                <a:latin typeface="Calibri"/>
+              </a:rPr>
+              <a:t>P</a:t>
+            </a:r>
+            <a:r>
+              <a:rPr sz="950" b="1" i="0" baseline="30000">
+                <a:solidFill>
+                  <a:srgbClr val="0B3D5C"/>
+                </a:solidFill>
+                <a:latin typeface="Calibri"/>
+              </a:rPr>
+              <a:t>n+1</a:t>
+            </a:r>
+            <a:r>
+              <a:rPr sz="1250" b="0" i="0">
+                <a:solidFill>
+                  <a:srgbClr val="1F2937"/>
+                </a:solidFill>
+                <a:latin typeface="Calibri"/>
+              </a:rPr>
+              <a:t>   →   next timestep (t+Δt)   →   back to  </a:t>
+            </a:r>
+            <a:r>
+              <a:rPr sz="1250" b="1" i="1">
+                <a:solidFill>
+                  <a:srgbClr val="0B3D5C"/>
+                </a:solidFill>
+                <a:latin typeface="Calibri"/>
+              </a:rPr>
+              <a:t>φ</a:t>
+            </a:r>
+            <a:r>
+              <a:rPr sz="950" b="1" i="0" baseline="30000">
+                <a:solidFill>
+                  <a:srgbClr val="0B3D5C"/>
+                </a:solidFill>
+                <a:latin typeface="Calibri"/>
+              </a:rPr>
+              <a:t>n</a:t>
+            </a:r>
+            <a:r>
+              <a:rPr sz="1250" b="0" i="0">
+                <a:solidFill>
+                  <a:srgbClr val="1F2937"/>
+                </a:solidFill>
+                <a:latin typeface="Calibri"/>
+              </a:rPr>
+              <a:t>, </a:t>
+            </a:r>
+            <a:r>
+              <a:rPr sz="1250" b="1" i="0">
+                <a:solidFill>
+                  <a:srgbClr val="0B3D5C"/>
+                </a:solidFill>
+                <a:latin typeface="Calibri"/>
+              </a:rPr>
+              <a:t>P</a:t>
+            </a:r>
+            <a:r>
+              <a:rPr sz="950" b="1" i="0" baseline="30000">
+                <a:solidFill>
+                  <a:srgbClr val="0B3D5C"/>
+                </a:solidFill>
+                <a:latin typeface="Calibri"/>
+              </a:rPr>
+              <a:t>n</a:t>
+            </a:r>
+          </a:p>
+        </p:txBody>
+      </p:sp>
+      <p:sp>
+        <p:nvSpPr>
+          <p:cNvPr id="37" name="Rounded Rectangle 36"/>
+          <p:cNvSpPr/>
+          <p:nvPr/>
+        </p:nvSpPr>
+        <p:spPr>
+          <a:xfrm>
+            <a:off x="320040" y="5705856"/>
+            <a:ext cx="11548872" cy="658368"/>
+          </a:xfrm>
+          <a:prstGeom prst="roundRect">
+            <a:avLst>
+              <a:gd name="adj" fmla="val 8000"/>
+            </a:avLst>
+          </a:prstGeom>
+          <a:solidFill>
+            <a:srgbClr val="0B3D5C"/>
+          </a:solidFill>
+          <a:ln>
+            <a:noFill/>
+          </a:ln>
+          <a:effectLst/>
+        </p:spPr>
+        <p:style>
+          <a:lnRef idx="1">
+            <a:schemeClr val="accent1"/>
+          </a:lnRef>
+          <a:fillRef idx="3">
+            <a:schemeClr val="accent1"/>
+          </a:fillRef>
+          <a:effectRef idx="2">
+            <a:schemeClr val="accent1"/>
+          </a:effectRef>
+          <a:fontRef idx="minor">
+            <a:schemeClr val="lt1"/>
+          </a:fontRef>
+        </p:style>
+        <p:txBody>
+          <a:bodyPr rtlCol="0" anchor="ctr"/>
+          <a:lstStyle/>
+          <a:p>
+            <a:pPr algn="ctr"/>
+          </a:p>
+        </p:txBody>
+      </p:sp>
+      <p:sp>
+        <p:nvSpPr>
+          <p:cNvPr id="38" name="TextBox 37"/>
+          <p:cNvSpPr txBox="1"/>
+          <p:nvPr/>
+        </p:nvSpPr>
+        <p:spPr>
+          <a:xfrm>
+            <a:off x="548640" y="5788152"/>
+            <a:ext cx="11109960" cy="512064"/>
+          </a:xfrm>
+          <a:prstGeom prst="rect">
+            <a:avLst/>
+          </a:prstGeom>
+          <a:noFill/>
+        </p:spPr>
+        <p:txBody>
+          <a:bodyPr wrap="square" lIns="54864" rIns="54864" tIns="27432" bIns="18288">
+            <a:spAutoFit/>
+          </a:bodyPr>
+          <a:lstStyle/>
+          <a:p>
+            <a:pPr algn="l">
+              <a:spcBef>
+                <a:spcPts val="0"/>
+              </a:spcBef>
+              <a:spcAft>
+                <a:spcPts val="400"/>
+              </a:spcAft>
+            </a:pPr>
+            <a:r>
+              <a:rPr sz="1400" b="1" i="0">
+                <a:solidFill>
+                  <a:srgbClr val="FFFFFF"/>
+                </a:solidFill>
+                <a:latin typeface="Calibri"/>
+              </a:rPr>
+              <a:t>Shape φ  →  polarity P  →  active force  →  velocity v  →  transport u  →  shape update  →  repeat</a:t>
+            </a:r>
+          </a:p>
+          <a:p>
+            <a:pPr algn="l">
+              <a:spcBef>
+                <a:spcPts val="0"/>
+              </a:spcBef>
+              <a:spcAft>
+                <a:spcPts val="600"/>
+              </a:spcAft>
+            </a:pPr>
+            <a:r>
+              <a:rPr sz="1150" b="0" i="0">
+                <a:solidFill>
+                  <a:srgbClr val="7ED9C8"/>
+                </a:solidFill>
+                <a:latin typeface="Calibri"/>
+              </a:rPr>
+              <a:t>This loop is repeated for every timestep.</a:t>
+            </a:r>
+          </a:p>
+        </p:txBody>
+      </p:sp>
+    </p:spTree>
+  </p:cSld>
+  <p:clrMapOvr>
+    <a:masterClrMapping/>
+  </p:clrMapOvr>
+</p:sld>
+</file>
+
+<file path=ppt/slides/slide5.xml><?xml version="1.0" encoding="utf-8"?>
+<p:sld xmlns:a="http://schemas.openxmlformats.org/drawingml/2006/main" xmlns:p="http://schemas.openxmlformats.org/presentationml/2006/main" xmlns:r="http://schemas.openxmlformats.org/officeDocument/2006/relationships">
+  <p:cSld>
+    <p:spTree>
+      <p:nvGrpSpPr>
+        <p:cNvPr id="1" name=""/>
+        <p:cNvGrpSpPr/>
+        <p:nvPr/>
+      </p:nvGrpSpPr>
+      <p:grpSpPr/>
+      <p:sp>
+        <p:nvSpPr>
+          <p:cNvPr id="2" name="Rectangle 1"/>
+          <p:cNvSpPr/>
+          <p:nvPr/>
+        </p:nvSpPr>
+        <p:spPr>
+          <a:xfrm>
+            <a:off x="0" y="0"/>
+            <a:ext cx="12191695" cy="6858000"/>
+          </a:xfrm>
+          <a:prstGeom prst="rect">
+            <a:avLst/>
+          </a:prstGeom>
+          <a:solidFill>
+            <a:srgbClr val="FFFFFF"/>
+          </a:solidFill>
+          <a:ln>
+            <a:noFill/>
+          </a:ln>
+          <a:effectLst/>
+        </p:spPr>
+        <p:style>
+          <a:lnRef idx="1">
+            <a:schemeClr val="accent1"/>
+          </a:lnRef>
+          <a:fillRef idx="3">
+            <a:schemeClr val="accent1"/>
+          </a:fillRef>
+          <a:effectRef idx="2">
+            <a:schemeClr val="accent1"/>
+          </a:effectRef>
+          <a:fontRef idx="minor">
+            <a:schemeClr val="lt1"/>
+          </a:fontRef>
+        </p:style>
+        <p:txBody>
+          <a:bodyPr rtlCol="0" anchor="ctr"/>
+          <a:lstStyle/>
+          <a:p>
+            <a:pPr algn="ctr"/>
+          </a:p>
+        </p:txBody>
+      </p:sp>
+      <p:sp>
+        <p:nvSpPr>
+          <p:cNvPr id="3" name="Rectangle 2"/>
+          <p:cNvSpPr/>
+          <p:nvPr/>
+        </p:nvSpPr>
+        <p:spPr>
+          <a:xfrm>
+            <a:off x="0" y="0"/>
+            <a:ext cx="12191695" cy="786384"/>
+          </a:xfrm>
+          <a:prstGeom prst="rect">
+            <a:avLst/>
+          </a:prstGeom>
+          <a:solidFill>
+            <a:srgbClr val="0B3D5C"/>
+          </a:solidFill>
+          <a:ln>
+            <a:noFill/>
+          </a:ln>
+          <a:effectLst/>
+        </p:spPr>
+        <p:style>
+          <a:lnRef idx="1">
+            <a:schemeClr val="accent1"/>
+          </a:lnRef>
+          <a:fillRef idx="3">
+            <a:schemeClr val="accent1"/>
+          </a:fillRef>
+          <a:effectRef idx="2">
+            <a:schemeClr val="accent1"/>
+          </a:effectRef>
+          <a:fontRef idx="minor">
+            <a:schemeClr val="lt1"/>
+          </a:fontRef>
+        </p:style>
+        <p:txBody>
+          <a:bodyPr rtlCol="0" anchor="ctr"/>
+          <a:lstStyle/>
+          <a:p>
+            <a:pPr algn="ctr"/>
+          </a:p>
+        </p:txBody>
+      </p:sp>
+      <p:sp>
+        <p:nvSpPr>
+          <p:cNvPr id="4" name="Rectangle 3"/>
+          <p:cNvSpPr/>
+          <p:nvPr/>
+        </p:nvSpPr>
+        <p:spPr>
+          <a:xfrm>
+            <a:off x="0" y="786384"/>
+            <a:ext cx="12191695" cy="45720"/>
+          </a:xfrm>
+          <a:prstGeom prst="rect">
+            <a:avLst/>
+          </a:prstGeom>
+          <a:solidFill>
+            <a:srgbClr val="1A7A6D"/>
+          </a:solidFill>
+          <a:ln>
+            <a:noFill/>
+          </a:ln>
+          <a:effectLst/>
+        </p:spPr>
+        <p:style>
+          <a:lnRef idx="1">
+            <a:schemeClr val="accent1"/>
+          </a:lnRef>
+          <a:fillRef idx="3">
+            <a:schemeClr val="accent1"/>
+          </a:fillRef>
+          <a:effectRef idx="2">
+            <a:schemeClr val="accent1"/>
+          </a:effectRef>
+          <a:fontRef idx="minor">
+            <a:schemeClr val="lt1"/>
+          </a:fontRef>
+        </p:style>
+        <p:txBody>
+          <a:bodyPr rtlCol="0" anchor="ctr"/>
+          <a:lstStyle/>
+          <a:p>
+            <a:pPr algn="ctr"/>
+          </a:p>
+        </p:txBody>
+      </p:sp>
+      <p:sp>
+        <p:nvSpPr>
+          <p:cNvPr id="5" name="TextBox 4"/>
+          <p:cNvSpPr txBox="1"/>
+          <p:nvPr/>
+        </p:nvSpPr>
+        <p:spPr>
+          <a:xfrm>
+            <a:off x="365760" y="91440"/>
+            <a:ext cx="11338560" cy="420624"/>
+          </a:xfrm>
+          <a:prstGeom prst="rect">
+            <a:avLst/>
+          </a:prstGeom>
+          <a:noFill/>
+        </p:spPr>
+        <p:txBody>
+          <a:bodyPr wrap="square" lIns="54864" rIns="54864" tIns="27432" bIns="18288">
+            <a:spAutoFit/>
+          </a:bodyPr>
+          <a:lstStyle/>
+          <a:p>
+            <a:pPr algn="l">
+              <a:spcBef>
+                <a:spcPts val="0"/>
+              </a:spcBef>
+              <a:spcAft>
+                <a:spcPts val="0"/>
+              </a:spcAft>
+            </a:pPr>
+            <a:r>
+              <a:rPr sz="2500" b="1" i="0">
+                <a:solidFill>
+                  <a:srgbClr val="FFFFFF"/>
+                </a:solidFill>
+                <a:latin typeface="Calibri"/>
+              </a:rPr>
+              <a:t>From a translating disc to a leading protrusion</a:t>
+            </a:r>
+          </a:p>
+        </p:txBody>
+      </p:sp>
+      <p:sp>
+        <p:nvSpPr>
+          <p:cNvPr id="6" name="Rectangle 5"/>
+          <p:cNvSpPr/>
+          <p:nvPr/>
+        </p:nvSpPr>
+        <p:spPr>
+          <a:xfrm>
+            <a:off x="0" y="6601968"/>
+            <a:ext cx="12191695" cy="256032"/>
+          </a:xfrm>
+          <a:prstGeom prst="rect">
+            <a:avLst/>
+          </a:prstGeom>
+          <a:solidFill>
+            <a:srgbClr val="F3F6F9"/>
+          </a:solidFill>
+          <a:ln>
+            <a:noFill/>
+          </a:ln>
+          <a:effectLst/>
+        </p:spPr>
+        <p:style>
+          <a:lnRef idx="1">
+            <a:schemeClr val="accent1"/>
+          </a:lnRef>
+          <a:fillRef idx="3">
+            <a:schemeClr val="accent1"/>
+          </a:fillRef>
+          <a:effectRef idx="2">
+            <a:schemeClr val="accent1"/>
+          </a:effectRef>
+          <a:fontRef idx="minor">
+            <a:schemeClr val="lt1"/>
+          </a:fontRef>
+        </p:style>
+        <p:txBody>
+          <a:bodyPr rtlCol="0" anchor="ctr"/>
+          <a:lstStyle/>
+          <a:p>
+            <a:pPr algn="ctr"/>
+          </a:p>
+        </p:txBody>
+      </p:sp>
+      <p:sp>
+        <p:nvSpPr>
+          <p:cNvPr id="7" name="TextBox 6"/>
+          <p:cNvSpPr txBox="1"/>
+          <p:nvPr/>
+        </p:nvSpPr>
+        <p:spPr>
+          <a:xfrm>
+            <a:off x="320040" y="6601968"/>
+            <a:ext cx="9601200" cy="237744"/>
+          </a:xfrm>
+          <a:prstGeom prst="rect">
+            <a:avLst/>
+          </a:prstGeom>
+          <a:noFill/>
+        </p:spPr>
+        <p:txBody>
+          <a:bodyPr wrap="square" lIns="54864" rIns="54864" tIns="27432" bIns="18288">
+            <a:spAutoFit/>
+          </a:bodyPr>
+          <a:lstStyle/>
+          <a:p>
+            <a:pPr algn="l">
+              <a:spcBef>
+                <a:spcPts val="0"/>
+              </a:spcBef>
+              <a:spcAft>
+                <a:spcPts val="0"/>
+              </a:spcAft>
+            </a:pPr>
+            <a:r>
+              <a:rPr sz="1100" b="0" i="0">
+                <a:solidFill>
+                  <a:srgbClr val="4B5563"/>
+                </a:solidFill>
+                <a:latin typeface="Calibri"/>
+              </a:rPr>
+              <a:t>PYD411  ·  Mid-term  ·  Dept of Physics, IIT Delhi  ·  Siddharth Kumar &amp; Soumik Roy</a:t>
+            </a:r>
+          </a:p>
+        </p:txBody>
+      </p:sp>
+      <p:sp>
+        <p:nvSpPr>
+          <p:cNvPr id="8" name="TextBox 7"/>
+          <p:cNvSpPr txBox="1"/>
+          <p:nvPr/>
+        </p:nvSpPr>
+        <p:spPr>
+          <a:xfrm>
+            <a:off x="10607040" y="6601968"/>
+            <a:ext cx="1280160" cy="237744"/>
+          </a:xfrm>
+          <a:prstGeom prst="rect">
+            <a:avLst/>
+          </a:prstGeom>
+          <a:noFill/>
+        </p:spPr>
+        <p:txBody>
+          <a:bodyPr wrap="square" lIns="54864" rIns="54864" tIns="27432" bIns="18288">
+            <a:spAutoFit/>
+          </a:bodyPr>
+          <a:lstStyle/>
+          <a:p>
+            <a:pPr algn="r">
+              <a:spcBef>
+                <a:spcPts val="0"/>
+              </a:spcBef>
+              <a:spcAft>
+                <a:spcPts val="0"/>
+              </a:spcAft>
+            </a:pPr>
+            <a:r>
+              <a:rPr sz="1100" b="0" i="0">
+                <a:solidFill>
+                  <a:srgbClr val="4B5563"/>
+                </a:solidFill>
+                <a:latin typeface="Calibri"/>
+              </a:rPr>
+              <a:t>5 / 9</a:t>
             </a:r>
           </a:p>
         </p:txBody>
@@ -9080,7 +11535,7 @@
 </p:sld>
 </file>
 
-<file path=ppt/slides/slide5.xml><?xml version="1.0" encoding="utf-8"?>
+<file path=ppt/slides/slide6.xml><?xml version="1.0" encoding="utf-8"?>
 <p:sld xmlns:a="http://schemas.openxmlformats.org/drawingml/2006/main" xmlns:p="http://schemas.openxmlformats.org/presentationml/2006/main" xmlns:r="http://schemas.openxmlformats.org/officeDocument/2006/relationships">
   <p:cSld>
     <p:spTree>
@@ -9387,7 +11842,7 @@
                 </a:solidFill>
                 <a:latin typeface="Calibri"/>
               </a:rPr>
-              <a:t>5 / 8</a:t>
+              <a:t>6 / 9</a:t>
             </a:r>
           </a:p>
         </p:txBody>
@@ -10318,1600 +12773,6 @@
 </p:sld>
 </file>
 
-<file path=ppt/slides/slide6.xml><?xml version="1.0" encoding="utf-8"?>
-<p:sld xmlns:a="http://schemas.openxmlformats.org/drawingml/2006/main" xmlns:p="http://schemas.openxmlformats.org/presentationml/2006/main" xmlns:r="http://schemas.openxmlformats.org/officeDocument/2006/relationships">
-  <p:cSld>
-    <p:spTree>
-      <p:nvGrpSpPr>
-        <p:cNvPr id="1" name=""/>
-        <p:cNvGrpSpPr/>
-        <p:nvPr/>
-      </p:nvGrpSpPr>
-      <p:grpSpPr/>
-      <p:sp>
-        <p:nvSpPr>
-          <p:cNvPr id="2" name="Rectangle 1"/>
-          <p:cNvSpPr/>
-          <p:nvPr/>
-        </p:nvSpPr>
-        <p:spPr>
-          <a:xfrm>
-            <a:off x="0" y="0"/>
-            <a:ext cx="12191695" cy="6858000"/>
-          </a:xfrm>
-          <a:prstGeom prst="rect">
-            <a:avLst/>
-          </a:prstGeom>
-          <a:solidFill>
-            <a:srgbClr val="FFFFFF"/>
-          </a:solidFill>
-          <a:ln>
-            <a:noFill/>
-          </a:ln>
-          <a:effectLst/>
-        </p:spPr>
-        <p:style>
-          <a:lnRef idx="1">
-            <a:schemeClr val="accent1"/>
-          </a:lnRef>
-          <a:fillRef idx="3">
-            <a:schemeClr val="accent1"/>
-          </a:fillRef>
-          <a:effectRef idx="2">
-            <a:schemeClr val="accent1"/>
-          </a:effectRef>
-          <a:fontRef idx="minor">
-            <a:schemeClr val="lt1"/>
-          </a:fontRef>
-        </p:style>
-        <p:txBody>
-          <a:bodyPr rtlCol="0" anchor="ctr"/>
-          <a:lstStyle/>
-          <a:p>
-            <a:pPr algn="ctr"/>
-          </a:p>
-        </p:txBody>
-      </p:sp>
-      <p:sp>
-        <p:nvSpPr>
-          <p:cNvPr id="3" name="Rectangle 2"/>
-          <p:cNvSpPr/>
-          <p:nvPr/>
-        </p:nvSpPr>
-        <p:spPr>
-          <a:xfrm>
-            <a:off x="0" y="0"/>
-            <a:ext cx="12191695" cy="786384"/>
-          </a:xfrm>
-          <a:prstGeom prst="rect">
-            <a:avLst/>
-          </a:prstGeom>
-          <a:solidFill>
-            <a:srgbClr val="0B3D5C"/>
-          </a:solidFill>
-          <a:ln>
-            <a:noFill/>
-          </a:ln>
-          <a:effectLst/>
-        </p:spPr>
-        <p:style>
-          <a:lnRef idx="1">
-            <a:schemeClr val="accent1"/>
-          </a:lnRef>
-          <a:fillRef idx="3">
-            <a:schemeClr val="accent1"/>
-          </a:fillRef>
-          <a:effectRef idx="2">
-            <a:schemeClr val="accent1"/>
-          </a:effectRef>
-          <a:fontRef idx="minor">
-            <a:schemeClr val="lt1"/>
-          </a:fontRef>
-        </p:style>
-        <p:txBody>
-          <a:bodyPr rtlCol="0" anchor="ctr"/>
-          <a:lstStyle/>
-          <a:p>
-            <a:pPr algn="ctr"/>
-          </a:p>
-        </p:txBody>
-      </p:sp>
-      <p:sp>
-        <p:nvSpPr>
-          <p:cNvPr id="4" name="Rectangle 3"/>
-          <p:cNvSpPr/>
-          <p:nvPr/>
-        </p:nvSpPr>
-        <p:spPr>
-          <a:xfrm>
-            <a:off x="0" y="786384"/>
-            <a:ext cx="12191695" cy="45720"/>
-          </a:xfrm>
-          <a:prstGeom prst="rect">
-            <a:avLst/>
-          </a:prstGeom>
-          <a:solidFill>
-            <a:srgbClr val="1A7A6D"/>
-          </a:solidFill>
-          <a:ln>
-            <a:noFill/>
-          </a:ln>
-          <a:effectLst/>
-        </p:spPr>
-        <p:style>
-          <a:lnRef idx="1">
-            <a:schemeClr val="accent1"/>
-          </a:lnRef>
-          <a:fillRef idx="3">
-            <a:schemeClr val="accent1"/>
-          </a:fillRef>
-          <a:effectRef idx="2">
-            <a:schemeClr val="accent1"/>
-          </a:effectRef>
-          <a:fontRef idx="minor">
-            <a:schemeClr val="lt1"/>
-          </a:fontRef>
-        </p:style>
-        <p:txBody>
-          <a:bodyPr rtlCol="0" anchor="ctr"/>
-          <a:lstStyle/>
-          <a:p>
-            <a:pPr algn="ctr"/>
-          </a:p>
-        </p:txBody>
-      </p:sp>
-      <p:sp>
-        <p:nvSpPr>
-          <p:cNvPr id="5" name="TextBox 4"/>
-          <p:cNvSpPr txBox="1"/>
-          <p:nvPr/>
-        </p:nvSpPr>
-        <p:spPr>
-          <a:xfrm>
-            <a:off x="365760" y="91440"/>
-            <a:ext cx="11338560" cy="420624"/>
-          </a:xfrm>
-          <a:prstGeom prst="rect">
-            <a:avLst/>
-          </a:prstGeom>
-          <a:noFill/>
-        </p:spPr>
-        <p:txBody>
-          <a:bodyPr wrap="square" lIns="54864" rIns="54864" tIns="27432" bIns="18288">
-            <a:spAutoFit/>
-          </a:bodyPr>
-          <a:lstStyle/>
-          <a:p>
-            <a:pPr algn="l">
-              <a:spcBef>
-                <a:spcPts val="0"/>
-              </a:spcBef>
-              <a:spcAft>
-                <a:spcPts val="0"/>
-              </a:spcAft>
-            </a:pPr>
-            <a:r>
-              <a:rPr sz="2500" b="1" i="0">
-                <a:solidFill>
-                  <a:srgbClr val="FFFFFF"/>
-                </a:solidFill>
-                <a:latin typeface="Calibri"/>
-              </a:rPr>
-              <a:t>Version 4 — crawling without a Stokes solve</a:t>
-            </a:r>
-          </a:p>
-        </p:txBody>
-      </p:sp>
-      <p:sp>
-        <p:nvSpPr>
-          <p:cNvPr id="6" name="Rectangle 5"/>
-          <p:cNvSpPr/>
-          <p:nvPr/>
-        </p:nvSpPr>
-        <p:spPr>
-          <a:xfrm>
-            <a:off x="0" y="6601968"/>
-            <a:ext cx="12191695" cy="256032"/>
-          </a:xfrm>
-          <a:prstGeom prst="rect">
-            <a:avLst/>
-          </a:prstGeom>
-          <a:solidFill>
-            <a:srgbClr val="F3F6F9"/>
-          </a:solidFill>
-          <a:ln>
-            <a:noFill/>
-          </a:ln>
-          <a:effectLst/>
-        </p:spPr>
-        <p:style>
-          <a:lnRef idx="1">
-            <a:schemeClr val="accent1"/>
-          </a:lnRef>
-          <a:fillRef idx="3">
-            <a:schemeClr val="accent1"/>
-          </a:fillRef>
-          <a:effectRef idx="2">
-            <a:schemeClr val="accent1"/>
-          </a:effectRef>
-          <a:fontRef idx="minor">
-            <a:schemeClr val="lt1"/>
-          </a:fontRef>
-        </p:style>
-        <p:txBody>
-          <a:bodyPr rtlCol="0" anchor="ctr"/>
-          <a:lstStyle/>
-          <a:p>
-            <a:pPr algn="ctr"/>
-          </a:p>
-        </p:txBody>
-      </p:sp>
-      <p:sp>
-        <p:nvSpPr>
-          <p:cNvPr id="7" name="TextBox 6"/>
-          <p:cNvSpPr txBox="1"/>
-          <p:nvPr/>
-        </p:nvSpPr>
-        <p:spPr>
-          <a:xfrm>
-            <a:off x="320040" y="6601968"/>
-            <a:ext cx="9601200" cy="237744"/>
-          </a:xfrm>
-          <a:prstGeom prst="rect">
-            <a:avLst/>
-          </a:prstGeom>
-          <a:noFill/>
-        </p:spPr>
-        <p:txBody>
-          <a:bodyPr wrap="square" lIns="54864" rIns="54864" tIns="27432" bIns="18288">
-            <a:spAutoFit/>
-          </a:bodyPr>
-          <a:lstStyle/>
-          <a:p>
-            <a:pPr algn="l">
-              <a:spcBef>
-                <a:spcPts val="0"/>
-              </a:spcBef>
-              <a:spcAft>
-                <a:spcPts val="0"/>
-              </a:spcAft>
-            </a:pPr>
-            <a:r>
-              <a:rPr sz="1100" b="0" i="0">
-                <a:solidFill>
-                  <a:srgbClr val="4B5563"/>
-                </a:solidFill>
-                <a:latin typeface="Calibri"/>
-              </a:rPr>
-              <a:t>PYD411  ·  Mid-term  ·  Dept of Physics, IIT Delhi  ·  Siddharth Kumar &amp; Soumik Roy</a:t>
-            </a:r>
-          </a:p>
-        </p:txBody>
-      </p:sp>
-      <p:sp>
-        <p:nvSpPr>
-          <p:cNvPr id="8" name="TextBox 7"/>
-          <p:cNvSpPr txBox="1"/>
-          <p:nvPr/>
-        </p:nvSpPr>
-        <p:spPr>
-          <a:xfrm>
-            <a:off x="10607040" y="6601968"/>
-            <a:ext cx="1280160" cy="237744"/>
-          </a:xfrm>
-          <a:prstGeom prst="rect">
-            <a:avLst/>
-          </a:prstGeom>
-          <a:noFill/>
-        </p:spPr>
-        <p:txBody>
-          <a:bodyPr wrap="square" lIns="54864" rIns="54864" tIns="27432" bIns="18288">
-            <a:spAutoFit/>
-          </a:bodyPr>
-          <a:lstStyle/>
-          <a:p>
-            <a:pPr algn="r">
-              <a:spcBef>
-                <a:spcPts val="0"/>
-              </a:spcBef>
-              <a:spcAft>
-                <a:spcPts val="0"/>
-              </a:spcAft>
-            </a:pPr>
-            <a:r>
-              <a:rPr sz="1100" b="0" i="0">
-                <a:solidFill>
-                  <a:srgbClr val="4B5563"/>
-                </a:solidFill>
-                <a:latin typeface="Calibri"/>
-              </a:rPr>
-              <a:t>6 / 8</a:t>
-            </a:r>
-          </a:p>
-        </p:txBody>
-      </p:sp>
-      <p:sp>
-        <p:nvSpPr>
-          <p:cNvPr id="9" name="Rounded Rectangle 8"/>
-          <p:cNvSpPr/>
-          <p:nvPr/>
-        </p:nvSpPr>
-        <p:spPr>
-          <a:xfrm>
-            <a:off x="292608" y="914400"/>
-            <a:ext cx="4160520" cy="502920"/>
-          </a:xfrm>
-          <a:prstGeom prst="roundRect">
-            <a:avLst>
-              <a:gd name="adj" fmla="val 12000"/>
-            </a:avLst>
-          </a:prstGeom>
-          <a:solidFill>
-            <a:srgbClr val="EFF5F7"/>
-          </a:solidFill>
-          <a:ln w="15875">
-            <a:solidFill>
-              <a:srgbClr val="1A7A6D"/>
-            </a:solidFill>
-          </a:ln>
-          <a:effectLst/>
-        </p:spPr>
-        <p:style>
-          <a:lnRef idx="1">
-            <a:schemeClr val="accent1"/>
-          </a:lnRef>
-          <a:fillRef idx="3">
-            <a:schemeClr val="accent1"/>
-          </a:fillRef>
-          <a:effectRef idx="2">
-            <a:schemeClr val="accent1"/>
-          </a:effectRef>
-          <a:fontRef idx="minor">
-            <a:schemeClr val="lt1"/>
-          </a:fontRef>
-        </p:style>
-        <p:txBody>
-          <a:bodyPr rtlCol="0" anchor="ctr"/>
-          <a:lstStyle/>
-          <a:p>
-            <a:pPr algn="ctr"/>
-          </a:p>
-        </p:txBody>
-      </p:sp>
-      <p:sp>
-        <p:nvSpPr>
-          <p:cNvPr id="10" name="TextBox 9"/>
-          <p:cNvSpPr txBox="1"/>
-          <p:nvPr/>
-        </p:nvSpPr>
-        <p:spPr>
-          <a:xfrm>
-            <a:off x="292608" y="914400"/>
-            <a:ext cx="4160520" cy="502920"/>
-          </a:xfrm>
-          <a:prstGeom prst="rect">
-            <a:avLst/>
-          </a:prstGeom>
-          <a:noFill/>
-        </p:spPr>
-        <p:txBody>
-          <a:bodyPr wrap="square" lIns="54864" rIns="54864" tIns="27432" bIns="18288" anchor="ctr">
-            <a:spAutoFit/>
-          </a:bodyPr>
-          <a:lstStyle/>
-          <a:p>
-            <a:pPr algn="ctr">
-              <a:spcBef>
-                <a:spcPts val="0"/>
-              </a:spcBef>
-              <a:spcAft>
-                <a:spcPts val="300"/>
-              </a:spcAft>
-            </a:pPr>
-            <a:r>
-              <a:rPr sz="1800" b="0" i="0">
-                <a:solidFill>
-                  <a:srgbClr val="0B3D5C"/>
-                </a:solidFill>
-                <a:latin typeface="Cambria Math"/>
-              </a:rPr>
-              <a:t>η / (ξ R</a:t>
-            </a:r>
-            <a:r>
-              <a:rPr sz="1800" b="0" i="0" baseline="30000">
-                <a:solidFill>
-                  <a:srgbClr val="0B3D5C"/>
-                </a:solidFill>
-                <a:latin typeface="Cambria Math"/>
-              </a:rPr>
-              <a:t>2</a:t>
-            </a:r>
-            <a:r>
-              <a:rPr sz="1800" b="0" i="0">
-                <a:solidFill>
-                  <a:srgbClr val="0B3D5C"/>
-                </a:solidFill>
-                <a:latin typeface="Cambria Math"/>
-              </a:rPr>
-              <a:t>)  ≈  0.006</a:t>
-            </a:r>
-          </a:p>
-        </p:txBody>
-      </p:sp>
-      <p:sp>
-        <p:nvSpPr>
-          <p:cNvPr id="11" name="TextBox 10"/>
-          <p:cNvSpPr txBox="1"/>
-          <p:nvPr/>
-        </p:nvSpPr>
-        <p:spPr>
-          <a:xfrm>
-            <a:off x="292608" y="1435608"/>
-            <a:ext cx="4160520" cy="274320"/>
-          </a:xfrm>
-          <a:prstGeom prst="rect">
-            <a:avLst/>
-          </a:prstGeom>
-          <a:noFill/>
-        </p:spPr>
-        <p:txBody>
-          <a:bodyPr wrap="square" lIns="54864" rIns="54864" tIns="27432" bIns="18288">
-            <a:spAutoFit/>
-          </a:bodyPr>
-          <a:lstStyle/>
-          <a:p>
-            <a:pPr algn="ctr">
-              <a:spcBef>
-                <a:spcPts val="0"/>
-              </a:spcBef>
-              <a:spcAft>
-                <a:spcPts val="0"/>
-              </a:spcAft>
-            </a:pPr>
-            <a:r>
-              <a:rPr sz="1150" b="0" i="0">
-                <a:solidFill>
-                  <a:srgbClr val="4B5563"/>
-                </a:solidFill>
-                <a:latin typeface="Calibri"/>
-              </a:rPr>
-              <a:t>friction dominates viscosity at the cell scale</a:t>
-            </a:r>
-          </a:p>
-        </p:txBody>
-      </p:sp>
-      <p:sp>
-        <p:nvSpPr>
-          <p:cNvPr id="12" name="Rounded Rectangle 11"/>
-          <p:cNvSpPr/>
-          <p:nvPr/>
-        </p:nvSpPr>
-        <p:spPr>
-          <a:xfrm>
-            <a:off x="292608" y="1792224"/>
-            <a:ext cx="4160520" cy="457200"/>
-          </a:xfrm>
-          <a:prstGeom prst="roundRect">
-            <a:avLst>
-              <a:gd name="adj" fmla="val 12000"/>
-            </a:avLst>
-          </a:prstGeom>
-          <a:solidFill>
-            <a:srgbClr val="EFF5F7"/>
-          </a:solidFill>
-          <a:ln w="15875">
-            <a:solidFill>
-              <a:srgbClr val="1A7A6D"/>
-            </a:solidFill>
-          </a:ln>
-          <a:effectLst/>
-        </p:spPr>
-        <p:style>
-          <a:lnRef idx="1">
-            <a:schemeClr val="accent1"/>
-          </a:lnRef>
-          <a:fillRef idx="3">
-            <a:schemeClr val="accent1"/>
-          </a:fillRef>
-          <a:effectRef idx="2">
-            <a:schemeClr val="accent1"/>
-          </a:effectRef>
-          <a:fontRef idx="minor">
-            <a:schemeClr val="lt1"/>
-          </a:fontRef>
-        </p:style>
-        <p:txBody>
-          <a:bodyPr rtlCol="0" anchor="ctr"/>
-          <a:lstStyle/>
-          <a:p>
-            <a:pPr algn="ctr"/>
-          </a:p>
-        </p:txBody>
-      </p:sp>
-      <p:sp>
-        <p:nvSpPr>
-          <p:cNvPr id="13" name="TextBox 12"/>
-          <p:cNvSpPr txBox="1"/>
-          <p:nvPr/>
-        </p:nvSpPr>
-        <p:spPr>
-          <a:xfrm>
-            <a:off x="292608" y="1792224"/>
-            <a:ext cx="4160520" cy="457200"/>
-          </a:xfrm>
-          <a:prstGeom prst="rect">
-            <a:avLst/>
-          </a:prstGeom>
-          <a:noFill/>
-        </p:spPr>
-        <p:txBody>
-          <a:bodyPr wrap="square" lIns="54864" rIns="54864" tIns="27432" bIns="18288" anchor="ctr">
-            <a:spAutoFit/>
-          </a:bodyPr>
-          <a:lstStyle/>
-          <a:p>
-            <a:pPr algn="ctr">
-              <a:spcBef>
-                <a:spcPts val="0"/>
-              </a:spcBef>
-              <a:spcAft>
-                <a:spcPts val="300"/>
-              </a:spcAft>
-            </a:pPr>
-            <a:r>
-              <a:rPr sz="1350" b="0" i="0">
-                <a:solidFill>
-                  <a:srgbClr val="0B3D5C"/>
-                </a:solidFill>
-                <a:latin typeface="Cambria Math"/>
-              </a:rPr>
-              <a:t>0 = −∇p + η∇</a:t>
-            </a:r>
-            <a:r>
-              <a:rPr sz="1350" b="0" i="0" baseline="30000">
-                <a:solidFill>
-                  <a:srgbClr val="0B3D5C"/>
-                </a:solidFill>
-                <a:latin typeface="Cambria Math"/>
-              </a:rPr>
-              <a:t>2</a:t>
-            </a:r>
-            <a:r>
-              <a:rPr sz="1500" b="1" i="0">
-                <a:solidFill>
-                  <a:srgbClr val="0B3D5C"/>
-                </a:solidFill>
-                <a:latin typeface="Cambria Math"/>
-              </a:rPr>
-              <a:t>v</a:t>
-            </a:r>
-            <a:r>
-              <a:rPr sz="1350" b="0" i="0">
-                <a:solidFill>
-                  <a:srgbClr val="0B3D5C"/>
-                </a:solidFill>
-                <a:latin typeface="Cambria Math"/>
-              </a:rPr>
-              <a:t> − ξ</a:t>
-            </a:r>
-            <a:r>
-              <a:rPr sz="1500" b="1" i="0">
-                <a:solidFill>
-                  <a:srgbClr val="0B3D5C"/>
-                </a:solidFill>
-                <a:latin typeface="Cambria Math"/>
-              </a:rPr>
-              <a:t>v</a:t>
-            </a:r>
-            <a:r>
-              <a:rPr sz="1500" b="1" i="1">
-                <a:solidFill>
-                  <a:srgbClr val="0B3D5C"/>
-                </a:solidFill>
-                <a:latin typeface="Cambria Math"/>
-              </a:rPr>
-              <a:t> + f</a:t>
-            </a:r>
-          </a:p>
-        </p:txBody>
-      </p:sp>
-      <p:sp>
-        <p:nvSpPr>
-          <p:cNvPr id="14" name="TextBox 13"/>
-          <p:cNvSpPr txBox="1"/>
-          <p:nvPr/>
-        </p:nvSpPr>
-        <p:spPr>
-          <a:xfrm>
-            <a:off x="292608" y="2267712"/>
-            <a:ext cx="4160520" cy="237744"/>
-          </a:xfrm>
-          <a:prstGeom prst="rect">
-            <a:avLst/>
-          </a:prstGeom>
-          <a:noFill/>
-        </p:spPr>
-        <p:txBody>
-          <a:bodyPr wrap="square" lIns="54864" rIns="54864" tIns="27432" bIns="18288">
-            <a:spAutoFit/>
-          </a:bodyPr>
-          <a:lstStyle/>
-          <a:p>
-            <a:pPr algn="ctr">
-              <a:spcBef>
-                <a:spcPts val="0"/>
-              </a:spcBef>
-              <a:spcAft>
-                <a:spcPts val="0"/>
-              </a:spcAft>
-            </a:pPr>
-            <a:r>
-              <a:rPr sz="2000" b="1" i="0">
-                <a:solidFill>
-                  <a:srgbClr val="1A7A6D"/>
-                </a:solidFill>
-                <a:latin typeface="Calibri"/>
-              </a:rPr>
-              <a:t>⇓</a:t>
-            </a:r>
-          </a:p>
-        </p:txBody>
-      </p:sp>
-      <p:sp>
-        <p:nvSpPr>
-          <p:cNvPr id="15" name="Rounded Rectangle 14"/>
-          <p:cNvSpPr/>
-          <p:nvPr/>
-        </p:nvSpPr>
-        <p:spPr>
-          <a:xfrm>
-            <a:off x="292608" y="2523744"/>
-            <a:ext cx="4160520" cy="475488"/>
-          </a:xfrm>
-          <a:prstGeom prst="roundRect">
-            <a:avLst>
-              <a:gd name="adj" fmla="val 12000"/>
-            </a:avLst>
-          </a:prstGeom>
-          <a:solidFill>
-            <a:srgbClr val="E8F3F1"/>
-          </a:solidFill>
-          <a:ln w="15875">
-            <a:solidFill>
-              <a:srgbClr val="1A7A6D"/>
-            </a:solidFill>
-          </a:ln>
-          <a:effectLst/>
-        </p:spPr>
-        <p:style>
-          <a:lnRef idx="1">
-            <a:schemeClr val="accent1"/>
-          </a:lnRef>
-          <a:fillRef idx="3">
-            <a:schemeClr val="accent1"/>
-          </a:fillRef>
-          <a:effectRef idx="2">
-            <a:schemeClr val="accent1"/>
-          </a:effectRef>
-          <a:fontRef idx="minor">
-            <a:schemeClr val="lt1"/>
-          </a:fontRef>
-        </p:style>
-        <p:txBody>
-          <a:bodyPr rtlCol="0" anchor="ctr"/>
-          <a:lstStyle/>
-          <a:p>
-            <a:pPr algn="ctr"/>
-          </a:p>
-        </p:txBody>
-      </p:sp>
-      <p:sp>
-        <p:nvSpPr>
-          <p:cNvPr id="16" name="TextBox 15"/>
-          <p:cNvSpPr txBox="1"/>
-          <p:nvPr/>
-        </p:nvSpPr>
-        <p:spPr>
-          <a:xfrm>
-            <a:off x="292608" y="2523744"/>
-            <a:ext cx="4160520" cy="475488"/>
-          </a:xfrm>
-          <a:prstGeom prst="rect">
-            <a:avLst/>
-          </a:prstGeom>
-          <a:noFill/>
-        </p:spPr>
-        <p:txBody>
-          <a:bodyPr wrap="square" lIns="54864" rIns="54864" tIns="27432" bIns="18288" anchor="ctr">
-            <a:spAutoFit/>
-          </a:bodyPr>
-          <a:lstStyle/>
-          <a:p>
-            <a:pPr algn="ctr">
-              <a:spcBef>
-                <a:spcPts val="0"/>
-              </a:spcBef>
-              <a:spcAft>
-                <a:spcPts val="300"/>
-              </a:spcAft>
-            </a:pPr>
-            <a:r>
-              <a:rPr sz="2000" b="1" i="0">
-                <a:solidFill>
-                  <a:srgbClr val="0B3D5C"/>
-                </a:solidFill>
-                <a:latin typeface="Cambria Math"/>
-              </a:rPr>
-              <a:t>v</a:t>
-            </a:r>
-            <a:r>
-              <a:rPr sz="2000" b="1" i="1">
-                <a:solidFill>
-                  <a:srgbClr val="0B3D5C"/>
-                </a:solidFill>
-                <a:latin typeface="Cambria Math"/>
-              </a:rPr>
-              <a:t>  =  f</a:t>
-            </a:r>
-            <a:r>
-              <a:rPr sz="1800" b="0" i="0">
-                <a:solidFill>
-                  <a:srgbClr val="0B3D5C"/>
-                </a:solidFill>
-                <a:latin typeface="Cambria Math"/>
-              </a:rPr>
-              <a:t> / ξ</a:t>
-            </a:r>
-          </a:p>
-        </p:txBody>
-      </p:sp>
-      <p:sp>
-        <p:nvSpPr>
-          <p:cNvPr id="17" name="TextBox 16"/>
-          <p:cNvSpPr txBox="1"/>
-          <p:nvPr/>
-        </p:nvSpPr>
-        <p:spPr>
-          <a:xfrm>
-            <a:off x="292608" y="3054096"/>
-            <a:ext cx="4160520" cy="219456"/>
-          </a:xfrm>
-          <a:prstGeom prst="rect">
-            <a:avLst/>
-          </a:prstGeom>
-          <a:noFill/>
-        </p:spPr>
-        <p:txBody>
-          <a:bodyPr wrap="square" lIns="54864" rIns="54864" tIns="27432" bIns="18288">
-            <a:spAutoFit/>
-          </a:bodyPr>
-          <a:lstStyle/>
-          <a:p>
-            <a:pPr algn="ctr">
-              <a:spcBef>
-                <a:spcPts val="0"/>
-              </a:spcBef>
-              <a:spcAft>
-                <a:spcPts val="0"/>
-              </a:spcAft>
-            </a:pPr>
-            <a:r>
-              <a:rPr sz="2000" b="1" i="0">
-                <a:solidFill>
-                  <a:srgbClr val="1A7A6D"/>
-                </a:solidFill>
-                <a:latin typeface="Calibri"/>
-              </a:rPr>
-              <a:t>⇓</a:t>
-            </a:r>
-          </a:p>
-        </p:txBody>
-      </p:sp>
-      <p:sp>
-        <p:nvSpPr>
-          <p:cNvPr id="18" name="Rounded Rectangle 17"/>
-          <p:cNvSpPr/>
-          <p:nvPr/>
-        </p:nvSpPr>
-        <p:spPr>
-          <a:xfrm>
-            <a:off x="292608" y="3291840"/>
-            <a:ext cx="4160520" cy="457200"/>
-          </a:xfrm>
-          <a:prstGeom prst="roundRect">
-            <a:avLst>
-              <a:gd name="adj" fmla="val 12000"/>
-            </a:avLst>
-          </a:prstGeom>
-          <a:solidFill>
-            <a:srgbClr val="EFF5F7"/>
-          </a:solidFill>
-          <a:ln w="15875">
-            <a:solidFill>
-              <a:srgbClr val="1A7A6D"/>
-            </a:solidFill>
-          </a:ln>
-          <a:effectLst/>
-        </p:spPr>
-        <p:style>
-          <a:lnRef idx="1">
-            <a:schemeClr val="accent1"/>
-          </a:lnRef>
-          <a:fillRef idx="3">
-            <a:schemeClr val="accent1"/>
-          </a:fillRef>
-          <a:effectRef idx="2">
-            <a:schemeClr val="accent1"/>
-          </a:effectRef>
-          <a:fontRef idx="minor">
-            <a:schemeClr val="lt1"/>
-          </a:fontRef>
-        </p:style>
-        <p:txBody>
-          <a:bodyPr rtlCol="0" anchor="ctr"/>
-          <a:lstStyle/>
-          <a:p>
-            <a:pPr algn="ctr"/>
-          </a:p>
-        </p:txBody>
-      </p:sp>
-      <p:sp>
-        <p:nvSpPr>
-          <p:cNvPr id="19" name="TextBox 18"/>
-          <p:cNvSpPr txBox="1"/>
-          <p:nvPr/>
-        </p:nvSpPr>
-        <p:spPr>
-          <a:xfrm>
-            <a:off x="292608" y="3291840"/>
-            <a:ext cx="4160520" cy="457200"/>
-          </a:xfrm>
-          <a:prstGeom prst="rect">
-            <a:avLst/>
-          </a:prstGeom>
-          <a:noFill/>
-        </p:spPr>
-        <p:txBody>
-          <a:bodyPr wrap="square" lIns="54864" rIns="54864" tIns="27432" bIns="18288" anchor="ctr">
-            <a:spAutoFit/>
-          </a:bodyPr>
-          <a:lstStyle/>
-          <a:p>
-            <a:pPr algn="ctr">
-              <a:spcBef>
-                <a:spcPts val="0"/>
-              </a:spcBef>
-              <a:spcAft>
-                <a:spcPts val="300"/>
-              </a:spcAft>
-            </a:pPr>
-            <a:r>
-              <a:rPr sz="1400" b="0" i="0">
-                <a:solidFill>
-                  <a:srgbClr val="0B3D5C"/>
-                </a:solidFill>
-                <a:latin typeface="Cambria Math"/>
-              </a:rPr>
-              <a:t>f</a:t>
-            </a:r>
-            <a:r>
-              <a:rPr sz="1400" b="0" i="0" baseline="-25000">
-                <a:solidFill>
-                  <a:srgbClr val="0B3D5C"/>
-                </a:solidFill>
-                <a:latin typeface="Cambria Math"/>
-              </a:rPr>
-              <a:t>act</a:t>
-            </a:r>
-            <a:r>
-              <a:rPr sz="1400" b="0" i="0">
-                <a:solidFill>
-                  <a:srgbClr val="0B3D5C"/>
-                </a:solidFill>
-                <a:latin typeface="Cambria Math"/>
-              </a:rPr>
-              <a:t> = −ζ ∇·(φ</a:t>
-            </a:r>
-            <a:r>
-              <a:rPr sz="1500" b="1" i="0">
-                <a:solidFill>
-                  <a:srgbClr val="0B3D5C"/>
-                </a:solidFill>
-                <a:latin typeface="Cambria Math"/>
-              </a:rPr>
-              <a:t>P</a:t>
-            </a:r>
-            <a:r>
-              <a:rPr sz="1500" b="1" i="0">
-                <a:solidFill>
-                  <a:srgbClr val="0B3D5C"/>
-                </a:solidFill>
-                <a:latin typeface="Cambria Math"/>
-              </a:rPr>
-              <a:t>P</a:t>
-            </a:r>
-            <a:r>
-              <a:rPr sz="1400" b="0" i="0">
-                <a:solidFill>
-                  <a:srgbClr val="0B3D5C"/>
-                </a:solidFill>
-                <a:latin typeface="Cambria Math"/>
-              </a:rPr>
-              <a:t>)</a:t>
-            </a:r>
-          </a:p>
-        </p:txBody>
-      </p:sp>
-      <p:sp>
-        <p:nvSpPr>
-          <p:cNvPr id="20" name="TextBox 19"/>
-          <p:cNvSpPr txBox="1"/>
-          <p:nvPr/>
-        </p:nvSpPr>
-        <p:spPr>
-          <a:xfrm>
-            <a:off x="292608" y="3767328"/>
-            <a:ext cx="4160520" cy="219456"/>
-          </a:xfrm>
-          <a:prstGeom prst="rect">
-            <a:avLst/>
-          </a:prstGeom>
-          <a:noFill/>
-        </p:spPr>
-        <p:txBody>
-          <a:bodyPr wrap="square" lIns="54864" rIns="54864" tIns="27432" bIns="18288">
-            <a:spAutoFit/>
-          </a:bodyPr>
-          <a:lstStyle/>
-          <a:p>
-            <a:pPr algn="ctr">
-              <a:spcBef>
-                <a:spcPts val="0"/>
-              </a:spcBef>
-              <a:spcAft>
-                <a:spcPts val="0"/>
-              </a:spcAft>
-            </a:pPr>
-            <a:r>
-              <a:rPr sz="2000" b="1" i="0">
-                <a:solidFill>
-                  <a:srgbClr val="1A7A6D"/>
-                </a:solidFill>
-                <a:latin typeface="Calibri"/>
-              </a:rPr>
-              <a:t>⇓</a:t>
-            </a:r>
-          </a:p>
-        </p:txBody>
-      </p:sp>
-      <p:sp>
-        <p:nvSpPr>
-          <p:cNvPr id="21" name="Rounded Rectangle 20"/>
-          <p:cNvSpPr/>
-          <p:nvPr/>
-        </p:nvSpPr>
-        <p:spPr>
-          <a:xfrm>
-            <a:off x="292608" y="4005072"/>
-            <a:ext cx="4160520" cy="475488"/>
-          </a:xfrm>
-          <a:prstGeom prst="roundRect">
-            <a:avLst>
-              <a:gd name="adj" fmla="val 12000"/>
-            </a:avLst>
-          </a:prstGeom>
-          <a:solidFill>
-            <a:srgbClr val="E8F3F1"/>
-          </a:solidFill>
-          <a:ln w="15875">
-            <a:solidFill>
-              <a:srgbClr val="1A7A6D"/>
-            </a:solidFill>
-          </a:ln>
-          <a:effectLst/>
-        </p:spPr>
-        <p:style>
-          <a:lnRef idx="1">
-            <a:schemeClr val="accent1"/>
-          </a:lnRef>
-          <a:fillRef idx="3">
-            <a:schemeClr val="accent1"/>
-          </a:fillRef>
-          <a:effectRef idx="2">
-            <a:schemeClr val="accent1"/>
-          </a:effectRef>
-          <a:fontRef idx="minor">
-            <a:schemeClr val="lt1"/>
-          </a:fontRef>
-        </p:style>
-        <p:txBody>
-          <a:bodyPr rtlCol="0" anchor="ctr"/>
-          <a:lstStyle/>
-          <a:p>
-            <a:pPr algn="ctr"/>
-          </a:p>
-        </p:txBody>
-      </p:sp>
-      <p:sp>
-        <p:nvSpPr>
-          <p:cNvPr id="22" name="TextBox 21"/>
-          <p:cNvSpPr txBox="1"/>
-          <p:nvPr/>
-        </p:nvSpPr>
-        <p:spPr>
-          <a:xfrm>
-            <a:off x="292608" y="4005072"/>
-            <a:ext cx="4160520" cy="475488"/>
-          </a:xfrm>
-          <a:prstGeom prst="rect">
-            <a:avLst/>
-          </a:prstGeom>
-          <a:noFill/>
-        </p:spPr>
-        <p:txBody>
-          <a:bodyPr wrap="square" lIns="54864" rIns="54864" tIns="27432" bIns="18288" anchor="ctr">
-            <a:spAutoFit/>
-          </a:bodyPr>
-          <a:lstStyle/>
-          <a:p>
-            <a:pPr algn="ctr">
-              <a:spcBef>
-                <a:spcPts val="0"/>
-              </a:spcBef>
-              <a:spcAft>
-                <a:spcPts val="300"/>
-              </a:spcAft>
-            </a:pPr>
-            <a:r>
-              <a:rPr sz="1700" b="1" i="0">
-                <a:solidFill>
-                  <a:srgbClr val="0B3D5C"/>
-                </a:solidFill>
-                <a:latin typeface="Cambria Math"/>
-              </a:rPr>
-              <a:t>v</a:t>
-            </a:r>
-            <a:r>
-              <a:rPr sz="1300" b="0" i="0">
-                <a:solidFill>
-                  <a:srgbClr val="0B3D5C"/>
-                </a:solidFill>
-                <a:latin typeface="Cambria Math"/>
-              </a:rPr>
-              <a:t>  =  −(ζ/ξ) ∇·(φ</a:t>
-            </a:r>
-            <a:r>
-              <a:rPr sz="1400" b="1" i="0">
-                <a:solidFill>
-                  <a:srgbClr val="0B3D5C"/>
-                </a:solidFill>
-                <a:latin typeface="Cambria Math"/>
-              </a:rPr>
-              <a:t>P</a:t>
-            </a:r>
-            <a:r>
-              <a:rPr sz="1400" b="1" i="0">
-                <a:solidFill>
-                  <a:srgbClr val="0B3D5C"/>
-                </a:solidFill>
-                <a:latin typeface="Cambria Math"/>
-              </a:rPr>
-              <a:t>P</a:t>
-            </a:r>
-            <a:r>
-              <a:rPr sz="1300" b="0" i="0">
-                <a:solidFill>
-                  <a:srgbClr val="0B3D5C"/>
-                </a:solidFill>
-                <a:latin typeface="Cambria Math"/>
-              </a:rPr>
-              <a:t>)</a:t>
-            </a:r>
-          </a:p>
-        </p:txBody>
-      </p:sp>
-      <p:sp>
-        <p:nvSpPr>
-          <p:cNvPr id="23" name="Rounded Rectangle 22"/>
-          <p:cNvSpPr/>
-          <p:nvPr/>
-        </p:nvSpPr>
-        <p:spPr>
-          <a:xfrm>
-            <a:off x="292608" y="4617720"/>
-            <a:ext cx="4160520" cy="457200"/>
-          </a:xfrm>
-          <a:prstGeom prst="roundRect">
-            <a:avLst>
-              <a:gd name="adj" fmla="val 12000"/>
-            </a:avLst>
-          </a:prstGeom>
-          <a:solidFill>
-            <a:srgbClr val="EFF5F7"/>
-          </a:solidFill>
-          <a:ln w="15875">
-            <a:solidFill>
-              <a:srgbClr val="1A7A6D"/>
-            </a:solidFill>
-          </a:ln>
-          <a:effectLst/>
-        </p:spPr>
-        <p:style>
-          <a:lnRef idx="1">
-            <a:schemeClr val="accent1"/>
-          </a:lnRef>
-          <a:fillRef idx="3">
-            <a:schemeClr val="accent1"/>
-          </a:fillRef>
-          <a:effectRef idx="2">
-            <a:schemeClr val="accent1"/>
-          </a:effectRef>
-          <a:fontRef idx="minor">
-            <a:schemeClr val="lt1"/>
-          </a:fontRef>
-        </p:style>
-        <p:txBody>
-          <a:bodyPr rtlCol="0" anchor="ctr"/>
-          <a:lstStyle/>
-          <a:p>
-            <a:pPr algn="ctr"/>
-          </a:p>
-        </p:txBody>
-      </p:sp>
-      <p:sp>
-        <p:nvSpPr>
-          <p:cNvPr id="24" name="TextBox 23"/>
-          <p:cNvSpPr txBox="1"/>
-          <p:nvPr/>
-        </p:nvSpPr>
-        <p:spPr>
-          <a:xfrm>
-            <a:off x="292608" y="4617720"/>
-            <a:ext cx="4160520" cy="457200"/>
-          </a:xfrm>
-          <a:prstGeom prst="rect">
-            <a:avLst/>
-          </a:prstGeom>
-          <a:noFill/>
-        </p:spPr>
-        <p:txBody>
-          <a:bodyPr wrap="square" lIns="54864" rIns="54864" tIns="27432" bIns="18288" anchor="ctr">
-            <a:spAutoFit/>
-          </a:bodyPr>
-          <a:lstStyle/>
-          <a:p>
-            <a:pPr algn="ctr">
-              <a:spcBef>
-                <a:spcPts val="0"/>
-              </a:spcBef>
-              <a:spcAft>
-                <a:spcPts val="300"/>
-              </a:spcAft>
-            </a:pPr>
-            <a:r>
-              <a:rPr sz="1900" b="1" i="0">
-                <a:solidFill>
-                  <a:srgbClr val="0B3D5C"/>
-                </a:solidFill>
-                <a:latin typeface="Cambria Math"/>
-              </a:rPr>
-              <a:t>u</a:t>
-            </a:r>
-            <a:r>
-              <a:rPr sz="1700" b="0" i="0">
-                <a:solidFill>
-                  <a:srgbClr val="0B3D5C"/>
-                </a:solidFill>
-                <a:latin typeface="Cambria Math"/>
-              </a:rPr>
-              <a:t>  =  </a:t>
-            </a:r>
-            <a:r>
-              <a:rPr sz="1900" b="1" i="0">
-                <a:solidFill>
-                  <a:srgbClr val="0B3D5C"/>
-                </a:solidFill>
-                <a:latin typeface="Cambria Math"/>
-              </a:rPr>
-              <a:t>v</a:t>
-            </a:r>
-            <a:r>
-              <a:rPr sz="1700" b="0" i="0">
-                <a:solidFill>
-                  <a:srgbClr val="0B3D5C"/>
-                </a:solidFill>
-                <a:latin typeface="Cambria Math"/>
-              </a:rPr>
-              <a:t>  +  w</a:t>
-            </a:r>
-            <a:r>
-              <a:rPr sz="1700" b="0" i="0" baseline="-25000">
-                <a:solidFill>
-                  <a:srgbClr val="0B3D5C"/>
-                </a:solidFill>
-                <a:latin typeface="Cambria Math"/>
-              </a:rPr>
-              <a:t>0</a:t>
-            </a:r>
-            <a:r>
-              <a:rPr sz="1900" b="1" i="0">
-                <a:solidFill>
-                  <a:srgbClr val="0B3D5C"/>
-                </a:solidFill>
-                <a:latin typeface="Cambria Math"/>
-              </a:rPr>
-              <a:t>P</a:t>
-            </a:r>
-          </a:p>
-        </p:txBody>
-      </p:sp>
-      <p:sp>
-        <p:nvSpPr>
-          <p:cNvPr id="25" name="TextBox 24"/>
-          <p:cNvSpPr txBox="1"/>
-          <p:nvPr/>
-        </p:nvSpPr>
-        <p:spPr>
-          <a:xfrm>
-            <a:off x="292608" y="5138928"/>
-            <a:ext cx="4160520" cy="594360"/>
-          </a:xfrm>
-          <a:prstGeom prst="rect">
-            <a:avLst/>
-          </a:prstGeom>
-          <a:noFill/>
-        </p:spPr>
-        <p:txBody>
-          <a:bodyPr wrap="square" lIns="54864" rIns="54864" tIns="27432" bIns="18288">
-            <a:spAutoFit/>
-          </a:bodyPr>
-          <a:lstStyle/>
-          <a:p>
-            <a:pPr algn="ctr">
-              <a:lnSpc>
-                <a:spcPct val="105000"/>
-              </a:lnSpc>
-              <a:spcBef>
-                <a:spcPts val="0"/>
-              </a:spcBef>
-              <a:spcAft>
-                <a:spcPts val="0"/>
-              </a:spcAft>
-            </a:pPr>
-            <a:r>
-              <a:rPr sz="1200" b="1" i="0">
-                <a:solidFill>
-                  <a:srgbClr val="0B3D5C"/>
-                </a:solidFill>
-                <a:latin typeface="Calibri"/>
-              </a:rPr>
-              <a:t>No global Stokes / pressure solve — only local finite-difference stencils.</a:t>
-            </a:r>
-          </a:p>
-        </p:txBody>
-      </p:sp>
-      <p:pic>
-        <p:nvPicPr>
-          <p:cNvPr id="26" name="Picture 25" descr="fig_v4_montage.png"/>
-          <p:cNvPicPr>
-            <a:picLocks noChangeAspect="1"/>
-          </p:cNvPicPr>
-          <p:nvPr/>
-        </p:nvPicPr>
-        <p:blipFill>
-          <a:blip r:embed="rId2"/>
-          <a:stretch>
-            <a:fillRect/>
-          </a:stretch>
-        </p:blipFill>
-        <p:spPr>
-          <a:xfrm>
-            <a:off x="6585839" y="914400"/>
-            <a:ext cx="3333242" cy="1207008"/>
-          </a:xfrm>
-          <a:prstGeom prst="rect">
-            <a:avLst/>
-          </a:prstGeom>
-        </p:spPr>
-      </p:pic>
-      <p:pic>
-        <p:nvPicPr>
-          <p:cNvPr id="27" name="Picture 26" descr="fig_v4_snapshots.png"/>
-          <p:cNvPicPr>
-            <a:picLocks noChangeAspect="1"/>
-          </p:cNvPicPr>
-          <p:nvPr/>
-        </p:nvPicPr>
-        <p:blipFill>
-          <a:blip r:embed="rId3"/>
-          <a:stretch>
-            <a:fillRect/>
-          </a:stretch>
-        </p:blipFill>
-        <p:spPr>
-          <a:xfrm>
-            <a:off x="6585839" y="2157984"/>
-            <a:ext cx="3333242" cy="1207008"/>
-          </a:xfrm>
-          <a:prstGeom prst="rect">
-            <a:avLst/>
-          </a:prstGeom>
-        </p:spPr>
-      </p:pic>
-      <p:pic>
-        <p:nvPicPr>
-          <p:cNvPr id="28" name="Picture 27" descr="fig_v4_diagnostics.png"/>
-          <p:cNvPicPr>
-            <a:picLocks noChangeAspect="1"/>
-          </p:cNvPicPr>
-          <p:nvPr/>
-        </p:nvPicPr>
-        <p:blipFill>
-          <a:blip r:embed="rId4"/>
-          <a:stretch>
-            <a:fillRect/>
-          </a:stretch>
-        </p:blipFill>
-        <p:spPr>
-          <a:xfrm>
-            <a:off x="6803636" y="3401568"/>
-            <a:ext cx="2897647" cy="777240"/>
-          </a:xfrm>
-          <a:prstGeom prst="rect">
-            <a:avLst/>
-          </a:prstGeom>
-        </p:spPr>
-      </p:pic>
-      <p:sp>
-        <p:nvSpPr>
-          <p:cNvPr id="29" name="Rounded Rectangle 28"/>
-          <p:cNvSpPr/>
-          <p:nvPr/>
-        </p:nvSpPr>
-        <p:spPr>
-          <a:xfrm>
-            <a:off x="4617720" y="4251960"/>
-            <a:ext cx="7269480" cy="2331720"/>
-          </a:xfrm>
-          <a:prstGeom prst="roundRect">
-            <a:avLst>
-              <a:gd name="adj" fmla="val 8000"/>
-            </a:avLst>
-          </a:prstGeom>
-          <a:solidFill>
-            <a:srgbClr val="F3F6F9"/>
-          </a:solidFill>
-          <a:ln>
-            <a:noFill/>
-          </a:ln>
-          <a:effectLst/>
-        </p:spPr>
-        <p:style>
-          <a:lnRef idx="1">
-            <a:schemeClr val="accent1"/>
-          </a:lnRef>
-          <a:fillRef idx="3">
-            <a:schemeClr val="accent1"/>
-          </a:fillRef>
-          <a:effectRef idx="2">
-            <a:schemeClr val="accent1"/>
-          </a:effectRef>
-          <a:fontRef idx="minor">
-            <a:schemeClr val="lt1"/>
-          </a:fontRef>
-        </p:style>
-        <p:txBody>
-          <a:bodyPr rtlCol="0" anchor="ctr"/>
-          <a:lstStyle/>
-          <a:p>
-            <a:pPr algn="ctr"/>
-          </a:p>
-        </p:txBody>
-      </p:sp>
-      <p:sp>
-        <p:nvSpPr>
-          <p:cNvPr id="30" name="TextBox 29"/>
-          <p:cNvSpPr txBox="1"/>
-          <p:nvPr/>
-        </p:nvSpPr>
-        <p:spPr>
-          <a:xfrm>
-            <a:off x="4800600" y="4343400"/>
-            <a:ext cx="6903720" cy="2176272"/>
-          </a:xfrm>
-          <a:prstGeom prst="rect">
-            <a:avLst/>
-          </a:prstGeom>
-          <a:noFill/>
-        </p:spPr>
-        <p:txBody>
-          <a:bodyPr wrap="square" lIns="54864" rIns="54864" tIns="27432" bIns="18288">
-            <a:spAutoFit/>
-          </a:bodyPr>
-          <a:lstStyle/>
-          <a:p>
-            <a:pPr algn="l">
-              <a:spcBef>
-                <a:spcPts val="0"/>
-              </a:spcBef>
-              <a:spcAft>
-                <a:spcPts val="500"/>
-              </a:spcAft>
-            </a:pPr>
-            <a:r>
-              <a:rPr sz="1300" b="1" i="0">
-                <a:solidFill>
-                  <a:srgbClr val="0B3D5C"/>
-                </a:solidFill>
-                <a:latin typeface="Calibri"/>
-              </a:rPr>
-              <a:t>Travel 239.9  ·  Time 299  (model units)  ·  Speed 0.801  ·  Aspect ∼ 3.2</a:t>
-            </a:r>
-          </a:p>
-          <a:p>
-            <a:pPr algn="l">
-              <a:spcBef>
-                <a:spcPts val="0"/>
-              </a:spcBef>
-              <a:spcAft>
-                <a:spcPts val="500"/>
-              </a:spcAft>
-            </a:pPr>
-            <a:r>
-              <a:rPr sz="1300" b="1" i="0">
-                <a:solidFill>
-                  <a:srgbClr val="0B3D5C"/>
-                </a:solidFill>
-                <a:latin typeface="Calibri"/>
-              </a:rPr>
-              <a:t>yᴄᴍ = 0  ·  Area +15%  ·  h/h₀ ≈ 0.87  (≈ 13% thinning)</a:t>
-            </a:r>
-          </a:p>
-          <a:p>
-            <a:pPr algn="l">
-              <a:spcBef>
-                <a:spcPts val="0"/>
-              </a:spcBef>
-              <a:spcAft>
-                <a:spcPts val="400"/>
-              </a:spcAft>
-            </a:pPr>
-            <a:r>
-              <a:rPr sz="1200" b="0" i="0">
-                <a:solidFill>
-                  <a:srgbClr val="1F2937"/>
-                </a:solidFill>
-                <a:latin typeface="Calibri"/>
-              </a:rPr>
-              <a:t>Volume conserved; projected area is allowed to change.</a:t>
-            </a:r>
-          </a:p>
-          <a:p>
-            <a:pPr algn="l">
-              <a:spcBef>
-                <a:spcPts val="0"/>
-              </a:spcBef>
-              <a:spcAft>
-                <a:spcPts val="500"/>
-              </a:spcAft>
-            </a:pPr>
-            <a:r>
-              <a:rPr sz="1200" b="0" i="0">
-                <a:solidFill>
-                  <a:srgbClr val="1F2937"/>
-                </a:solidFill>
-                <a:latin typeface="Cambria Math"/>
-              </a:rPr>
-              <a:t>k</a:t>
-            </a:r>
-            <a:r>
-              <a:rPr sz="1200" b="0" i="0" baseline="-25000">
-                <a:solidFill>
-                  <a:srgbClr val="1F2937"/>
-                </a:solidFill>
-                <a:latin typeface="Cambria Math"/>
-              </a:rPr>
-              <a:t>A</a:t>
-            </a:r>
-            <a:r>
-              <a:rPr sz="1200" b="0" i="0">
-                <a:solidFill>
-                  <a:srgbClr val="1F2937"/>
-                </a:solidFill>
-                <a:latin typeface="Cambria Math"/>
-              </a:rPr>
-              <a:t> = 0  ⇒  unbounded spreading / inflation</a:t>
-            </a:r>
-          </a:p>
-          <a:p>
-            <a:pPr algn="l">
-              <a:spcBef>
-                <a:spcPts val="0"/>
-              </a:spcBef>
-              <a:spcAft>
-                <a:spcPts val="500"/>
-              </a:spcAft>
-            </a:pPr>
-            <a:r>
-              <a:rPr sz="1200" b="0" i="0">
-                <a:solidFill>
-                  <a:srgbClr val="4B5563"/>
-                </a:solidFill>
-                <a:latin typeface="Calibri"/>
-              </a:rPr>
-              <a:t>V3 and V4 agree to within 0.2% in the comparable (flow-off, rigid-area) limit.</a:t>
-            </a:r>
-          </a:p>
-          <a:p>
-            <a:pPr algn="l">
-              <a:spcBef>
-                <a:spcPts val="0"/>
-              </a:spcBef>
-              <a:spcAft>
-                <a:spcPts val="500"/>
-              </a:spcAft>
-            </a:pPr>
-            <a:r>
-              <a:rPr sz="1200" b="0" i="0">
-                <a:solidFill>
-                  <a:srgbClr val="1F2937"/>
-                </a:solidFill>
-                <a:latin typeface="Calibri"/>
-              </a:rPr>
-              <a:t>Cost/step: 2.70 → 1.10 ms   ·   stable dt: 0.01 → 0.03</a:t>
-            </a:r>
-          </a:p>
-          <a:p>
-            <a:pPr algn="l">
-              <a:lnSpc>
-                <a:spcPct val="105000"/>
-              </a:lnSpc>
-              <a:spcBef>
-                <a:spcPts val="0"/>
-              </a:spcBef>
-              <a:spcAft>
-                <a:spcPts val="300"/>
-              </a:spcAft>
-            </a:pPr>
-            <a:r>
-              <a:rPr sz="1250" b="1" i="0">
-                <a:solidFill>
-                  <a:srgbClr val="1A7A6D"/>
-                </a:solidFill>
-                <a:latin typeface="Calibri"/>
-              </a:rPr>
-              <a:t>Overall runtime ≈ 5× faster, including the larger stable time-step.</a:t>
-            </a:r>
-          </a:p>
-          <a:p>
-            <a:pPr algn="l">
-              <a:spcBef>
-                <a:spcPts val="0"/>
-              </a:spcBef>
-              <a:spcAft>
-                <a:spcPts val="0"/>
-              </a:spcAft>
-            </a:pPr>
-            <a:r>
-              <a:rPr sz="1200" b="0" i="0">
-                <a:solidFill>
-                  <a:srgbClr val="1F2937"/>
-                </a:solidFill>
-                <a:latin typeface="Calibri"/>
-              </a:rPr>
-              <a:t>Local formulation — a practical starting point for many cells.</a:t>
-            </a:r>
-          </a:p>
-        </p:txBody>
-      </p:sp>
-    </p:spTree>
-  </p:cSld>
-  <p:clrMapOvr>
-    <a:masterClrMapping/>
-  </p:clrMapOvr>
-</p:sld>
-</file>
-
 <file path=ppt/slides/slide7.xml><?xml version="1.0" encoding="utf-8"?>
 <p:sld xmlns:a="http://schemas.openxmlformats.org/drawingml/2006/main" xmlns:p="http://schemas.openxmlformats.org/presentationml/2006/main" xmlns:r="http://schemas.openxmlformats.org/officeDocument/2006/relationships">
   <p:cSld>
@@ -12091,7 +12952,7 @@
                 </a:solidFill>
                 <a:latin typeface="Calibri"/>
               </a:rPr>
-              <a:t>What the simulations establish</a:t>
+              <a:t>Version 4 — crawling without a Stokes solve</a:t>
             </a:r>
           </a:p>
         </p:txBody>
@@ -12219,7 +13080,7 @@
                 </a:solidFill>
                 <a:latin typeface="Calibri"/>
               </a:rPr>
-              <a:t>7 / 8</a:t>
+              <a:t>7 / 9</a:t>
             </a:r>
           </a:p>
         </p:txBody>
@@ -12232,8 +13093,1040 @@
         </p:nvSpPr>
         <p:spPr>
           <a:xfrm>
-            <a:off x="365760" y="1051560"/>
-            <a:ext cx="11430000" cy="969264"/>
+            <a:off x="292608" y="914400"/>
+            <a:ext cx="4160520" cy="502920"/>
+          </a:xfrm>
+          <a:prstGeom prst="roundRect">
+            <a:avLst>
+              <a:gd name="adj" fmla="val 12000"/>
+            </a:avLst>
+          </a:prstGeom>
+          <a:solidFill>
+            <a:srgbClr val="EFF5F7"/>
+          </a:solidFill>
+          <a:ln w="15875">
+            <a:solidFill>
+              <a:srgbClr val="1A7A6D"/>
+            </a:solidFill>
+          </a:ln>
+          <a:effectLst/>
+        </p:spPr>
+        <p:style>
+          <a:lnRef idx="1">
+            <a:schemeClr val="accent1"/>
+          </a:lnRef>
+          <a:fillRef idx="3">
+            <a:schemeClr val="accent1"/>
+          </a:fillRef>
+          <a:effectRef idx="2">
+            <a:schemeClr val="accent1"/>
+          </a:effectRef>
+          <a:fontRef idx="minor">
+            <a:schemeClr val="lt1"/>
+          </a:fontRef>
+        </p:style>
+        <p:txBody>
+          <a:bodyPr rtlCol="0" anchor="ctr"/>
+          <a:lstStyle/>
+          <a:p>
+            <a:pPr algn="ctr"/>
+          </a:p>
+        </p:txBody>
+      </p:sp>
+      <p:sp>
+        <p:nvSpPr>
+          <p:cNvPr id="10" name="TextBox 9"/>
+          <p:cNvSpPr txBox="1"/>
+          <p:nvPr/>
+        </p:nvSpPr>
+        <p:spPr>
+          <a:xfrm>
+            <a:off x="292608" y="914400"/>
+            <a:ext cx="4160520" cy="502920"/>
+          </a:xfrm>
+          <a:prstGeom prst="rect">
+            <a:avLst/>
+          </a:prstGeom>
+          <a:noFill/>
+        </p:spPr>
+        <p:txBody>
+          <a:bodyPr wrap="square" lIns="54864" rIns="54864" tIns="27432" bIns="18288" anchor="ctr">
+            <a:spAutoFit/>
+          </a:bodyPr>
+          <a:lstStyle/>
+          <a:p>
+            <a:pPr algn="ctr">
+              <a:spcBef>
+                <a:spcPts val="0"/>
+              </a:spcBef>
+              <a:spcAft>
+                <a:spcPts val="300"/>
+              </a:spcAft>
+            </a:pPr>
+            <a:r>
+              <a:rPr sz="1800" b="0" i="0">
+                <a:solidFill>
+                  <a:srgbClr val="0B3D5C"/>
+                </a:solidFill>
+                <a:latin typeface="Cambria Math"/>
+              </a:rPr>
+              <a:t>η / (ξ R</a:t>
+            </a:r>
+            <a:r>
+              <a:rPr sz="1800" b="0" i="0" baseline="30000">
+                <a:solidFill>
+                  <a:srgbClr val="0B3D5C"/>
+                </a:solidFill>
+                <a:latin typeface="Cambria Math"/>
+              </a:rPr>
+              <a:t>2</a:t>
+            </a:r>
+            <a:r>
+              <a:rPr sz="1800" b="0" i="0">
+                <a:solidFill>
+                  <a:srgbClr val="0B3D5C"/>
+                </a:solidFill>
+                <a:latin typeface="Cambria Math"/>
+              </a:rPr>
+              <a:t>)  ≈  0.006</a:t>
+            </a:r>
+          </a:p>
+        </p:txBody>
+      </p:sp>
+      <p:sp>
+        <p:nvSpPr>
+          <p:cNvPr id="11" name="TextBox 10"/>
+          <p:cNvSpPr txBox="1"/>
+          <p:nvPr/>
+        </p:nvSpPr>
+        <p:spPr>
+          <a:xfrm>
+            <a:off x="292608" y="1435608"/>
+            <a:ext cx="4160520" cy="274320"/>
+          </a:xfrm>
+          <a:prstGeom prst="rect">
+            <a:avLst/>
+          </a:prstGeom>
+          <a:noFill/>
+        </p:spPr>
+        <p:txBody>
+          <a:bodyPr wrap="square" lIns="54864" rIns="54864" tIns="27432" bIns="18288">
+            <a:spAutoFit/>
+          </a:bodyPr>
+          <a:lstStyle/>
+          <a:p>
+            <a:pPr algn="ctr">
+              <a:spcBef>
+                <a:spcPts val="0"/>
+              </a:spcBef>
+              <a:spcAft>
+                <a:spcPts val="0"/>
+              </a:spcAft>
+            </a:pPr>
+            <a:r>
+              <a:rPr sz="1150" b="0" i="0">
+                <a:solidFill>
+                  <a:srgbClr val="4B5563"/>
+                </a:solidFill>
+                <a:latin typeface="Calibri"/>
+              </a:rPr>
+              <a:t>friction dominates viscosity at the cell scale</a:t>
+            </a:r>
+          </a:p>
+        </p:txBody>
+      </p:sp>
+      <p:sp>
+        <p:nvSpPr>
+          <p:cNvPr id="12" name="Rounded Rectangle 11"/>
+          <p:cNvSpPr/>
+          <p:nvPr/>
+        </p:nvSpPr>
+        <p:spPr>
+          <a:xfrm>
+            <a:off x="292608" y="1792224"/>
+            <a:ext cx="4160520" cy="457200"/>
+          </a:xfrm>
+          <a:prstGeom prst="roundRect">
+            <a:avLst>
+              <a:gd name="adj" fmla="val 12000"/>
+            </a:avLst>
+          </a:prstGeom>
+          <a:solidFill>
+            <a:srgbClr val="EFF5F7"/>
+          </a:solidFill>
+          <a:ln w="15875">
+            <a:solidFill>
+              <a:srgbClr val="1A7A6D"/>
+            </a:solidFill>
+          </a:ln>
+          <a:effectLst/>
+        </p:spPr>
+        <p:style>
+          <a:lnRef idx="1">
+            <a:schemeClr val="accent1"/>
+          </a:lnRef>
+          <a:fillRef idx="3">
+            <a:schemeClr val="accent1"/>
+          </a:fillRef>
+          <a:effectRef idx="2">
+            <a:schemeClr val="accent1"/>
+          </a:effectRef>
+          <a:fontRef idx="minor">
+            <a:schemeClr val="lt1"/>
+          </a:fontRef>
+        </p:style>
+        <p:txBody>
+          <a:bodyPr rtlCol="0" anchor="ctr"/>
+          <a:lstStyle/>
+          <a:p>
+            <a:pPr algn="ctr"/>
+          </a:p>
+        </p:txBody>
+      </p:sp>
+      <p:sp>
+        <p:nvSpPr>
+          <p:cNvPr id="13" name="TextBox 12"/>
+          <p:cNvSpPr txBox="1"/>
+          <p:nvPr/>
+        </p:nvSpPr>
+        <p:spPr>
+          <a:xfrm>
+            <a:off x="292608" y="1792224"/>
+            <a:ext cx="4160520" cy="457200"/>
+          </a:xfrm>
+          <a:prstGeom prst="rect">
+            <a:avLst/>
+          </a:prstGeom>
+          <a:noFill/>
+        </p:spPr>
+        <p:txBody>
+          <a:bodyPr wrap="square" lIns="54864" rIns="54864" tIns="27432" bIns="18288" anchor="ctr">
+            <a:spAutoFit/>
+          </a:bodyPr>
+          <a:lstStyle/>
+          <a:p>
+            <a:pPr algn="ctr">
+              <a:spcBef>
+                <a:spcPts val="0"/>
+              </a:spcBef>
+              <a:spcAft>
+                <a:spcPts val="300"/>
+              </a:spcAft>
+            </a:pPr>
+            <a:r>
+              <a:rPr sz="1350" b="0" i="0">
+                <a:solidFill>
+                  <a:srgbClr val="0B3D5C"/>
+                </a:solidFill>
+                <a:latin typeface="Cambria Math"/>
+              </a:rPr>
+              <a:t>0 = −∇p + η∇</a:t>
+            </a:r>
+            <a:r>
+              <a:rPr sz="1350" b="0" i="0" baseline="30000">
+                <a:solidFill>
+                  <a:srgbClr val="0B3D5C"/>
+                </a:solidFill>
+                <a:latin typeface="Cambria Math"/>
+              </a:rPr>
+              <a:t>2</a:t>
+            </a:r>
+            <a:r>
+              <a:rPr sz="1500" b="1" i="0">
+                <a:solidFill>
+                  <a:srgbClr val="0B3D5C"/>
+                </a:solidFill>
+                <a:latin typeface="Cambria Math"/>
+              </a:rPr>
+              <a:t>v</a:t>
+            </a:r>
+            <a:r>
+              <a:rPr sz="1350" b="0" i="0">
+                <a:solidFill>
+                  <a:srgbClr val="0B3D5C"/>
+                </a:solidFill>
+                <a:latin typeface="Cambria Math"/>
+              </a:rPr>
+              <a:t> − ξ</a:t>
+            </a:r>
+            <a:r>
+              <a:rPr sz="1500" b="1" i="0">
+                <a:solidFill>
+                  <a:srgbClr val="0B3D5C"/>
+                </a:solidFill>
+                <a:latin typeface="Cambria Math"/>
+              </a:rPr>
+              <a:t>v</a:t>
+            </a:r>
+            <a:r>
+              <a:rPr sz="1500" b="1" i="1">
+                <a:solidFill>
+                  <a:srgbClr val="0B3D5C"/>
+                </a:solidFill>
+                <a:latin typeface="Cambria Math"/>
+              </a:rPr>
+              <a:t> + f</a:t>
+            </a:r>
+          </a:p>
+        </p:txBody>
+      </p:sp>
+      <p:sp>
+        <p:nvSpPr>
+          <p:cNvPr id="14" name="TextBox 13"/>
+          <p:cNvSpPr txBox="1"/>
+          <p:nvPr/>
+        </p:nvSpPr>
+        <p:spPr>
+          <a:xfrm>
+            <a:off x="292608" y="2267712"/>
+            <a:ext cx="4160520" cy="237744"/>
+          </a:xfrm>
+          <a:prstGeom prst="rect">
+            <a:avLst/>
+          </a:prstGeom>
+          <a:noFill/>
+        </p:spPr>
+        <p:txBody>
+          <a:bodyPr wrap="square" lIns="54864" rIns="54864" tIns="27432" bIns="18288">
+            <a:spAutoFit/>
+          </a:bodyPr>
+          <a:lstStyle/>
+          <a:p>
+            <a:pPr algn="ctr">
+              <a:spcBef>
+                <a:spcPts val="0"/>
+              </a:spcBef>
+              <a:spcAft>
+                <a:spcPts val="0"/>
+              </a:spcAft>
+            </a:pPr>
+            <a:r>
+              <a:rPr sz="2000" b="1" i="0">
+                <a:solidFill>
+                  <a:srgbClr val="1A7A6D"/>
+                </a:solidFill>
+                <a:latin typeface="Calibri"/>
+              </a:rPr>
+              <a:t>⇓</a:t>
+            </a:r>
+          </a:p>
+        </p:txBody>
+      </p:sp>
+      <p:sp>
+        <p:nvSpPr>
+          <p:cNvPr id="15" name="Rounded Rectangle 14"/>
+          <p:cNvSpPr/>
+          <p:nvPr/>
+        </p:nvSpPr>
+        <p:spPr>
+          <a:xfrm>
+            <a:off x="292608" y="2523744"/>
+            <a:ext cx="4160520" cy="475488"/>
+          </a:xfrm>
+          <a:prstGeom prst="roundRect">
+            <a:avLst>
+              <a:gd name="adj" fmla="val 12000"/>
+            </a:avLst>
+          </a:prstGeom>
+          <a:solidFill>
+            <a:srgbClr val="E8F3F1"/>
+          </a:solidFill>
+          <a:ln w="15875">
+            <a:solidFill>
+              <a:srgbClr val="1A7A6D"/>
+            </a:solidFill>
+          </a:ln>
+          <a:effectLst/>
+        </p:spPr>
+        <p:style>
+          <a:lnRef idx="1">
+            <a:schemeClr val="accent1"/>
+          </a:lnRef>
+          <a:fillRef idx="3">
+            <a:schemeClr val="accent1"/>
+          </a:fillRef>
+          <a:effectRef idx="2">
+            <a:schemeClr val="accent1"/>
+          </a:effectRef>
+          <a:fontRef idx="minor">
+            <a:schemeClr val="lt1"/>
+          </a:fontRef>
+        </p:style>
+        <p:txBody>
+          <a:bodyPr rtlCol="0" anchor="ctr"/>
+          <a:lstStyle/>
+          <a:p>
+            <a:pPr algn="ctr"/>
+          </a:p>
+        </p:txBody>
+      </p:sp>
+      <p:sp>
+        <p:nvSpPr>
+          <p:cNvPr id="16" name="TextBox 15"/>
+          <p:cNvSpPr txBox="1"/>
+          <p:nvPr/>
+        </p:nvSpPr>
+        <p:spPr>
+          <a:xfrm>
+            <a:off x="292608" y="2523744"/>
+            <a:ext cx="4160520" cy="475488"/>
+          </a:xfrm>
+          <a:prstGeom prst="rect">
+            <a:avLst/>
+          </a:prstGeom>
+          <a:noFill/>
+        </p:spPr>
+        <p:txBody>
+          <a:bodyPr wrap="square" lIns="54864" rIns="54864" tIns="27432" bIns="18288" anchor="ctr">
+            <a:spAutoFit/>
+          </a:bodyPr>
+          <a:lstStyle/>
+          <a:p>
+            <a:pPr algn="ctr">
+              <a:spcBef>
+                <a:spcPts val="0"/>
+              </a:spcBef>
+              <a:spcAft>
+                <a:spcPts val="300"/>
+              </a:spcAft>
+            </a:pPr>
+            <a:r>
+              <a:rPr sz="2000" b="1" i="0">
+                <a:solidFill>
+                  <a:srgbClr val="0B3D5C"/>
+                </a:solidFill>
+                <a:latin typeface="Cambria Math"/>
+              </a:rPr>
+              <a:t>v</a:t>
+            </a:r>
+            <a:r>
+              <a:rPr sz="2000" b="1" i="1">
+                <a:solidFill>
+                  <a:srgbClr val="0B3D5C"/>
+                </a:solidFill>
+                <a:latin typeface="Cambria Math"/>
+              </a:rPr>
+              <a:t>  =  f</a:t>
+            </a:r>
+            <a:r>
+              <a:rPr sz="1800" b="0" i="0">
+                <a:solidFill>
+                  <a:srgbClr val="0B3D5C"/>
+                </a:solidFill>
+                <a:latin typeface="Cambria Math"/>
+              </a:rPr>
+              <a:t> / ξ</a:t>
+            </a:r>
+          </a:p>
+        </p:txBody>
+      </p:sp>
+      <p:sp>
+        <p:nvSpPr>
+          <p:cNvPr id="17" name="TextBox 16"/>
+          <p:cNvSpPr txBox="1"/>
+          <p:nvPr/>
+        </p:nvSpPr>
+        <p:spPr>
+          <a:xfrm>
+            <a:off x="292608" y="3054096"/>
+            <a:ext cx="4160520" cy="219456"/>
+          </a:xfrm>
+          <a:prstGeom prst="rect">
+            <a:avLst/>
+          </a:prstGeom>
+          <a:noFill/>
+        </p:spPr>
+        <p:txBody>
+          <a:bodyPr wrap="square" lIns="54864" rIns="54864" tIns="27432" bIns="18288">
+            <a:spAutoFit/>
+          </a:bodyPr>
+          <a:lstStyle/>
+          <a:p>
+            <a:pPr algn="ctr">
+              <a:spcBef>
+                <a:spcPts val="0"/>
+              </a:spcBef>
+              <a:spcAft>
+                <a:spcPts val="0"/>
+              </a:spcAft>
+            </a:pPr>
+            <a:r>
+              <a:rPr sz="2000" b="1" i="0">
+                <a:solidFill>
+                  <a:srgbClr val="1A7A6D"/>
+                </a:solidFill>
+                <a:latin typeface="Calibri"/>
+              </a:rPr>
+              <a:t>⇓</a:t>
+            </a:r>
+          </a:p>
+        </p:txBody>
+      </p:sp>
+      <p:sp>
+        <p:nvSpPr>
+          <p:cNvPr id="18" name="Rounded Rectangle 17"/>
+          <p:cNvSpPr/>
+          <p:nvPr/>
+        </p:nvSpPr>
+        <p:spPr>
+          <a:xfrm>
+            <a:off x="292608" y="3291840"/>
+            <a:ext cx="4160520" cy="457200"/>
+          </a:xfrm>
+          <a:prstGeom prst="roundRect">
+            <a:avLst>
+              <a:gd name="adj" fmla="val 12000"/>
+            </a:avLst>
+          </a:prstGeom>
+          <a:solidFill>
+            <a:srgbClr val="EFF5F7"/>
+          </a:solidFill>
+          <a:ln w="15875">
+            <a:solidFill>
+              <a:srgbClr val="1A7A6D"/>
+            </a:solidFill>
+          </a:ln>
+          <a:effectLst/>
+        </p:spPr>
+        <p:style>
+          <a:lnRef idx="1">
+            <a:schemeClr val="accent1"/>
+          </a:lnRef>
+          <a:fillRef idx="3">
+            <a:schemeClr val="accent1"/>
+          </a:fillRef>
+          <a:effectRef idx="2">
+            <a:schemeClr val="accent1"/>
+          </a:effectRef>
+          <a:fontRef idx="minor">
+            <a:schemeClr val="lt1"/>
+          </a:fontRef>
+        </p:style>
+        <p:txBody>
+          <a:bodyPr rtlCol="0" anchor="ctr"/>
+          <a:lstStyle/>
+          <a:p>
+            <a:pPr algn="ctr"/>
+          </a:p>
+        </p:txBody>
+      </p:sp>
+      <p:sp>
+        <p:nvSpPr>
+          <p:cNvPr id="19" name="TextBox 18"/>
+          <p:cNvSpPr txBox="1"/>
+          <p:nvPr/>
+        </p:nvSpPr>
+        <p:spPr>
+          <a:xfrm>
+            <a:off x="292608" y="3291840"/>
+            <a:ext cx="4160520" cy="457200"/>
+          </a:xfrm>
+          <a:prstGeom prst="rect">
+            <a:avLst/>
+          </a:prstGeom>
+          <a:noFill/>
+        </p:spPr>
+        <p:txBody>
+          <a:bodyPr wrap="square" lIns="54864" rIns="54864" tIns="27432" bIns="18288" anchor="ctr">
+            <a:spAutoFit/>
+          </a:bodyPr>
+          <a:lstStyle/>
+          <a:p>
+            <a:pPr algn="ctr">
+              <a:spcBef>
+                <a:spcPts val="0"/>
+              </a:spcBef>
+              <a:spcAft>
+                <a:spcPts val="300"/>
+              </a:spcAft>
+            </a:pPr>
+            <a:r>
+              <a:rPr sz="1400" b="0" i="0">
+                <a:solidFill>
+                  <a:srgbClr val="0B3D5C"/>
+                </a:solidFill>
+                <a:latin typeface="Cambria Math"/>
+              </a:rPr>
+              <a:t>f</a:t>
+            </a:r>
+            <a:r>
+              <a:rPr sz="1400" b="0" i="0" baseline="-25000">
+                <a:solidFill>
+                  <a:srgbClr val="0B3D5C"/>
+                </a:solidFill>
+                <a:latin typeface="Cambria Math"/>
+              </a:rPr>
+              <a:t>act</a:t>
+            </a:r>
+            <a:r>
+              <a:rPr sz="1400" b="0" i="0">
+                <a:solidFill>
+                  <a:srgbClr val="0B3D5C"/>
+                </a:solidFill>
+                <a:latin typeface="Cambria Math"/>
+              </a:rPr>
+              <a:t> = −ζ ∇·(φ</a:t>
+            </a:r>
+            <a:r>
+              <a:rPr sz="1500" b="1" i="0">
+                <a:solidFill>
+                  <a:srgbClr val="0B3D5C"/>
+                </a:solidFill>
+                <a:latin typeface="Cambria Math"/>
+              </a:rPr>
+              <a:t>P</a:t>
+            </a:r>
+            <a:r>
+              <a:rPr sz="1500" b="1" i="0">
+                <a:solidFill>
+                  <a:srgbClr val="0B3D5C"/>
+                </a:solidFill>
+                <a:latin typeface="Cambria Math"/>
+              </a:rPr>
+              <a:t>P</a:t>
+            </a:r>
+            <a:r>
+              <a:rPr sz="1400" b="0" i="0">
+                <a:solidFill>
+                  <a:srgbClr val="0B3D5C"/>
+                </a:solidFill>
+                <a:latin typeface="Cambria Math"/>
+              </a:rPr>
+              <a:t>)</a:t>
+            </a:r>
+          </a:p>
+        </p:txBody>
+      </p:sp>
+      <p:sp>
+        <p:nvSpPr>
+          <p:cNvPr id="20" name="TextBox 19"/>
+          <p:cNvSpPr txBox="1"/>
+          <p:nvPr/>
+        </p:nvSpPr>
+        <p:spPr>
+          <a:xfrm>
+            <a:off x="292608" y="3767328"/>
+            <a:ext cx="4160520" cy="219456"/>
+          </a:xfrm>
+          <a:prstGeom prst="rect">
+            <a:avLst/>
+          </a:prstGeom>
+          <a:noFill/>
+        </p:spPr>
+        <p:txBody>
+          <a:bodyPr wrap="square" lIns="54864" rIns="54864" tIns="27432" bIns="18288">
+            <a:spAutoFit/>
+          </a:bodyPr>
+          <a:lstStyle/>
+          <a:p>
+            <a:pPr algn="ctr">
+              <a:spcBef>
+                <a:spcPts val="0"/>
+              </a:spcBef>
+              <a:spcAft>
+                <a:spcPts val="0"/>
+              </a:spcAft>
+            </a:pPr>
+            <a:r>
+              <a:rPr sz="2000" b="1" i="0">
+                <a:solidFill>
+                  <a:srgbClr val="1A7A6D"/>
+                </a:solidFill>
+                <a:latin typeface="Calibri"/>
+              </a:rPr>
+              <a:t>⇓</a:t>
+            </a:r>
+          </a:p>
+        </p:txBody>
+      </p:sp>
+      <p:sp>
+        <p:nvSpPr>
+          <p:cNvPr id="21" name="Rounded Rectangle 20"/>
+          <p:cNvSpPr/>
+          <p:nvPr/>
+        </p:nvSpPr>
+        <p:spPr>
+          <a:xfrm>
+            <a:off x="292608" y="4005072"/>
+            <a:ext cx="4160520" cy="475488"/>
+          </a:xfrm>
+          <a:prstGeom prst="roundRect">
+            <a:avLst>
+              <a:gd name="adj" fmla="val 12000"/>
+            </a:avLst>
+          </a:prstGeom>
+          <a:solidFill>
+            <a:srgbClr val="E8F3F1"/>
+          </a:solidFill>
+          <a:ln w="15875">
+            <a:solidFill>
+              <a:srgbClr val="1A7A6D"/>
+            </a:solidFill>
+          </a:ln>
+          <a:effectLst/>
+        </p:spPr>
+        <p:style>
+          <a:lnRef idx="1">
+            <a:schemeClr val="accent1"/>
+          </a:lnRef>
+          <a:fillRef idx="3">
+            <a:schemeClr val="accent1"/>
+          </a:fillRef>
+          <a:effectRef idx="2">
+            <a:schemeClr val="accent1"/>
+          </a:effectRef>
+          <a:fontRef idx="minor">
+            <a:schemeClr val="lt1"/>
+          </a:fontRef>
+        </p:style>
+        <p:txBody>
+          <a:bodyPr rtlCol="0" anchor="ctr"/>
+          <a:lstStyle/>
+          <a:p>
+            <a:pPr algn="ctr"/>
+          </a:p>
+        </p:txBody>
+      </p:sp>
+      <p:sp>
+        <p:nvSpPr>
+          <p:cNvPr id="22" name="TextBox 21"/>
+          <p:cNvSpPr txBox="1"/>
+          <p:nvPr/>
+        </p:nvSpPr>
+        <p:spPr>
+          <a:xfrm>
+            <a:off x="292608" y="4005072"/>
+            <a:ext cx="4160520" cy="475488"/>
+          </a:xfrm>
+          <a:prstGeom prst="rect">
+            <a:avLst/>
+          </a:prstGeom>
+          <a:noFill/>
+        </p:spPr>
+        <p:txBody>
+          <a:bodyPr wrap="square" lIns="54864" rIns="54864" tIns="27432" bIns="18288" anchor="ctr">
+            <a:spAutoFit/>
+          </a:bodyPr>
+          <a:lstStyle/>
+          <a:p>
+            <a:pPr algn="ctr">
+              <a:spcBef>
+                <a:spcPts val="0"/>
+              </a:spcBef>
+              <a:spcAft>
+                <a:spcPts val="300"/>
+              </a:spcAft>
+            </a:pPr>
+            <a:r>
+              <a:rPr sz="1700" b="1" i="0">
+                <a:solidFill>
+                  <a:srgbClr val="0B3D5C"/>
+                </a:solidFill>
+                <a:latin typeface="Cambria Math"/>
+              </a:rPr>
+              <a:t>v</a:t>
+            </a:r>
+            <a:r>
+              <a:rPr sz="1300" b="0" i="0">
+                <a:solidFill>
+                  <a:srgbClr val="0B3D5C"/>
+                </a:solidFill>
+                <a:latin typeface="Cambria Math"/>
+              </a:rPr>
+              <a:t>  =  −(ζ/ξ) ∇·(φ</a:t>
+            </a:r>
+            <a:r>
+              <a:rPr sz="1400" b="1" i="0">
+                <a:solidFill>
+                  <a:srgbClr val="0B3D5C"/>
+                </a:solidFill>
+                <a:latin typeface="Cambria Math"/>
+              </a:rPr>
+              <a:t>P</a:t>
+            </a:r>
+            <a:r>
+              <a:rPr sz="1400" b="1" i="0">
+                <a:solidFill>
+                  <a:srgbClr val="0B3D5C"/>
+                </a:solidFill>
+                <a:latin typeface="Cambria Math"/>
+              </a:rPr>
+              <a:t>P</a:t>
+            </a:r>
+            <a:r>
+              <a:rPr sz="1300" b="0" i="0">
+                <a:solidFill>
+                  <a:srgbClr val="0B3D5C"/>
+                </a:solidFill>
+                <a:latin typeface="Cambria Math"/>
+              </a:rPr>
+              <a:t>)</a:t>
+            </a:r>
+          </a:p>
+        </p:txBody>
+      </p:sp>
+      <p:sp>
+        <p:nvSpPr>
+          <p:cNvPr id="23" name="Rounded Rectangle 22"/>
+          <p:cNvSpPr/>
+          <p:nvPr/>
+        </p:nvSpPr>
+        <p:spPr>
+          <a:xfrm>
+            <a:off x="292608" y="4617720"/>
+            <a:ext cx="4160520" cy="457200"/>
+          </a:xfrm>
+          <a:prstGeom prst="roundRect">
+            <a:avLst>
+              <a:gd name="adj" fmla="val 12000"/>
+            </a:avLst>
+          </a:prstGeom>
+          <a:solidFill>
+            <a:srgbClr val="EFF5F7"/>
+          </a:solidFill>
+          <a:ln w="15875">
+            <a:solidFill>
+              <a:srgbClr val="1A7A6D"/>
+            </a:solidFill>
+          </a:ln>
+          <a:effectLst/>
+        </p:spPr>
+        <p:style>
+          <a:lnRef idx="1">
+            <a:schemeClr val="accent1"/>
+          </a:lnRef>
+          <a:fillRef idx="3">
+            <a:schemeClr val="accent1"/>
+          </a:fillRef>
+          <a:effectRef idx="2">
+            <a:schemeClr val="accent1"/>
+          </a:effectRef>
+          <a:fontRef idx="minor">
+            <a:schemeClr val="lt1"/>
+          </a:fontRef>
+        </p:style>
+        <p:txBody>
+          <a:bodyPr rtlCol="0" anchor="ctr"/>
+          <a:lstStyle/>
+          <a:p>
+            <a:pPr algn="ctr"/>
+          </a:p>
+        </p:txBody>
+      </p:sp>
+      <p:sp>
+        <p:nvSpPr>
+          <p:cNvPr id="24" name="TextBox 23"/>
+          <p:cNvSpPr txBox="1"/>
+          <p:nvPr/>
+        </p:nvSpPr>
+        <p:spPr>
+          <a:xfrm>
+            <a:off x="292608" y="4617720"/>
+            <a:ext cx="4160520" cy="457200"/>
+          </a:xfrm>
+          <a:prstGeom prst="rect">
+            <a:avLst/>
+          </a:prstGeom>
+          <a:noFill/>
+        </p:spPr>
+        <p:txBody>
+          <a:bodyPr wrap="square" lIns="54864" rIns="54864" tIns="27432" bIns="18288" anchor="ctr">
+            <a:spAutoFit/>
+          </a:bodyPr>
+          <a:lstStyle/>
+          <a:p>
+            <a:pPr algn="ctr">
+              <a:spcBef>
+                <a:spcPts val="0"/>
+              </a:spcBef>
+              <a:spcAft>
+                <a:spcPts val="300"/>
+              </a:spcAft>
+            </a:pPr>
+            <a:r>
+              <a:rPr sz="1900" b="1" i="0">
+                <a:solidFill>
+                  <a:srgbClr val="0B3D5C"/>
+                </a:solidFill>
+                <a:latin typeface="Cambria Math"/>
+              </a:rPr>
+              <a:t>u</a:t>
+            </a:r>
+            <a:r>
+              <a:rPr sz="1700" b="0" i="0">
+                <a:solidFill>
+                  <a:srgbClr val="0B3D5C"/>
+                </a:solidFill>
+                <a:latin typeface="Cambria Math"/>
+              </a:rPr>
+              <a:t>  =  </a:t>
+            </a:r>
+            <a:r>
+              <a:rPr sz="1900" b="1" i="0">
+                <a:solidFill>
+                  <a:srgbClr val="0B3D5C"/>
+                </a:solidFill>
+                <a:latin typeface="Cambria Math"/>
+              </a:rPr>
+              <a:t>v</a:t>
+            </a:r>
+            <a:r>
+              <a:rPr sz="1700" b="0" i="0">
+                <a:solidFill>
+                  <a:srgbClr val="0B3D5C"/>
+                </a:solidFill>
+                <a:latin typeface="Cambria Math"/>
+              </a:rPr>
+              <a:t>  +  w</a:t>
+            </a:r>
+            <a:r>
+              <a:rPr sz="1700" b="0" i="0" baseline="-25000">
+                <a:solidFill>
+                  <a:srgbClr val="0B3D5C"/>
+                </a:solidFill>
+                <a:latin typeface="Cambria Math"/>
+              </a:rPr>
+              <a:t>0</a:t>
+            </a:r>
+            <a:r>
+              <a:rPr sz="1900" b="1" i="0">
+                <a:solidFill>
+                  <a:srgbClr val="0B3D5C"/>
+                </a:solidFill>
+                <a:latin typeface="Cambria Math"/>
+              </a:rPr>
+              <a:t>P</a:t>
+            </a:r>
+          </a:p>
+        </p:txBody>
+      </p:sp>
+      <p:sp>
+        <p:nvSpPr>
+          <p:cNvPr id="25" name="TextBox 24"/>
+          <p:cNvSpPr txBox="1"/>
+          <p:nvPr/>
+        </p:nvSpPr>
+        <p:spPr>
+          <a:xfrm>
+            <a:off x="292608" y="5138928"/>
+            <a:ext cx="4160520" cy="594360"/>
+          </a:xfrm>
+          <a:prstGeom prst="rect">
+            <a:avLst/>
+          </a:prstGeom>
+          <a:noFill/>
+        </p:spPr>
+        <p:txBody>
+          <a:bodyPr wrap="square" lIns="54864" rIns="54864" tIns="27432" bIns="18288">
+            <a:spAutoFit/>
+          </a:bodyPr>
+          <a:lstStyle/>
+          <a:p>
+            <a:pPr algn="ctr">
+              <a:lnSpc>
+                <a:spcPct val="105000"/>
+              </a:lnSpc>
+              <a:spcBef>
+                <a:spcPts val="0"/>
+              </a:spcBef>
+              <a:spcAft>
+                <a:spcPts val="0"/>
+              </a:spcAft>
+            </a:pPr>
+            <a:r>
+              <a:rPr sz="1200" b="1" i="0">
+                <a:solidFill>
+                  <a:srgbClr val="0B3D5C"/>
+                </a:solidFill>
+                <a:latin typeface="Calibri"/>
+              </a:rPr>
+              <a:t>No global Stokes / pressure solve — only local finite-difference stencils.</a:t>
+            </a:r>
+          </a:p>
+        </p:txBody>
+      </p:sp>
+      <p:pic>
+        <p:nvPicPr>
+          <p:cNvPr id="26" name="Picture 25" descr="fig_v4_montage.png"/>
+          <p:cNvPicPr>
+            <a:picLocks noChangeAspect="1"/>
+          </p:cNvPicPr>
+          <p:nvPr/>
+        </p:nvPicPr>
+        <p:blipFill>
+          <a:blip r:embed="rId2"/>
+          <a:stretch>
+            <a:fillRect/>
+          </a:stretch>
+        </p:blipFill>
+        <p:spPr>
+          <a:xfrm>
+            <a:off x="6585839" y="914400"/>
+            <a:ext cx="3333242" cy="1207008"/>
+          </a:xfrm>
+          <a:prstGeom prst="rect">
+            <a:avLst/>
+          </a:prstGeom>
+        </p:spPr>
+      </p:pic>
+      <p:pic>
+        <p:nvPicPr>
+          <p:cNvPr id="27" name="Picture 26" descr="fig_v4_snapshots.png"/>
+          <p:cNvPicPr>
+            <a:picLocks noChangeAspect="1"/>
+          </p:cNvPicPr>
+          <p:nvPr/>
+        </p:nvPicPr>
+        <p:blipFill>
+          <a:blip r:embed="rId3"/>
+          <a:stretch>
+            <a:fillRect/>
+          </a:stretch>
+        </p:blipFill>
+        <p:spPr>
+          <a:xfrm>
+            <a:off x="6585839" y="2157984"/>
+            <a:ext cx="3333242" cy="1207008"/>
+          </a:xfrm>
+          <a:prstGeom prst="rect">
+            <a:avLst/>
+          </a:prstGeom>
+        </p:spPr>
+      </p:pic>
+      <p:pic>
+        <p:nvPicPr>
+          <p:cNvPr id="28" name="Picture 27" descr="fig_v4_diagnostics.png"/>
+          <p:cNvPicPr>
+            <a:picLocks noChangeAspect="1"/>
+          </p:cNvPicPr>
+          <p:nvPr/>
+        </p:nvPicPr>
+        <p:blipFill>
+          <a:blip r:embed="rId4"/>
+          <a:stretch>
+            <a:fillRect/>
+          </a:stretch>
+        </p:blipFill>
+        <p:spPr>
+          <a:xfrm>
+            <a:off x="6803636" y="3401568"/>
+            <a:ext cx="2897647" cy="777240"/>
+          </a:xfrm>
+          <a:prstGeom prst="rect">
+            <a:avLst/>
+          </a:prstGeom>
+        </p:spPr>
+      </p:pic>
+      <p:sp>
+        <p:nvSpPr>
+          <p:cNvPr id="29" name="Rounded Rectangle 28"/>
+          <p:cNvSpPr/>
+          <p:nvPr/>
+        </p:nvSpPr>
+        <p:spPr>
+          <a:xfrm>
+            <a:off x="4617720" y="4251960"/>
+            <a:ext cx="7269480" cy="2331720"/>
           </a:xfrm>
           <a:prstGeom prst="roundRect">
             <a:avLst>
@@ -12272,58 +14165,14 @@
       </p:sp>
       <p:sp>
         <p:nvSpPr>
-          <p:cNvPr id="10" name="Rectangle 9"/>
-          <p:cNvSpPr/>
-          <p:nvPr/>
-        </p:nvSpPr>
-        <p:spPr>
-          <a:xfrm>
-            <a:off x="365760" y="1051560"/>
-            <a:ext cx="109728" cy="969264"/>
-          </a:xfrm>
-          <a:prstGeom prst="rect">
-            <a:avLst/>
-          </a:prstGeom>
-          <a:solidFill>
-            <a:srgbClr val="1A7A6D"/>
-          </a:solidFill>
-          <a:ln>
-            <a:noFill/>
-          </a:ln>
-          <a:effectLst/>
-        </p:spPr>
-        <p:style>
-          <a:lnRef idx="1">
-            <a:schemeClr val="accent1"/>
-          </a:lnRef>
-          <a:fillRef idx="3">
-            <a:schemeClr val="accent1"/>
-          </a:fillRef>
-          <a:effectRef idx="2">
-            <a:schemeClr val="accent1"/>
-          </a:effectRef>
-          <a:fontRef idx="minor">
-            <a:schemeClr val="lt1"/>
-          </a:fontRef>
-        </p:style>
-        <p:txBody>
-          <a:bodyPr rtlCol="0" anchor="ctr"/>
-          <a:lstStyle/>
-          <a:p>
-            <a:pPr algn="ctr"/>
-          </a:p>
-        </p:txBody>
-      </p:sp>
-      <p:sp>
-        <p:nvSpPr>
-          <p:cNvPr id="11" name="TextBox 10"/>
+          <p:cNvPr id="30" name="TextBox 29"/>
           <p:cNvSpPr txBox="1"/>
           <p:nvPr/>
         </p:nvSpPr>
         <p:spPr>
           <a:xfrm>
-            <a:off x="594360" y="1106424"/>
-            <a:ext cx="640080" cy="822960"/>
+            <a:off x="4800600" y="4343400"/>
+            <a:ext cx="6903720" cy="2176272"/>
           </a:xfrm>
           <a:prstGeom prst="rect">
             <a:avLst/>
@@ -12341,42 +14190,38 @@
                 <a:spcPts val="0"/>
               </a:spcBef>
               <a:spcAft>
-                <a:spcPts val="0"/>
+                <a:spcPts val="500"/>
               </a:spcAft>
             </a:pPr>
             <a:r>
-              <a:rPr sz="2200" b="1" i="0">
-                <a:solidFill>
-                  <a:srgbClr val="1A7A6D"/>
+              <a:rPr sz="1300" b="1" i="0">
+                <a:solidFill>
+                  <a:srgbClr val="0B3D5C"/>
                 </a:solidFill>
                 <a:latin typeface="Calibri"/>
               </a:rPr>
-              <a:t>01</a:t>
-            </a:r>
-          </a:p>
-        </p:txBody>
-      </p:sp>
-      <p:sp>
-        <p:nvSpPr>
-          <p:cNvPr id="12" name="TextBox 11"/>
-          <p:cNvSpPr txBox="1"/>
-          <p:nvPr/>
-        </p:nvSpPr>
-        <p:spPr>
-          <a:xfrm>
-            <a:off x="1280160" y="1124712"/>
-            <a:ext cx="10287000" cy="822960"/>
-          </a:xfrm>
-          <a:prstGeom prst="rect">
-            <a:avLst/>
-          </a:prstGeom>
-          <a:noFill/>
-        </p:spPr>
-        <p:txBody>
-          <a:bodyPr wrap="square" lIns="54864" rIns="54864" tIns="27432" bIns="18288">
-            <a:spAutoFit/>
-          </a:bodyPr>
-          <a:lstStyle/>
+              <a:t>Travel 239.9  ·  Time 299  (model units)  ·  Speed 0.801  ·  Aspect ∼ 3.2</a:t>
+            </a:r>
+          </a:p>
+          <a:p>
+            <a:pPr algn="l">
+              <a:spcBef>
+                <a:spcPts val="0"/>
+              </a:spcBef>
+              <a:spcAft>
+                <a:spcPts val="500"/>
+              </a:spcAft>
+            </a:pPr>
+            <a:r>
+              <a:rPr sz="1300" b="1" i="0">
+                <a:solidFill>
+                  <a:srgbClr val="0B3D5C"/>
+                </a:solidFill>
+                <a:latin typeface="Calibri"/>
+              </a:rPr>
+              <a:t>yᴄᴍ = 0  ·  Area +15%  ·  h/h₀ ≈ 0.87  (≈ 13% thinning)</a:t>
+            </a:r>
+          </a:p>
           <a:p>
             <a:pPr algn="l">
               <a:spcBef>
@@ -12387,13 +14232,13 @@
               </a:spcAft>
             </a:pPr>
             <a:r>
-              <a:rPr sz="1600" b="1" i="0">
-                <a:solidFill>
-                  <a:srgbClr val="0B3D5C"/>
+              <a:rPr sz="1200" b="0" i="0">
+                <a:solidFill>
+                  <a:srgbClr val="1F2937"/>
                 </a:solidFill>
                 <a:latin typeface="Calibri"/>
               </a:rPr>
-              <a:t>A spatial gradient in treadmilling can generate a leading protrusion.</a:t>
+              <a:t>Volume conserved; projected area is allowed to change.</a:t>
             </a:r>
           </a:p>
           <a:p>
@@ -12402,667 +14247,75 @@
                 <a:spcPts val="0"/>
               </a:spcBef>
               <a:spcAft>
-                <a:spcPts val="600"/>
+                <a:spcPts val="500"/>
               </a:spcAft>
             </a:pPr>
             <a:r>
-              <a:rPr sz="1250" b="0" i="0">
-                <a:solidFill>
-                  <a:srgbClr val="4B5563"/>
-                </a:solidFill>
-                <a:latin typeface="Calibri"/>
-              </a:rPr>
-              <a:t>V2</a:t>
-            </a:r>
-          </a:p>
-        </p:txBody>
-      </p:sp>
-      <p:sp>
-        <p:nvSpPr>
-          <p:cNvPr id="13" name="Rounded Rectangle 12"/>
-          <p:cNvSpPr/>
-          <p:nvPr/>
-        </p:nvSpPr>
-        <p:spPr>
-          <a:xfrm>
-            <a:off x="365760" y="2130552"/>
-            <a:ext cx="11430000" cy="969264"/>
-          </a:xfrm>
-          <a:prstGeom prst="roundRect">
-            <a:avLst>
-              <a:gd name="adj" fmla="val 8000"/>
-            </a:avLst>
-          </a:prstGeom>
-          <a:solidFill>
-            <a:srgbClr val="F3F6F9"/>
-          </a:solidFill>
-          <a:ln>
-            <a:noFill/>
-          </a:ln>
-          <a:effectLst/>
-        </p:spPr>
-        <p:style>
-          <a:lnRef idx="1">
-            <a:schemeClr val="accent1"/>
-          </a:lnRef>
-          <a:fillRef idx="3">
-            <a:schemeClr val="accent1"/>
-          </a:fillRef>
-          <a:effectRef idx="2">
-            <a:schemeClr val="accent1"/>
-          </a:effectRef>
-          <a:fontRef idx="minor">
-            <a:schemeClr val="lt1"/>
-          </a:fontRef>
-        </p:style>
-        <p:txBody>
-          <a:bodyPr rtlCol="0" anchor="ctr"/>
-          <a:lstStyle/>
-          <a:p>
-            <a:pPr algn="ctr"/>
-          </a:p>
-        </p:txBody>
-      </p:sp>
-      <p:sp>
-        <p:nvSpPr>
-          <p:cNvPr id="14" name="Rectangle 13"/>
-          <p:cNvSpPr/>
-          <p:nvPr/>
-        </p:nvSpPr>
-        <p:spPr>
-          <a:xfrm>
-            <a:off x="365760" y="2130552"/>
-            <a:ext cx="109728" cy="969264"/>
-          </a:xfrm>
-          <a:prstGeom prst="rect">
-            <a:avLst/>
-          </a:prstGeom>
-          <a:solidFill>
-            <a:srgbClr val="1A7A6D"/>
-          </a:solidFill>
-          <a:ln>
-            <a:noFill/>
-          </a:ln>
-          <a:effectLst/>
-        </p:spPr>
-        <p:style>
-          <a:lnRef idx="1">
-            <a:schemeClr val="accent1"/>
-          </a:lnRef>
-          <a:fillRef idx="3">
-            <a:schemeClr val="accent1"/>
-          </a:fillRef>
-          <a:effectRef idx="2">
-            <a:schemeClr val="accent1"/>
-          </a:effectRef>
-          <a:fontRef idx="minor">
-            <a:schemeClr val="lt1"/>
-          </a:fontRef>
-        </p:style>
-        <p:txBody>
-          <a:bodyPr rtlCol="0" anchor="ctr"/>
-          <a:lstStyle/>
-          <a:p>
-            <a:pPr algn="ctr"/>
-          </a:p>
-        </p:txBody>
-      </p:sp>
-      <p:sp>
-        <p:nvSpPr>
-          <p:cNvPr id="15" name="TextBox 14"/>
-          <p:cNvSpPr txBox="1"/>
-          <p:nvPr/>
-        </p:nvSpPr>
-        <p:spPr>
-          <a:xfrm>
-            <a:off x="594360" y="2185416"/>
-            <a:ext cx="640080" cy="822960"/>
-          </a:xfrm>
-          <a:prstGeom prst="rect">
-            <a:avLst/>
-          </a:prstGeom>
-          <a:noFill/>
-        </p:spPr>
-        <p:txBody>
-          <a:bodyPr wrap="square" lIns="54864" rIns="54864" tIns="27432" bIns="18288">
-            <a:spAutoFit/>
-          </a:bodyPr>
-          <a:lstStyle/>
+              <a:rPr sz="1200" b="0" i="0">
+                <a:solidFill>
+                  <a:srgbClr val="1F2937"/>
+                </a:solidFill>
+                <a:latin typeface="Cambria Math"/>
+              </a:rPr>
+              <a:t>k</a:t>
+            </a:r>
+            <a:r>
+              <a:rPr sz="1200" b="0" i="0" baseline="-25000">
+                <a:solidFill>
+                  <a:srgbClr val="1F2937"/>
+                </a:solidFill>
+                <a:latin typeface="Cambria Math"/>
+              </a:rPr>
+              <a:t>A</a:t>
+            </a:r>
+            <a:r>
+              <a:rPr sz="1200" b="0" i="0">
+                <a:solidFill>
+                  <a:srgbClr val="1F2937"/>
+                </a:solidFill>
+                <a:latin typeface="Cambria Math"/>
+              </a:rPr>
+              <a:t> = 0  ⇒  unbounded spreading / inflation</a:t>
+            </a:r>
+          </a:p>
           <a:p>
             <a:pPr algn="l">
               <a:spcBef>
                 <a:spcPts val="0"/>
               </a:spcBef>
               <a:spcAft>
-                <a:spcPts val="0"/>
+                <a:spcPts val="500"/>
               </a:spcAft>
             </a:pPr>
             <a:r>
-              <a:rPr sz="2200" b="1" i="0">
-                <a:solidFill>
-                  <a:srgbClr val="1A7A6D"/>
+              <a:rPr sz="1200" b="0" i="0">
+                <a:solidFill>
+                  <a:srgbClr val="4B5563"/>
                 </a:solidFill>
                 <a:latin typeface="Calibri"/>
               </a:rPr>
-              <a:t>02</a:t>
-            </a:r>
-          </a:p>
-        </p:txBody>
-      </p:sp>
-      <p:sp>
-        <p:nvSpPr>
-          <p:cNvPr id="16" name="TextBox 15"/>
-          <p:cNvSpPr txBox="1"/>
-          <p:nvPr/>
-        </p:nvSpPr>
-        <p:spPr>
-          <a:xfrm>
-            <a:off x="1280160" y="2203704"/>
-            <a:ext cx="10287000" cy="822960"/>
-          </a:xfrm>
-          <a:prstGeom prst="rect">
-            <a:avLst/>
-          </a:prstGeom>
-          <a:noFill/>
-        </p:spPr>
-        <p:txBody>
-          <a:bodyPr wrap="square" lIns="54864" rIns="54864" tIns="27432" bIns="18288">
-            <a:spAutoFit/>
-          </a:bodyPr>
-          <a:lstStyle/>
+              <a:t>V3 and V4 agree to within 0.2% in the comparable (flow-off, rigid-area) limit.</a:t>
+            </a:r>
+          </a:p>
           <a:p>
             <a:pPr algn="l">
               <a:spcBef>
                 <a:spcPts val="0"/>
               </a:spcBef>
               <a:spcAft>
-                <a:spcPts val="400"/>
+                <a:spcPts val="500"/>
               </a:spcAft>
             </a:pPr>
             <a:r>
-              <a:rPr sz="1600" b="1" i="0">
-                <a:solidFill>
-                  <a:srgbClr val="0B3D5C"/>
+              <a:rPr sz="1200" b="0" i="0">
+                <a:solidFill>
+                  <a:srgbClr val="1F2937"/>
                 </a:solidFill>
                 <a:latin typeface="Calibri"/>
               </a:rPr>
-              <a:t>Planar morphology is controlled mainly by polarization anchoring.</a:t>
-            </a:r>
-          </a:p>
-          <a:p>
-            <a:pPr algn="l">
-              <a:spcBef>
-                <a:spcPts val="0"/>
-              </a:spcBef>
-              <a:spcAft>
-                <a:spcPts val="600"/>
-              </a:spcAft>
-            </a:pPr>
-            <a:r>
-              <a:rPr sz="1250" b="0" i="0">
-                <a:solidFill>
-                  <a:srgbClr val="4B5563"/>
-                </a:solidFill>
-                <a:latin typeface="Calibri"/>
-              </a:rPr>
-              <a:t>V3  ·  flow adds ~2%</a:t>
-            </a:r>
-          </a:p>
-        </p:txBody>
-      </p:sp>
-      <p:sp>
-        <p:nvSpPr>
-          <p:cNvPr id="17" name="Rounded Rectangle 16"/>
-          <p:cNvSpPr/>
-          <p:nvPr/>
-        </p:nvSpPr>
-        <p:spPr>
-          <a:xfrm>
-            <a:off x="365760" y="3209544"/>
-            <a:ext cx="11430000" cy="969264"/>
-          </a:xfrm>
-          <a:prstGeom prst="roundRect">
-            <a:avLst>
-              <a:gd name="adj" fmla="val 8000"/>
-            </a:avLst>
-          </a:prstGeom>
-          <a:solidFill>
-            <a:srgbClr val="F3F6F9"/>
-          </a:solidFill>
-          <a:ln>
-            <a:noFill/>
-          </a:ln>
-          <a:effectLst/>
-        </p:spPr>
-        <p:style>
-          <a:lnRef idx="1">
-            <a:schemeClr val="accent1"/>
-          </a:lnRef>
-          <a:fillRef idx="3">
-            <a:schemeClr val="accent1"/>
-          </a:fillRef>
-          <a:effectRef idx="2">
-            <a:schemeClr val="accent1"/>
-          </a:effectRef>
-          <a:fontRef idx="minor">
-            <a:schemeClr val="lt1"/>
-          </a:fontRef>
-        </p:style>
-        <p:txBody>
-          <a:bodyPr rtlCol="0" anchor="ctr"/>
-          <a:lstStyle/>
-          <a:p>
-            <a:pPr algn="ctr"/>
-          </a:p>
-        </p:txBody>
-      </p:sp>
-      <p:sp>
-        <p:nvSpPr>
-          <p:cNvPr id="18" name="Rectangle 17"/>
-          <p:cNvSpPr/>
-          <p:nvPr/>
-        </p:nvSpPr>
-        <p:spPr>
-          <a:xfrm>
-            <a:off x="365760" y="3209544"/>
-            <a:ext cx="109728" cy="969264"/>
-          </a:xfrm>
-          <a:prstGeom prst="rect">
-            <a:avLst/>
-          </a:prstGeom>
-          <a:solidFill>
-            <a:srgbClr val="1A7A6D"/>
-          </a:solidFill>
-          <a:ln>
-            <a:noFill/>
-          </a:ln>
-          <a:effectLst/>
-        </p:spPr>
-        <p:style>
-          <a:lnRef idx="1">
-            <a:schemeClr val="accent1"/>
-          </a:lnRef>
-          <a:fillRef idx="3">
-            <a:schemeClr val="accent1"/>
-          </a:fillRef>
-          <a:effectRef idx="2">
-            <a:schemeClr val="accent1"/>
-          </a:effectRef>
-          <a:fontRef idx="minor">
-            <a:schemeClr val="lt1"/>
-          </a:fontRef>
-        </p:style>
-        <p:txBody>
-          <a:bodyPr rtlCol="0" anchor="ctr"/>
-          <a:lstStyle/>
-          <a:p>
-            <a:pPr algn="ctr"/>
-          </a:p>
-        </p:txBody>
-      </p:sp>
-      <p:sp>
-        <p:nvSpPr>
-          <p:cNvPr id="19" name="TextBox 18"/>
-          <p:cNvSpPr txBox="1"/>
-          <p:nvPr/>
-        </p:nvSpPr>
-        <p:spPr>
-          <a:xfrm>
-            <a:off x="594360" y="3264408"/>
-            <a:ext cx="640080" cy="822960"/>
-          </a:xfrm>
-          <a:prstGeom prst="rect">
-            <a:avLst/>
-          </a:prstGeom>
-          <a:noFill/>
-        </p:spPr>
-        <p:txBody>
-          <a:bodyPr wrap="square" lIns="54864" rIns="54864" tIns="27432" bIns="18288">
-            <a:spAutoFit/>
-          </a:bodyPr>
-          <a:lstStyle/>
-          <a:p>
-            <a:pPr algn="l">
-              <a:spcBef>
-                <a:spcPts val="0"/>
-              </a:spcBef>
-              <a:spcAft>
-                <a:spcPts val="0"/>
-              </a:spcAft>
-            </a:pPr>
-            <a:r>
-              <a:rPr sz="2200" b="1" i="0">
-                <a:solidFill>
-                  <a:srgbClr val="1A7A6D"/>
-                </a:solidFill>
-                <a:latin typeface="Calibri"/>
-              </a:rPr>
-              <a:t>03</a:t>
-            </a:r>
-          </a:p>
-        </p:txBody>
-      </p:sp>
-      <p:sp>
-        <p:nvSpPr>
-          <p:cNvPr id="20" name="TextBox 19"/>
-          <p:cNvSpPr txBox="1"/>
-          <p:nvPr/>
-        </p:nvSpPr>
-        <p:spPr>
-          <a:xfrm>
-            <a:off x="1280160" y="3282696"/>
-            <a:ext cx="10287000" cy="822960"/>
-          </a:xfrm>
-          <a:prstGeom prst="rect">
-            <a:avLst/>
-          </a:prstGeom>
-          <a:noFill/>
-        </p:spPr>
-        <p:txBody>
-          <a:bodyPr wrap="square" lIns="54864" rIns="54864" tIns="27432" bIns="18288">
-            <a:spAutoFit/>
-          </a:bodyPr>
-          <a:lstStyle/>
-          <a:p>
-            <a:pPr algn="l">
-              <a:spcBef>
-                <a:spcPts val="0"/>
-              </a:spcBef>
-              <a:spcAft>
-                <a:spcPts val="400"/>
-              </a:spcAft>
-            </a:pPr>
-            <a:r>
-              <a:rPr sz="1600" b="1" i="0">
-                <a:solidFill>
-                  <a:srgbClr val="0B3D5C"/>
-                </a:solidFill>
-                <a:latin typeface="Calibri"/>
-              </a:rPr>
-              <a:t>The friction-dominated model retains crawling behaviour.</a:t>
-            </a:r>
-          </a:p>
-          <a:p>
-            <a:pPr algn="l">
-              <a:spcBef>
-                <a:spcPts val="0"/>
-              </a:spcBef>
-              <a:spcAft>
-                <a:spcPts val="600"/>
-              </a:spcAft>
-            </a:pPr>
-            <a:r>
-              <a:rPr sz="1250" b="0" i="0">
-                <a:solidFill>
-                  <a:srgbClr val="4B5563"/>
-                </a:solidFill>
-                <a:latin typeface="Calibri"/>
-              </a:rPr>
-              <a:t>V4  ·  speed 0.801  ·  0.2% agreement  ·  ~5× faster  ·  local</a:t>
-            </a:r>
-          </a:p>
-        </p:txBody>
-      </p:sp>
-      <p:sp>
-        <p:nvSpPr>
-          <p:cNvPr id="21" name="Rounded Rectangle 20"/>
-          <p:cNvSpPr/>
-          <p:nvPr/>
-        </p:nvSpPr>
-        <p:spPr>
-          <a:xfrm>
-            <a:off x="365760" y="4288536"/>
-            <a:ext cx="11430000" cy="969264"/>
-          </a:xfrm>
-          <a:prstGeom prst="roundRect">
-            <a:avLst>
-              <a:gd name="adj" fmla="val 8000"/>
-            </a:avLst>
-          </a:prstGeom>
-          <a:solidFill>
-            <a:srgbClr val="F3F6F9"/>
-          </a:solidFill>
-          <a:ln>
-            <a:noFill/>
-          </a:ln>
-          <a:effectLst/>
-        </p:spPr>
-        <p:style>
-          <a:lnRef idx="1">
-            <a:schemeClr val="accent1"/>
-          </a:lnRef>
-          <a:fillRef idx="3">
-            <a:schemeClr val="accent1"/>
-          </a:fillRef>
-          <a:effectRef idx="2">
-            <a:schemeClr val="accent1"/>
-          </a:effectRef>
-          <a:fontRef idx="minor">
-            <a:schemeClr val="lt1"/>
-          </a:fontRef>
-        </p:style>
-        <p:txBody>
-          <a:bodyPr rtlCol="0" anchor="ctr"/>
-          <a:lstStyle/>
-          <a:p>
-            <a:pPr algn="ctr"/>
-          </a:p>
-        </p:txBody>
-      </p:sp>
-      <p:sp>
-        <p:nvSpPr>
-          <p:cNvPr id="22" name="Rectangle 21"/>
-          <p:cNvSpPr/>
-          <p:nvPr/>
-        </p:nvSpPr>
-        <p:spPr>
-          <a:xfrm>
-            <a:off x="365760" y="4288536"/>
-            <a:ext cx="109728" cy="969264"/>
-          </a:xfrm>
-          <a:prstGeom prst="rect">
-            <a:avLst/>
-          </a:prstGeom>
-          <a:solidFill>
-            <a:srgbClr val="1A7A6D"/>
-          </a:solidFill>
-          <a:ln>
-            <a:noFill/>
-          </a:ln>
-          <a:effectLst/>
-        </p:spPr>
-        <p:style>
-          <a:lnRef idx="1">
-            <a:schemeClr val="accent1"/>
-          </a:lnRef>
-          <a:fillRef idx="3">
-            <a:schemeClr val="accent1"/>
-          </a:fillRef>
-          <a:effectRef idx="2">
-            <a:schemeClr val="accent1"/>
-          </a:effectRef>
-          <a:fontRef idx="minor">
-            <a:schemeClr val="lt1"/>
-          </a:fontRef>
-        </p:style>
-        <p:txBody>
-          <a:bodyPr rtlCol="0" anchor="ctr"/>
-          <a:lstStyle/>
-          <a:p>
-            <a:pPr algn="ctr"/>
-          </a:p>
-        </p:txBody>
-      </p:sp>
-      <p:sp>
-        <p:nvSpPr>
-          <p:cNvPr id="23" name="TextBox 22"/>
-          <p:cNvSpPr txBox="1"/>
-          <p:nvPr/>
-        </p:nvSpPr>
-        <p:spPr>
-          <a:xfrm>
-            <a:off x="594360" y="4343400"/>
-            <a:ext cx="640080" cy="822960"/>
-          </a:xfrm>
-          <a:prstGeom prst="rect">
-            <a:avLst/>
-          </a:prstGeom>
-          <a:noFill/>
-        </p:spPr>
-        <p:txBody>
-          <a:bodyPr wrap="square" lIns="54864" rIns="54864" tIns="27432" bIns="18288">
-            <a:spAutoFit/>
-          </a:bodyPr>
-          <a:lstStyle/>
-          <a:p>
-            <a:pPr algn="l">
-              <a:spcBef>
-                <a:spcPts val="0"/>
-              </a:spcBef>
-              <a:spcAft>
-                <a:spcPts val="0"/>
-              </a:spcAft>
-            </a:pPr>
-            <a:r>
-              <a:rPr sz="2200" b="1" i="0">
-                <a:solidFill>
-                  <a:srgbClr val="1A7A6D"/>
-                </a:solidFill>
-                <a:latin typeface="Calibri"/>
-              </a:rPr>
-              <a:t>04</a:t>
-            </a:r>
-          </a:p>
-        </p:txBody>
-      </p:sp>
-      <p:sp>
-        <p:nvSpPr>
-          <p:cNvPr id="24" name="TextBox 23"/>
-          <p:cNvSpPr txBox="1"/>
-          <p:nvPr/>
-        </p:nvSpPr>
-        <p:spPr>
-          <a:xfrm>
-            <a:off x="1280160" y="4361688"/>
-            <a:ext cx="10287000" cy="822960"/>
-          </a:xfrm>
-          <a:prstGeom prst="rect">
-            <a:avLst/>
-          </a:prstGeom>
-          <a:noFill/>
-        </p:spPr>
-        <p:txBody>
-          <a:bodyPr wrap="square" lIns="54864" rIns="54864" tIns="27432" bIns="18288">
-            <a:spAutoFit/>
-          </a:bodyPr>
-          <a:lstStyle/>
-          <a:p>
-            <a:pPr algn="l">
-              <a:spcBef>
-                <a:spcPts val="0"/>
-              </a:spcBef>
-              <a:spcAft>
-                <a:spcPts val="400"/>
-              </a:spcAft>
-            </a:pPr>
-            <a:r>
-              <a:rPr sz="1600" b="1" i="0">
-                <a:solidFill>
-                  <a:srgbClr val="0B3D5C"/>
-                </a:solidFill>
-                <a:latin typeface="Calibri"/>
-              </a:rPr>
-              <a:t>Volume conservation is more appropriate than rigid projected-area conservation.</a:t>
-            </a:r>
-          </a:p>
-          <a:p>
-            <a:pPr algn="l">
-              <a:spcBef>
-                <a:spcPts val="0"/>
-              </a:spcBef>
-              <a:spcAft>
-                <a:spcPts val="600"/>
-              </a:spcAft>
-            </a:pPr>
-            <a:r>
-              <a:rPr sz="1250" b="0" i="0">
-                <a:solidFill>
-                  <a:srgbClr val="4B5563"/>
-                </a:solidFill>
-                <a:latin typeface="Calibri"/>
-              </a:rPr>
-              <a:t>kₐ = 5: area +15%      kₐ = 0: inflation, crawling lost</a:t>
-            </a:r>
-          </a:p>
-        </p:txBody>
-      </p:sp>
-      <p:sp>
-        <p:nvSpPr>
-          <p:cNvPr id="25" name="Rounded Rectangle 24"/>
-          <p:cNvSpPr/>
-          <p:nvPr/>
-        </p:nvSpPr>
-        <p:spPr>
-          <a:xfrm>
-            <a:off x="365760" y="5468112"/>
-            <a:ext cx="11430000" cy="960120"/>
-          </a:xfrm>
-          <a:prstGeom prst="roundRect">
-            <a:avLst>
-              <a:gd name="adj" fmla="val 8000"/>
-            </a:avLst>
-          </a:prstGeom>
-          <a:solidFill>
-            <a:srgbClr val="0B3D5C"/>
-          </a:solidFill>
-          <a:ln>
-            <a:noFill/>
-          </a:ln>
-          <a:effectLst/>
-        </p:spPr>
-        <p:style>
-          <a:lnRef idx="1">
-            <a:schemeClr val="accent1"/>
-          </a:lnRef>
-          <a:fillRef idx="3">
-            <a:schemeClr val="accent1"/>
-          </a:fillRef>
-          <a:effectRef idx="2">
-            <a:schemeClr val="accent1"/>
-          </a:effectRef>
-          <a:fontRef idx="minor">
-            <a:schemeClr val="lt1"/>
-          </a:fontRef>
-        </p:style>
-        <p:txBody>
-          <a:bodyPr rtlCol="0" anchor="ctr"/>
-          <a:lstStyle/>
-          <a:p>
-            <a:pPr algn="ctr"/>
-          </a:p>
-        </p:txBody>
-      </p:sp>
-      <p:sp>
-        <p:nvSpPr>
-          <p:cNvPr id="26" name="TextBox 25"/>
-          <p:cNvSpPr txBox="1"/>
-          <p:nvPr/>
-        </p:nvSpPr>
-        <p:spPr>
-          <a:xfrm>
-            <a:off x="548640" y="5577840"/>
-            <a:ext cx="11064240" cy="777240"/>
-          </a:xfrm>
-          <a:prstGeom prst="rect">
-            <a:avLst/>
-          </a:prstGeom>
-          <a:noFill/>
-        </p:spPr>
-        <p:txBody>
-          <a:bodyPr wrap="square" lIns="54864" rIns="54864" tIns="27432" bIns="18288">
-            <a:spAutoFit/>
-          </a:bodyPr>
-          <a:lstStyle/>
+              <a:t>Cost/step: 2.70 → 1.10 ms   ·   stable dt: 0.01 → 0.03</a:t>
+            </a:r>
+          </a:p>
           <a:p>
             <a:pPr algn="l">
               <a:lnSpc>
@@ -13072,17 +14325,36 @@
                 <a:spcPts val="0"/>
               </a:spcBef>
               <a:spcAft>
-                <a:spcPts val="0"/>
+                <a:spcPts val="300"/>
               </a:spcAft>
             </a:pPr>
             <a:r>
-              <a:rPr sz="1600" b="1" i="0">
-                <a:solidFill>
-                  <a:srgbClr val="FFFFFF"/>
+              <a:rPr sz="1250" b="1" i="0">
+                <a:solidFill>
+                  <a:srgbClr val="1A7A6D"/>
                 </a:solidFill>
                 <a:latin typeface="Calibri"/>
               </a:rPr>
-              <a:t>Take-home: a verified local single-cell model now reproduces crawling without a global Stokes solve — providing a computational base for many-cell simulations.</a:t>
+              <a:t>Overall runtime ≈ 5× faster, including the larger stable time-step.</a:t>
+            </a:r>
+          </a:p>
+          <a:p>
+            <a:pPr algn="l">
+              <a:spcBef>
+                <a:spcPts val="0"/>
+              </a:spcBef>
+              <a:spcAft>
+                <a:spcPts val="0"/>
+              </a:spcAft>
+            </a:pPr>
+            <a:r>
+              <a:rPr sz="1200" b="0" i="0">
+                <a:solidFill>
+                  <a:srgbClr val="1F2937"/>
+                </a:solidFill>
+                <a:latin typeface="Calibri"/>
+              </a:rPr>
+              <a:t>Local formulation — a practical starting point for many cells.</a:t>
             </a:r>
           </a:p>
         </p:txBody>
@@ -13274,7 +14546,7 @@
                 </a:solidFill>
                 <a:latin typeface="Calibri"/>
               </a:rPr>
-              <a:t>From one cell to many</a:t>
+              <a:t>What the simulations establish</a:t>
             </a:r>
           </a:p>
         </p:txBody>
@@ -13402,7 +14674,1190 @@
                 </a:solidFill>
                 <a:latin typeface="Calibri"/>
               </a:rPr>
-              <a:t>8 / 8</a:t>
+              <a:t>8 / 9</a:t>
+            </a:r>
+          </a:p>
+        </p:txBody>
+      </p:sp>
+      <p:sp>
+        <p:nvSpPr>
+          <p:cNvPr id="9" name="Rounded Rectangle 8"/>
+          <p:cNvSpPr/>
+          <p:nvPr/>
+        </p:nvSpPr>
+        <p:spPr>
+          <a:xfrm>
+            <a:off x="365760" y="1051560"/>
+            <a:ext cx="11430000" cy="969264"/>
+          </a:xfrm>
+          <a:prstGeom prst="roundRect">
+            <a:avLst>
+              <a:gd name="adj" fmla="val 8000"/>
+            </a:avLst>
+          </a:prstGeom>
+          <a:solidFill>
+            <a:srgbClr val="F3F6F9"/>
+          </a:solidFill>
+          <a:ln>
+            <a:noFill/>
+          </a:ln>
+          <a:effectLst/>
+        </p:spPr>
+        <p:style>
+          <a:lnRef idx="1">
+            <a:schemeClr val="accent1"/>
+          </a:lnRef>
+          <a:fillRef idx="3">
+            <a:schemeClr val="accent1"/>
+          </a:fillRef>
+          <a:effectRef idx="2">
+            <a:schemeClr val="accent1"/>
+          </a:effectRef>
+          <a:fontRef idx="minor">
+            <a:schemeClr val="lt1"/>
+          </a:fontRef>
+        </p:style>
+        <p:txBody>
+          <a:bodyPr rtlCol="0" anchor="ctr"/>
+          <a:lstStyle/>
+          <a:p>
+            <a:pPr algn="ctr"/>
+          </a:p>
+        </p:txBody>
+      </p:sp>
+      <p:sp>
+        <p:nvSpPr>
+          <p:cNvPr id="10" name="Rectangle 9"/>
+          <p:cNvSpPr/>
+          <p:nvPr/>
+        </p:nvSpPr>
+        <p:spPr>
+          <a:xfrm>
+            <a:off x="365760" y="1051560"/>
+            <a:ext cx="109728" cy="969264"/>
+          </a:xfrm>
+          <a:prstGeom prst="rect">
+            <a:avLst/>
+          </a:prstGeom>
+          <a:solidFill>
+            <a:srgbClr val="1A7A6D"/>
+          </a:solidFill>
+          <a:ln>
+            <a:noFill/>
+          </a:ln>
+          <a:effectLst/>
+        </p:spPr>
+        <p:style>
+          <a:lnRef idx="1">
+            <a:schemeClr val="accent1"/>
+          </a:lnRef>
+          <a:fillRef idx="3">
+            <a:schemeClr val="accent1"/>
+          </a:fillRef>
+          <a:effectRef idx="2">
+            <a:schemeClr val="accent1"/>
+          </a:effectRef>
+          <a:fontRef idx="minor">
+            <a:schemeClr val="lt1"/>
+          </a:fontRef>
+        </p:style>
+        <p:txBody>
+          <a:bodyPr rtlCol="0" anchor="ctr"/>
+          <a:lstStyle/>
+          <a:p>
+            <a:pPr algn="ctr"/>
+          </a:p>
+        </p:txBody>
+      </p:sp>
+      <p:sp>
+        <p:nvSpPr>
+          <p:cNvPr id="11" name="TextBox 10"/>
+          <p:cNvSpPr txBox="1"/>
+          <p:nvPr/>
+        </p:nvSpPr>
+        <p:spPr>
+          <a:xfrm>
+            <a:off x="594360" y="1106424"/>
+            <a:ext cx="640080" cy="822960"/>
+          </a:xfrm>
+          <a:prstGeom prst="rect">
+            <a:avLst/>
+          </a:prstGeom>
+          <a:noFill/>
+        </p:spPr>
+        <p:txBody>
+          <a:bodyPr wrap="square" lIns="54864" rIns="54864" tIns="27432" bIns="18288">
+            <a:spAutoFit/>
+          </a:bodyPr>
+          <a:lstStyle/>
+          <a:p>
+            <a:pPr algn="l">
+              <a:spcBef>
+                <a:spcPts val="0"/>
+              </a:spcBef>
+              <a:spcAft>
+                <a:spcPts val="0"/>
+              </a:spcAft>
+            </a:pPr>
+            <a:r>
+              <a:rPr sz="2200" b="1" i="0">
+                <a:solidFill>
+                  <a:srgbClr val="1A7A6D"/>
+                </a:solidFill>
+                <a:latin typeface="Calibri"/>
+              </a:rPr>
+              <a:t>01</a:t>
+            </a:r>
+          </a:p>
+        </p:txBody>
+      </p:sp>
+      <p:sp>
+        <p:nvSpPr>
+          <p:cNvPr id="12" name="TextBox 11"/>
+          <p:cNvSpPr txBox="1"/>
+          <p:nvPr/>
+        </p:nvSpPr>
+        <p:spPr>
+          <a:xfrm>
+            <a:off x="1280160" y="1124712"/>
+            <a:ext cx="10287000" cy="822960"/>
+          </a:xfrm>
+          <a:prstGeom prst="rect">
+            <a:avLst/>
+          </a:prstGeom>
+          <a:noFill/>
+        </p:spPr>
+        <p:txBody>
+          <a:bodyPr wrap="square" lIns="54864" rIns="54864" tIns="27432" bIns="18288">
+            <a:spAutoFit/>
+          </a:bodyPr>
+          <a:lstStyle/>
+          <a:p>
+            <a:pPr algn="l">
+              <a:spcBef>
+                <a:spcPts val="0"/>
+              </a:spcBef>
+              <a:spcAft>
+                <a:spcPts val="400"/>
+              </a:spcAft>
+            </a:pPr>
+            <a:r>
+              <a:rPr sz="1600" b="1" i="0">
+                <a:solidFill>
+                  <a:srgbClr val="0B3D5C"/>
+                </a:solidFill>
+                <a:latin typeface="Calibri"/>
+              </a:rPr>
+              <a:t>A spatial gradient in treadmilling can generate a leading protrusion.</a:t>
+            </a:r>
+          </a:p>
+          <a:p>
+            <a:pPr algn="l">
+              <a:spcBef>
+                <a:spcPts val="0"/>
+              </a:spcBef>
+              <a:spcAft>
+                <a:spcPts val="600"/>
+              </a:spcAft>
+            </a:pPr>
+            <a:r>
+              <a:rPr sz="1250" b="0" i="0">
+                <a:solidFill>
+                  <a:srgbClr val="4B5563"/>
+                </a:solidFill>
+                <a:latin typeface="Calibri"/>
+              </a:rPr>
+              <a:t>V2</a:t>
+            </a:r>
+          </a:p>
+        </p:txBody>
+      </p:sp>
+      <p:sp>
+        <p:nvSpPr>
+          <p:cNvPr id="13" name="Rounded Rectangle 12"/>
+          <p:cNvSpPr/>
+          <p:nvPr/>
+        </p:nvSpPr>
+        <p:spPr>
+          <a:xfrm>
+            <a:off x="365760" y="2130552"/>
+            <a:ext cx="11430000" cy="969264"/>
+          </a:xfrm>
+          <a:prstGeom prst="roundRect">
+            <a:avLst>
+              <a:gd name="adj" fmla="val 8000"/>
+            </a:avLst>
+          </a:prstGeom>
+          <a:solidFill>
+            <a:srgbClr val="F3F6F9"/>
+          </a:solidFill>
+          <a:ln>
+            <a:noFill/>
+          </a:ln>
+          <a:effectLst/>
+        </p:spPr>
+        <p:style>
+          <a:lnRef idx="1">
+            <a:schemeClr val="accent1"/>
+          </a:lnRef>
+          <a:fillRef idx="3">
+            <a:schemeClr val="accent1"/>
+          </a:fillRef>
+          <a:effectRef idx="2">
+            <a:schemeClr val="accent1"/>
+          </a:effectRef>
+          <a:fontRef idx="minor">
+            <a:schemeClr val="lt1"/>
+          </a:fontRef>
+        </p:style>
+        <p:txBody>
+          <a:bodyPr rtlCol="0" anchor="ctr"/>
+          <a:lstStyle/>
+          <a:p>
+            <a:pPr algn="ctr"/>
+          </a:p>
+        </p:txBody>
+      </p:sp>
+      <p:sp>
+        <p:nvSpPr>
+          <p:cNvPr id="14" name="Rectangle 13"/>
+          <p:cNvSpPr/>
+          <p:nvPr/>
+        </p:nvSpPr>
+        <p:spPr>
+          <a:xfrm>
+            <a:off x="365760" y="2130552"/>
+            <a:ext cx="109728" cy="969264"/>
+          </a:xfrm>
+          <a:prstGeom prst="rect">
+            <a:avLst/>
+          </a:prstGeom>
+          <a:solidFill>
+            <a:srgbClr val="1A7A6D"/>
+          </a:solidFill>
+          <a:ln>
+            <a:noFill/>
+          </a:ln>
+          <a:effectLst/>
+        </p:spPr>
+        <p:style>
+          <a:lnRef idx="1">
+            <a:schemeClr val="accent1"/>
+          </a:lnRef>
+          <a:fillRef idx="3">
+            <a:schemeClr val="accent1"/>
+          </a:fillRef>
+          <a:effectRef idx="2">
+            <a:schemeClr val="accent1"/>
+          </a:effectRef>
+          <a:fontRef idx="minor">
+            <a:schemeClr val="lt1"/>
+          </a:fontRef>
+        </p:style>
+        <p:txBody>
+          <a:bodyPr rtlCol="0" anchor="ctr"/>
+          <a:lstStyle/>
+          <a:p>
+            <a:pPr algn="ctr"/>
+          </a:p>
+        </p:txBody>
+      </p:sp>
+      <p:sp>
+        <p:nvSpPr>
+          <p:cNvPr id="15" name="TextBox 14"/>
+          <p:cNvSpPr txBox="1"/>
+          <p:nvPr/>
+        </p:nvSpPr>
+        <p:spPr>
+          <a:xfrm>
+            <a:off x="594360" y="2185416"/>
+            <a:ext cx="640080" cy="822960"/>
+          </a:xfrm>
+          <a:prstGeom prst="rect">
+            <a:avLst/>
+          </a:prstGeom>
+          <a:noFill/>
+        </p:spPr>
+        <p:txBody>
+          <a:bodyPr wrap="square" lIns="54864" rIns="54864" tIns="27432" bIns="18288">
+            <a:spAutoFit/>
+          </a:bodyPr>
+          <a:lstStyle/>
+          <a:p>
+            <a:pPr algn="l">
+              <a:spcBef>
+                <a:spcPts val="0"/>
+              </a:spcBef>
+              <a:spcAft>
+                <a:spcPts val="0"/>
+              </a:spcAft>
+            </a:pPr>
+            <a:r>
+              <a:rPr sz="2200" b="1" i="0">
+                <a:solidFill>
+                  <a:srgbClr val="1A7A6D"/>
+                </a:solidFill>
+                <a:latin typeface="Calibri"/>
+              </a:rPr>
+              <a:t>02</a:t>
+            </a:r>
+          </a:p>
+        </p:txBody>
+      </p:sp>
+      <p:sp>
+        <p:nvSpPr>
+          <p:cNvPr id="16" name="TextBox 15"/>
+          <p:cNvSpPr txBox="1"/>
+          <p:nvPr/>
+        </p:nvSpPr>
+        <p:spPr>
+          <a:xfrm>
+            <a:off x="1280160" y="2203704"/>
+            <a:ext cx="10287000" cy="822960"/>
+          </a:xfrm>
+          <a:prstGeom prst="rect">
+            <a:avLst/>
+          </a:prstGeom>
+          <a:noFill/>
+        </p:spPr>
+        <p:txBody>
+          <a:bodyPr wrap="square" lIns="54864" rIns="54864" tIns="27432" bIns="18288">
+            <a:spAutoFit/>
+          </a:bodyPr>
+          <a:lstStyle/>
+          <a:p>
+            <a:pPr algn="l">
+              <a:spcBef>
+                <a:spcPts val="0"/>
+              </a:spcBef>
+              <a:spcAft>
+                <a:spcPts val="400"/>
+              </a:spcAft>
+            </a:pPr>
+            <a:r>
+              <a:rPr sz="1600" b="1" i="0">
+                <a:solidFill>
+                  <a:srgbClr val="0B3D5C"/>
+                </a:solidFill>
+                <a:latin typeface="Calibri"/>
+              </a:rPr>
+              <a:t>Planar morphology is controlled mainly by polarization anchoring.</a:t>
+            </a:r>
+          </a:p>
+          <a:p>
+            <a:pPr algn="l">
+              <a:spcBef>
+                <a:spcPts val="0"/>
+              </a:spcBef>
+              <a:spcAft>
+                <a:spcPts val="600"/>
+              </a:spcAft>
+            </a:pPr>
+            <a:r>
+              <a:rPr sz="1250" b="0" i="0">
+                <a:solidFill>
+                  <a:srgbClr val="4B5563"/>
+                </a:solidFill>
+                <a:latin typeface="Calibri"/>
+              </a:rPr>
+              <a:t>V3  ·  flow adds ~2%</a:t>
+            </a:r>
+          </a:p>
+        </p:txBody>
+      </p:sp>
+      <p:sp>
+        <p:nvSpPr>
+          <p:cNvPr id="17" name="Rounded Rectangle 16"/>
+          <p:cNvSpPr/>
+          <p:nvPr/>
+        </p:nvSpPr>
+        <p:spPr>
+          <a:xfrm>
+            <a:off x="365760" y="3209544"/>
+            <a:ext cx="11430000" cy="969264"/>
+          </a:xfrm>
+          <a:prstGeom prst="roundRect">
+            <a:avLst>
+              <a:gd name="adj" fmla="val 8000"/>
+            </a:avLst>
+          </a:prstGeom>
+          <a:solidFill>
+            <a:srgbClr val="F3F6F9"/>
+          </a:solidFill>
+          <a:ln>
+            <a:noFill/>
+          </a:ln>
+          <a:effectLst/>
+        </p:spPr>
+        <p:style>
+          <a:lnRef idx="1">
+            <a:schemeClr val="accent1"/>
+          </a:lnRef>
+          <a:fillRef idx="3">
+            <a:schemeClr val="accent1"/>
+          </a:fillRef>
+          <a:effectRef idx="2">
+            <a:schemeClr val="accent1"/>
+          </a:effectRef>
+          <a:fontRef idx="minor">
+            <a:schemeClr val="lt1"/>
+          </a:fontRef>
+        </p:style>
+        <p:txBody>
+          <a:bodyPr rtlCol="0" anchor="ctr"/>
+          <a:lstStyle/>
+          <a:p>
+            <a:pPr algn="ctr"/>
+          </a:p>
+        </p:txBody>
+      </p:sp>
+      <p:sp>
+        <p:nvSpPr>
+          <p:cNvPr id="18" name="Rectangle 17"/>
+          <p:cNvSpPr/>
+          <p:nvPr/>
+        </p:nvSpPr>
+        <p:spPr>
+          <a:xfrm>
+            <a:off x="365760" y="3209544"/>
+            <a:ext cx="109728" cy="969264"/>
+          </a:xfrm>
+          <a:prstGeom prst="rect">
+            <a:avLst/>
+          </a:prstGeom>
+          <a:solidFill>
+            <a:srgbClr val="1A7A6D"/>
+          </a:solidFill>
+          <a:ln>
+            <a:noFill/>
+          </a:ln>
+          <a:effectLst/>
+        </p:spPr>
+        <p:style>
+          <a:lnRef idx="1">
+            <a:schemeClr val="accent1"/>
+          </a:lnRef>
+          <a:fillRef idx="3">
+            <a:schemeClr val="accent1"/>
+          </a:fillRef>
+          <a:effectRef idx="2">
+            <a:schemeClr val="accent1"/>
+          </a:effectRef>
+          <a:fontRef idx="minor">
+            <a:schemeClr val="lt1"/>
+          </a:fontRef>
+        </p:style>
+        <p:txBody>
+          <a:bodyPr rtlCol="0" anchor="ctr"/>
+          <a:lstStyle/>
+          <a:p>
+            <a:pPr algn="ctr"/>
+          </a:p>
+        </p:txBody>
+      </p:sp>
+      <p:sp>
+        <p:nvSpPr>
+          <p:cNvPr id="19" name="TextBox 18"/>
+          <p:cNvSpPr txBox="1"/>
+          <p:nvPr/>
+        </p:nvSpPr>
+        <p:spPr>
+          <a:xfrm>
+            <a:off x="594360" y="3264408"/>
+            <a:ext cx="640080" cy="822960"/>
+          </a:xfrm>
+          <a:prstGeom prst="rect">
+            <a:avLst/>
+          </a:prstGeom>
+          <a:noFill/>
+        </p:spPr>
+        <p:txBody>
+          <a:bodyPr wrap="square" lIns="54864" rIns="54864" tIns="27432" bIns="18288">
+            <a:spAutoFit/>
+          </a:bodyPr>
+          <a:lstStyle/>
+          <a:p>
+            <a:pPr algn="l">
+              <a:spcBef>
+                <a:spcPts val="0"/>
+              </a:spcBef>
+              <a:spcAft>
+                <a:spcPts val="0"/>
+              </a:spcAft>
+            </a:pPr>
+            <a:r>
+              <a:rPr sz="2200" b="1" i="0">
+                <a:solidFill>
+                  <a:srgbClr val="1A7A6D"/>
+                </a:solidFill>
+                <a:latin typeface="Calibri"/>
+              </a:rPr>
+              <a:t>03</a:t>
+            </a:r>
+          </a:p>
+        </p:txBody>
+      </p:sp>
+      <p:sp>
+        <p:nvSpPr>
+          <p:cNvPr id="20" name="TextBox 19"/>
+          <p:cNvSpPr txBox="1"/>
+          <p:nvPr/>
+        </p:nvSpPr>
+        <p:spPr>
+          <a:xfrm>
+            <a:off x="1280160" y="3282696"/>
+            <a:ext cx="10287000" cy="822960"/>
+          </a:xfrm>
+          <a:prstGeom prst="rect">
+            <a:avLst/>
+          </a:prstGeom>
+          <a:noFill/>
+        </p:spPr>
+        <p:txBody>
+          <a:bodyPr wrap="square" lIns="54864" rIns="54864" tIns="27432" bIns="18288">
+            <a:spAutoFit/>
+          </a:bodyPr>
+          <a:lstStyle/>
+          <a:p>
+            <a:pPr algn="l">
+              <a:spcBef>
+                <a:spcPts val="0"/>
+              </a:spcBef>
+              <a:spcAft>
+                <a:spcPts val="400"/>
+              </a:spcAft>
+            </a:pPr>
+            <a:r>
+              <a:rPr sz="1600" b="1" i="0">
+                <a:solidFill>
+                  <a:srgbClr val="0B3D5C"/>
+                </a:solidFill>
+                <a:latin typeface="Calibri"/>
+              </a:rPr>
+              <a:t>The friction-dominated model retains crawling behaviour.</a:t>
+            </a:r>
+          </a:p>
+          <a:p>
+            <a:pPr algn="l">
+              <a:spcBef>
+                <a:spcPts val="0"/>
+              </a:spcBef>
+              <a:spcAft>
+                <a:spcPts val="600"/>
+              </a:spcAft>
+            </a:pPr>
+            <a:r>
+              <a:rPr sz="1250" b="0" i="0">
+                <a:solidFill>
+                  <a:srgbClr val="4B5563"/>
+                </a:solidFill>
+                <a:latin typeface="Calibri"/>
+              </a:rPr>
+              <a:t>V4  ·  speed 0.801  ·  0.2% agreement  ·  ~5× faster  ·  local</a:t>
+            </a:r>
+          </a:p>
+        </p:txBody>
+      </p:sp>
+      <p:sp>
+        <p:nvSpPr>
+          <p:cNvPr id="21" name="Rounded Rectangle 20"/>
+          <p:cNvSpPr/>
+          <p:nvPr/>
+        </p:nvSpPr>
+        <p:spPr>
+          <a:xfrm>
+            <a:off x="365760" y="4288536"/>
+            <a:ext cx="11430000" cy="969264"/>
+          </a:xfrm>
+          <a:prstGeom prst="roundRect">
+            <a:avLst>
+              <a:gd name="adj" fmla="val 8000"/>
+            </a:avLst>
+          </a:prstGeom>
+          <a:solidFill>
+            <a:srgbClr val="F3F6F9"/>
+          </a:solidFill>
+          <a:ln>
+            <a:noFill/>
+          </a:ln>
+          <a:effectLst/>
+        </p:spPr>
+        <p:style>
+          <a:lnRef idx="1">
+            <a:schemeClr val="accent1"/>
+          </a:lnRef>
+          <a:fillRef idx="3">
+            <a:schemeClr val="accent1"/>
+          </a:fillRef>
+          <a:effectRef idx="2">
+            <a:schemeClr val="accent1"/>
+          </a:effectRef>
+          <a:fontRef idx="minor">
+            <a:schemeClr val="lt1"/>
+          </a:fontRef>
+        </p:style>
+        <p:txBody>
+          <a:bodyPr rtlCol="0" anchor="ctr"/>
+          <a:lstStyle/>
+          <a:p>
+            <a:pPr algn="ctr"/>
+          </a:p>
+        </p:txBody>
+      </p:sp>
+      <p:sp>
+        <p:nvSpPr>
+          <p:cNvPr id="22" name="Rectangle 21"/>
+          <p:cNvSpPr/>
+          <p:nvPr/>
+        </p:nvSpPr>
+        <p:spPr>
+          <a:xfrm>
+            <a:off x="365760" y="4288536"/>
+            <a:ext cx="109728" cy="969264"/>
+          </a:xfrm>
+          <a:prstGeom prst="rect">
+            <a:avLst/>
+          </a:prstGeom>
+          <a:solidFill>
+            <a:srgbClr val="1A7A6D"/>
+          </a:solidFill>
+          <a:ln>
+            <a:noFill/>
+          </a:ln>
+          <a:effectLst/>
+        </p:spPr>
+        <p:style>
+          <a:lnRef idx="1">
+            <a:schemeClr val="accent1"/>
+          </a:lnRef>
+          <a:fillRef idx="3">
+            <a:schemeClr val="accent1"/>
+          </a:fillRef>
+          <a:effectRef idx="2">
+            <a:schemeClr val="accent1"/>
+          </a:effectRef>
+          <a:fontRef idx="minor">
+            <a:schemeClr val="lt1"/>
+          </a:fontRef>
+        </p:style>
+        <p:txBody>
+          <a:bodyPr rtlCol="0" anchor="ctr"/>
+          <a:lstStyle/>
+          <a:p>
+            <a:pPr algn="ctr"/>
+          </a:p>
+        </p:txBody>
+      </p:sp>
+      <p:sp>
+        <p:nvSpPr>
+          <p:cNvPr id="23" name="TextBox 22"/>
+          <p:cNvSpPr txBox="1"/>
+          <p:nvPr/>
+        </p:nvSpPr>
+        <p:spPr>
+          <a:xfrm>
+            <a:off x="594360" y="4343400"/>
+            <a:ext cx="640080" cy="822960"/>
+          </a:xfrm>
+          <a:prstGeom prst="rect">
+            <a:avLst/>
+          </a:prstGeom>
+          <a:noFill/>
+        </p:spPr>
+        <p:txBody>
+          <a:bodyPr wrap="square" lIns="54864" rIns="54864" tIns="27432" bIns="18288">
+            <a:spAutoFit/>
+          </a:bodyPr>
+          <a:lstStyle/>
+          <a:p>
+            <a:pPr algn="l">
+              <a:spcBef>
+                <a:spcPts val="0"/>
+              </a:spcBef>
+              <a:spcAft>
+                <a:spcPts val="0"/>
+              </a:spcAft>
+            </a:pPr>
+            <a:r>
+              <a:rPr sz="2200" b="1" i="0">
+                <a:solidFill>
+                  <a:srgbClr val="1A7A6D"/>
+                </a:solidFill>
+                <a:latin typeface="Calibri"/>
+              </a:rPr>
+              <a:t>04</a:t>
+            </a:r>
+          </a:p>
+        </p:txBody>
+      </p:sp>
+      <p:sp>
+        <p:nvSpPr>
+          <p:cNvPr id="24" name="TextBox 23"/>
+          <p:cNvSpPr txBox="1"/>
+          <p:nvPr/>
+        </p:nvSpPr>
+        <p:spPr>
+          <a:xfrm>
+            <a:off x="1280160" y="4361688"/>
+            <a:ext cx="10287000" cy="822960"/>
+          </a:xfrm>
+          <a:prstGeom prst="rect">
+            <a:avLst/>
+          </a:prstGeom>
+          <a:noFill/>
+        </p:spPr>
+        <p:txBody>
+          <a:bodyPr wrap="square" lIns="54864" rIns="54864" tIns="27432" bIns="18288">
+            <a:spAutoFit/>
+          </a:bodyPr>
+          <a:lstStyle/>
+          <a:p>
+            <a:pPr algn="l">
+              <a:spcBef>
+                <a:spcPts val="0"/>
+              </a:spcBef>
+              <a:spcAft>
+                <a:spcPts val="400"/>
+              </a:spcAft>
+            </a:pPr>
+            <a:r>
+              <a:rPr sz="1600" b="1" i="0">
+                <a:solidFill>
+                  <a:srgbClr val="0B3D5C"/>
+                </a:solidFill>
+                <a:latin typeface="Calibri"/>
+              </a:rPr>
+              <a:t>Volume conservation is more appropriate than rigid projected-area conservation.</a:t>
+            </a:r>
+          </a:p>
+          <a:p>
+            <a:pPr algn="l">
+              <a:spcBef>
+                <a:spcPts val="0"/>
+              </a:spcBef>
+              <a:spcAft>
+                <a:spcPts val="600"/>
+              </a:spcAft>
+            </a:pPr>
+            <a:r>
+              <a:rPr sz="1250" b="0" i="0">
+                <a:solidFill>
+                  <a:srgbClr val="4B5563"/>
+                </a:solidFill>
+                <a:latin typeface="Calibri"/>
+              </a:rPr>
+              <a:t>kₐ = 5: area +15%      kₐ = 0: inflation, crawling lost</a:t>
+            </a:r>
+          </a:p>
+        </p:txBody>
+      </p:sp>
+      <p:sp>
+        <p:nvSpPr>
+          <p:cNvPr id="25" name="Rounded Rectangle 24"/>
+          <p:cNvSpPr/>
+          <p:nvPr/>
+        </p:nvSpPr>
+        <p:spPr>
+          <a:xfrm>
+            <a:off x="365760" y="5468112"/>
+            <a:ext cx="11430000" cy="960120"/>
+          </a:xfrm>
+          <a:prstGeom prst="roundRect">
+            <a:avLst>
+              <a:gd name="adj" fmla="val 8000"/>
+            </a:avLst>
+          </a:prstGeom>
+          <a:solidFill>
+            <a:srgbClr val="0B3D5C"/>
+          </a:solidFill>
+          <a:ln>
+            <a:noFill/>
+          </a:ln>
+          <a:effectLst/>
+        </p:spPr>
+        <p:style>
+          <a:lnRef idx="1">
+            <a:schemeClr val="accent1"/>
+          </a:lnRef>
+          <a:fillRef idx="3">
+            <a:schemeClr val="accent1"/>
+          </a:fillRef>
+          <a:effectRef idx="2">
+            <a:schemeClr val="accent1"/>
+          </a:effectRef>
+          <a:fontRef idx="minor">
+            <a:schemeClr val="lt1"/>
+          </a:fontRef>
+        </p:style>
+        <p:txBody>
+          <a:bodyPr rtlCol="0" anchor="ctr"/>
+          <a:lstStyle/>
+          <a:p>
+            <a:pPr algn="ctr"/>
+          </a:p>
+        </p:txBody>
+      </p:sp>
+      <p:sp>
+        <p:nvSpPr>
+          <p:cNvPr id="26" name="TextBox 25"/>
+          <p:cNvSpPr txBox="1"/>
+          <p:nvPr/>
+        </p:nvSpPr>
+        <p:spPr>
+          <a:xfrm>
+            <a:off x="548640" y="5577840"/>
+            <a:ext cx="11064240" cy="777240"/>
+          </a:xfrm>
+          <a:prstGeom prst="rect">
+            <a:avLst/>
+          </a:prstGeom>
+          <a:noFill/>
+        </p:spPr>
+        <p:txBody>
+          <a:bodyPr wrap="square" lIns="54864" rIns="54864" tIns="27432" bIns="18288">
+            <a:spAutoFit/>
+          </a:bodyPr>
+          <a:lstStyle/>
+          <a:p>
+            <a:pPr algn="l">
+              <a:lnSpc>
+                <a:spcPct val="105000"/>
+              </a:lnSpc>
+              <a:spcBef>
+                <a:spcPts val="0"/>
+              </a:spcBef>
+              <a:spcAft>
+                <a:spcPts val="0"/>
+              </a:spcAft>
+            </a:pPr>
+            <a:r>
+              <a:rPr sz="1600" b="1" i="0">
+                <a:solidFill>
+                  <a:srgbClr val="FFFFFF"/>
+                </a:solidFill>
+                <a:latin typeface="Calibri"/>
+              </a:rPr>
+              <a:t>Take-home: a verified local single-cell model now reproduces crawling without a global Stokes solve — providing a computational base for many-cell simulations.</a:t>
+            </a:r>
+          </a:p>
+        </p:txBody>
+      </p:sp>
+    </p:spTree>
+  </p:cSld>
+  <p:clrMapOvr>
+    <a:masterClrMapping/>
+  </p:clrMapOvr>
+</p:sld>
+</file>
+
+<file path=ppt/slides/slide9.xml><?xml version="1.0" encoding="utf-8"?>
+<p:sld xmlns:a="http://schemas.openxmlformats.org/drawingml/2006/main" xmlns:p="http://schemas.openxmlformats.org/presentationml/2006/main" xmlns:r="http://schemas.openxmlformats.org/officeDocument/2006/relationships">
+  <p:cSld>
+    <p:spTree>
+      <p:nvGrpSpPr>
+        <p:cNvPr id="1" name=""/>
+        <p:cNvGrpSpPr/>
+        <p:nvPr/>
+      </p:nvGrpSpPr>
+      <p:grpSpPr/>
+      <p:sp>
+        <p:nvSpPr>
+          <p:cNvPr id="2" name="Rectangle 1"/>
+          <p:cNvSpPr/>
+          <p:nvPr/>
+        </p:nvSpPr>
+        <p:spPr>
+          <a:xfrm>
+            <a:off x="0" y="0"/>
+            <a:ext cx="12191695" cy="6858000"/>
+          </a:xfrm>
+          <a:prstGeom prst="rect">
+            <a:avLst/>
+          </a:prstGeom>
+          <a:solidFill>
+            <a:srgbClr val="FFFFFF"/>
+          </a:solidFill>
+          <a:ln>
+            <a:noFill/>
+          </a:ln>
+          <a:effectLst/>
+        </p:spPr>
+        <p:style>
+          <a:lnRef idx="1">
+            <a:schemeClr val="accent1"/>
+          </a:lnRef>
+          <a:fillRef idx="3">
+            <a:schemeClr val="accent1"/>
+          </a:fillRef>
+          <a:effectRef idx="2">
+            <a:schemeClr val="accent1"/>
+          </a:effectRef>
+          <a:fontRef idx="minor">
+            <a:schemeClr val="lt1"/>
+          </a:fontRef>
+        </p:style>
+        <p:txBody>
+          <a:bodyPr rtlCol="0" anchor="ctr"/>
+          <a:lstStyle/>
+          <a:p>
+            <a:pPr algn="ctr"/>
+          </a:p>
+        </p:txBody>
+      </p:sp>
+      <p:sp>
+        <p:nvSpPr>
+          <p:cNvPr id="3" name="Rectangle 2"/>
+          <p:cNvSpPr/>
+          <p:nvPr/>
+        </p:nvSpPr>
+        <p:spPr>
+          <a:xfrm>
+            <a:off x="0" y="0"/>
+            <a:ext cx="12191695" cy="786384"/>
+          </a:xfrm>
+          <a:prstGeom prst="rect">
+            <a:avLst/>
+          </a:prstGeom>
+          <a:solidFill>
+            <a:srgbClr val="0B3D5C"/>
+          </a:solidFill>
+          <a:ln>
+            <a:noFill/>
+          </a:ln>
+          <a:effectLst/>
+        </p:spPr>
+        <p:style>
+          <a:lnRef idx="1">
+            <a:schemeClr val="accent1"/>
+          </a:lnRef>
+          <a:fillRef idx="3">
+            <a:schemeClr val="accent1"/>
+          </a:fillRef>
+          <a:effectRef idx="2">
+            <a:schemeClr val="accent1"/>
+          </a:effectRef>
+          <a:fontRef idx="minor">
+            <a:schemeClr val="lt1"/>
+          </a:fontRef>
+        </p:style>
+        <p:txBody>
+          <a:bodyPr rtlCol="0" anchor="ctr"/>
+          <a:lstStyle/>
+          <a:p>
+            <a:pPr algn="ctr"/>
+          </a:p>
+        </p:txBody>
+      </p:sp>
+      <p:sp>
+        <p:nvSpPr>
+          <p:cNvPr id="4" name="Rectangle 3"/>
+          <p:cNvSpPr/>
+          <p:nvPr/>
+        </p:nvSpPr>
+        <p:spPr>
+          <a:xfrm>
+            <a:off x="0" y="786384"/>
+            <a:ext cx="12191695" cy="45720"/>
+          </a:xfrm>
+          <a:prstGeom prst="rect">
+            <a:avLst/>
+          </a:prstGeom>
+          <a:solidFill>
+            <a:srgbClr val="1A7A6D"/>
+          </a:solidFill>
+          <a:ln>
+            <a:noFill/>
+          </a:ln>
+          <a:effectLst/>
+        </p:spPr>
+        <p:style>
+          <a:lnRef idx="1">
+            <a:schemeClr val="accent1"/>
+          </a:lnRef>
+          <a:fillRef idx="3">
+            <a:schemeClr val="accent1"/>
+          </a:fillRef>
+          <a:effectRef idx="2">
+            <a:schemeClr val="accent1"/>
+          </a:effectRef>
+          <a:fontRef idx="minor">
+            <a:schemeClr val="lt1"/>
+          </a:fontRef>
+        </p:style>
+        <p:txBody>
+          <a:bodyPr rtlCol="0" anchor="ctr"/>
+          <a:lstStyle/>
+          <a:p>
+            <a:pPr algn="ctr"/>
+          </a:p>
+        </p:txBody>
+      </p:sp>
+      <p:sp>
+        <p:nvSpPr>
+          <p:cNvPr id="5" name="TextBox 4"/>
+          <p:cNvSpPr txBox="1"/>
+          <p:nvPr/>
+        </p:nvSpPr>
+        <p:spPr>
+          <a:xfrm>
+            <a:off x="365760" y="91440"/>
+            <a:ext cx="11338560" cy="420624"/>
+          </a:xfrm>
+          <a:prstGeom prst="rect">
+            <a:avLst/>
+          </a:prstGeom>
+          <a:noFill/>
+        </p:spPr>
+        <p:txBody>
+          <a:bodyPr wrap="square" lIns="54864" rIns="54864" tIns="27432" bIns="18288">
+            <a:spAutoFit/>
+          </a:bodyPr>
+          <a:lstStyle/>
+          <a:p>
+            <a:pPr algn="l">
+              <a:spcBef>
+                <a:spcPts val="0"/>
+              </a:spcBef>
+              <a:spcAft>
+                <a:spcPts val="0"/>
+              </a:spcAft>
+            </a:pPr>
+            <a:r>
+              <a:rPr sz="2500" b="1" i="0">
+                <a:solidFill>
+                  <a:srgbClr val="FFFFFF"/>
+                </a:solidFill>
+                <a:latin typeface="Calibri"/>
+              </a:rPr>
+              <a:t>From one cell to many</a:t>
+            </a:r>
+          </a:p>
+        </p:txBody>
+      </p:sp>
+      <p:sp>
+        <p:nvSpPr>
+          <p:cNvPr id="6" name="Rectangle 5"/>
+          <p:cNvSpPr/>
+          <p:nvPr/>
+        </p:nvSpPr>
+        <p:spPr>
+          <a:xfrm>
+            <a:off x="0" y="6601968"/>
+            <a:ext cx="12191695" cy="256032"/>
+          </a:xfrm>
+          <a:prstGeom prst="rect">
+            <a:avLst/>
+          </a:prstGeom>
+          <a:solidFill>
+            <a:srgbClr val="F3F6F9"/>
+          </a:solidFill>
+          <a:ln>
+            <a:noFill/>
+          </a:ln>
+          <a:effectLst/>
+        </p:spPr>
+        <p:style>
+          <a:lnRef idx="1">
+            <a:schemeClr val="accent1"/>
+          </a:lnRef>
+          <a:fillRef idx="3">
+            <a:schemeClr val="accent1"/>
+          </a:fillRef>
+          <a:effectRef idx="2">
+            <a:schemeClr val="accent1"/>
+          </a:effectRef>
+          <a:fontRef idx="minor">
+            <a:schemeClr val="lt1"/>
+          </a:fontRef>
+        </p:style>
+        <p:txBody>
+          <a:bodyPr rtlCol="0" anchor="ctr"/>
+          <a:lstStyle/>
+          <a:p>
+            <a:pPr algn="ctr"/>
+          </a:p>
+        </p:txBody>
+      </p:sp>
+      <p:sp>
+        <p:nvSpPr>
+          <p:cNvPr id="7" name="TextBox 6"/>
+          <p:cNvSpPr txBox="1"/>
+          <p:nvPr/>
+        </p:nvSpPr>
+        <p:spPr>
+          <a:xfrm>
+            <a:off x="320040" y="6601968"/>
+            <a:ext cx="9601200" cy="237744"/>
+          </a:xfrm>
+          <a:prstGeom prst="rect">
+            <a:avLst/>
+          </a:prstGeom>
+          <a:noFill/>
+        </p:spPr>
+        <p:txBody>
+          <a:bodyPr wrap="square" lIns="54864" rIns="54864" tIns="27432" bIns="18288">
+            <a:spAutoFit/>
+          </a:bodyPr>
+          <a:lstStyle/>
+          <a:p>
+            <a:pPr algn="l">
+              <a:spcBef>
+                <a:spcPts val="0"/>
+              </a:spcBef>
+              <a:spcAft>
+                <a:spcPts val="0"/>
+              </a:spcAft>
+            </a:pPr>
+            <a:r>
+              <a:rPr sz="1100" b="0" i="0">
+                <a:solidFill>
+                  <a:srgbClr val="4B5563"/>
+                </a:solidFill>
+                <a:latin typeface="Calibri"/>
+              </a:rPr>
+              <a:t>PYD411  ·  Mid-term  ·  Dept of Physics, IIT Delhi  ·  Siddharth Kumar &amp; Soumik Roy</a:t>
+            </a:r>
+          </a:p>
+        </p:txBody>
+      </p:sp>
+      <p:sp>
+        <p:nvSpPr>
+          <p:cNvPr id="8" name="TextBox 7"/>
+          <p:cNvSpPr txBox="1"/>
+          <p:nvPr/>
+        </p:nvSpPr>
+        <p:spPr>
+          <a:xfrm>
+            <a:off x="10607040" y="6601968"/>
+            <a:ext cx="1280160" cy="237744"/>
+          </a:xfrm>
+          <a:prstGeom prst="rect">
+            <a:avLst/>
+          </a:prstGeom>
+          <a:noFill/>
+        </p:spPr>
+        <p:txBody>
+          <a:bodyPr wrap="square" lIns="54864" rIns="54864" tIns="27432" bIns="18288">
+            <a:spAutoFit/>
+          </a:bodyPr>
+          <a:lstStyle/>
+          <a:p>
+            <a:pPr algn="r">
+              <a:spcBef>
+                <a:spcPts val="0"/>
+              </a:spcBef>
+              <a:spcAft>
+                <a:spcPts val="0"/>
+              </a:spcAft>
+            </a:pPr>
+            <a:r>
+              <a:rPr sz="1100" b="0" i="0">
+                <a:solidFill>
+                  <a:srgbClr val="4B5563"/>
+                </a:solidFill>
+                <a:latin typeface="Calibri"/>
+              </a:rPr>
+              <a:t>9 / 9</a:t>
             </a:r>
           </a:p>
         </p:txBody>

--- a/presentation/PYD411_midsem_presentation.pptx
+++ b/presentation/PYD411_midsem_presentation.pptx
@@ -14,6 +14,7 @@
     <p:sldId id="262" r:id="rId14"/>
     <p:sldId id="263" r:id="rId15"/>
     <p:sldId id="264" r:id="rId16"/>
+    <p:sldId id="265" r:id="rId17"/>
   </p:sldIdLst>
   <p:sldSz cx="12191695" cy="6858000" type="screen4x3"/>
   <p:notesSz cx="6858000" cy="9144000"/>
@@ -535,6 +536,76 @@
 </p:notes>
 </file>
 
+<file path=ppt/notesSlides/notesSlide10.xml><?xml version="1.0" encoding="utf-8"?>
+<p:notes xmlns:a="http://schemas.openxmlformats.org/drawingml/2006/main" xmlns:p="http://schemas.openxmlformats.org/presentationml/2006/main" xmlns:r="http://schemas.openxmlformats.org/officeDocument/2006/relationships">
+  <p:cSld>
+    <p:spTree>
+      <p:nvGrpSpPr>
+        <p:cNvPr id="1" name=""/>
+        <p:cNvGrpSpPr/>
+        <p:nvPr/>
+      </p:nvGrpSpPr>
+      <p:grpSpPr>
+        <a:xfrm>
+          <a:off x="0" y="0"/>
+          <a:ext cx="0" cy="0"/>
+          <a:chOff x="0" y="0"/>
+          <a:chExt cx="0" cy="0"/>
+        </a:xfrm>
+      </p:grpSpPr>
+      <p:sp>
+        <p:nvSpPr>
+          <p:cNvPr id="2" name="Slide Image Placeholder 1"/>
+          <p:cNvSpPr>
+            <a:spLocks noGrp="1"/>
+          </p:cNvSpPr>
+          <p:nvPr>
+            <p:ph type="sldImg" idx="2"/>
+          </p:nvPr>
+        </p:nvSpPr>
+        <p:spPr/>
+      </p:sp>
+      <p:sp>
+        <p:nvSpPr>
+          <p:cNvPr id="3" name="Notes Placeholder 2"/>
+          <p:cNvSpPr>
+            <a:spLocks noGrp="1"/>
+          </p:cNvSpPr>
+          <p:nvPr>
+            <p:ph type="body" idx="3" sz="quarter"/>
+          </p:nvPr>
+        </p:nvSpPr>
+        <p:spPr/>
+        <p:txBody>
+          <a:bodyPr/>
+          <a:lstStyle/>
+          <a:p>
+            <a:r>
+              <a:t>The immediate next step is two-cell interaction, followed by collisions and dynamic polarity. The ultimate goal is to study collective behaviour using the local formulation.</a:t>
+            </a:r>
+          </a:p>
+        </p:txBody>
+      </p:sp>
+      <p:sp>
+        <p:nvSpPr>
+          <p:cNvPr id="4" name="Slide Number Placeholder 3"/>
+          <p:cNvSpPr>
+            <a:spLocks noGrp="1"/>
+          </p:cNvSpPr>
+          <p:nvPr>
+            <p:ph type="sldNum" idx="5" sz="quarter"/>
+          </p:nvPr>
+        </p:nvSpPr>
+        <p:spPr/>
+      </p:sp>
+    </p:spTree>
+  </p:cSld>
+  <p:clrMapOvr>
+    <a:masterClrMapping/>
+  </p:clrMapOvr>
+</p:notes>
+</file>
+
 <file path=ppt/notesSlides/notesSlide2.xml><?xml version="1.0" encoding="utf-8"?>
 <p:notes xmlns:a="http://schemas.openxmlformats.org/drawingml/2006/main" xmlns:p="http://schemas.openxmlformats.org/presentationml/2006/main" xmlns:r="http://schemas.openxmlformats.org/officeDocument/2006/relationships">
   <p:cSld>
@@ -1000,7 +1071,7 @@
           <a:lstStyle/>
           <a:p>
             <a:r>
-              <a:t>The main outcome is not simply a faster simulation. We identified which mechanisms control the observed behaviour and reduced the model while retaining the essential single-cell crawling dynamics.</a:t>
+              <a:t>This is not a finished result, it is evidence that the extension to many cells works mechanically. Two cells, each running the exact single-cell Version 4 equations, coupled by one new steric repulsion term in the free energy. A glancing collision shows a clean approach, contact, and scatter, with no merging and no global solve required. Head-on collisions are harder and are flagged as the next thing to get right.</a:t>
             </a:r>
           </a:p>
         </p:txBody>
@@ -1070,7 +1141,7 @@
           <a:lstStyle/>
           <a:p>
             <a:r>
-              <a:t>The immediate next step is two-cell interaction, followed by collisions and dynamic polarity. The ultimate goal is to study collective behaviour using the local formulation.</a:t>
+              <a:t>The main outcome is not simply a faster simulation. We identified which mechanisms control the observed behaviour and reduced the model while retaining the essential single-cell crawling dynamics.</a:t>
             </a:r>
           </a:p>
         </p:txBody>
@@ -4490,7 +4561,988 @@
                 </a:solidFill>
                 <a:latin typeface="Calibri"/>
               </a:rPr>
-              <a:t>8 minutes  ·  9 slides  ·  2 minutes for discussion</a:t>
+              <a:t>8 minutes  ·  10 slides  ·  2 minutes for discussion</a:t>
+            </a:r>
+          </a:p>
+        </p:txBody>
+      </p:sp>
+    </p:spTree>
+  </p:cSld>
+  <p:clrMapOvr>
+    <a:masterClrMapping/>
+  </p:clrMapOvr>
+</p:sld>
+</file>
+
+<file path=ppt/slides/slide10.xml><?xml version="1.0" encoding="utf-8"?>
+<p:sld xmlns:a="http://schemas.openxmlformats.org/drawingml/2006/main" xmlns:p="http://schemas.openxmlformats.org/presentationml/2006/main" xmlns:r="http://schemas.openxmlformats.org/officeDocument/2006/relationships">
+  <p:cSld>
+    <p:spTree>
+      <p:nvGrpSpPr>
+        <p:cNvPr id="1" name=""/>
+        <p:cNvGrpSpPr/>
+        <p:nvPr/>
+      </p:nvGrpSpPr>
+      <p:grpSpPr/>
+      <p:sp>
+        <p:nvSpPr>
+          <p:cNvPr id="2" name="Rectangle 1"/>
+          <p:cNvSpPr/>
+          <p:nvPr/>
+        </p:nvSpPr>
+        <p:spPr>
+          <a:xfrm>
+            <a:off x="0" y="0"/>
+            <a:ext cx="12191695" cy="6858000"/>
+          </a:xfrm>
+          <a:prstGeom prst="rect">
+            <a:avLst/>
+          </a:prstGeom>
+          <a:solidFill>
+            <a:srgbClr val="FFFFFF"/>
+          </a:solidFill>
+          <a:ln>
+            <a:noFill/>
+          </a:ln>
+          <a:effectLst/>
+        </p:spPr>
+        <p:style>
+          <a:lnRef idx="1">
+            <a:schemeClr val="accent1"/>
+          </a:lnRef>
+          <a:fillRef idx="3">
+            <a:schemeClr val="accent1"/>
+          </a:fillRef>
+          <a:effectRef idx="2">
+            <a:schemeClr val="accent1"/>
+          </a:effectRef>
+          <a:fontRef idx="minor">
+            <a:schemeClr val="lt1"/>
+          </a:fontRef>
+        </p:style>
+        <p:txBody>
+          <a:bodyPr rtlCol="0" anchor="ctr"/>
+          <a:lstStyle/>
+          <a:p>
+            <a:pPr algn="ctr"/>
+          </a:p>
+        </p:txBody>
+      </p:sp>
+      <p:sp>
+        <p:nvSpPr>
+          <p:cNvPr id="3" name="Rectangle 2"/>
+          <p:cNvSpPr/>
+          <p:nvPr/>
+        </p:nvSpPr>
+        <p:spPr>
+          <a:xfrm>
+            <a:off x="0" y="0"/>
+            <a:ext cx="12191695" cy="786384"/>
+          </a:xfrm>
+          <a:prstGeom prst="rect">
+            <a:avLst/>
+          </a:prstGeom>
+          <a:solidFill>
+            <a:srgbClr val="0B3D5C"/>
+          </a:solidFill>
+          <a:ln>
+            <a:noFill/>
+          </a:ln>
+          <a:effectLst/>
+        </p:spPr>
+        <p:style>
+          <a:lnRef idx="1">
+            <a:schemeClr val="accent1"/>
+          </a:lnRef>
+          <a:fillRef idx="3">
+            <a:schemeClr val="accent1"/>
+          </a:fillRef>
+          <a:effectRef idx="2">
+            <a:schemeClr val="accent1"/>
+          </a:effectRef>
+          <a:fontRef idx="minor">
+            <a:schemeClr val="lt1"/>
+          </a:fontRef>
+        </p:style>
+        <p:txBody>
+          <a:bodyPr rtlCol="0" anchor="ctr"/>
+          <a:lstStyle/>
+          <a:p>
+            <a:pPr algn="ctr"/>
+          </a:p>
+        </p:txBody>
+      </p:sp>
+      <p:sp>
+        <p:nvSpPr>
+          <p:cNvPr id="4" name="Rectangle 3"/>
+          <p:cNvSpPr/>
+          <p:nvPr/>
+        </p:nvSpPr>
+        <p:spPr>
+          <a:xfrm>
+            <a:off x="0" y="786384"/>
+            <a:ext cx="12191695" cy="45720"/>
+          </a:xfrm>
+          <a:prstGeom prst="rect">
+            <a:avLst/>
+          </a:prstGeom>
+          <a:solidFill>
+            <a:srgbClr val="1A7A6D"/>
+          </a:solidFill>
+          <a:ln>
+            <a:noFill/>
+          </a:ln>
+          <a:effectLst/>
+        </p:spPr>
+        <p:style>
+          <a:lnRef idx="1">
+            <a:schemeClr val="accent1"/>
+          </a:lnRef>
+          <a:fillRef idx="3">
+            <a:schemeClr val="accent1"/>
+          </a:fillRef>
+          <a:effectRef idx="2">
+            <a:schemeClr val="accent1"/>
+          </a:effectRef>
+          <a:fontRef idx="minor">
+            <a:schemeClr val="lt1"/>
+          </a:fontRef>
+        </p:style>
+        <p:txBody>
+          <a:bodyPr rtlCol="0" anchor="ctr"/>
+          <a:lstStyle/>
+          <a:p>
+            <a:pPr algn="ctr"/>
+          </a:p>
+        </p:txBody>
+      </p:sp>
+      <p:sp>
+        <p:nvSpPr>
+          <p:cNvPr id="5" name="TextBox 4"/>
+          <p:cNvSpPr txBox="1"/>
+          <p:nvPr/>
+        </p:nvSpPr>
+        <p:spPr>
+          <a:xfrm>
+            <a:off x="365760" y="91440"/>
+            <a:ext cx="11338560" cy="420624"/>
+          </a:xfrm>
+          <a:prstGeom prst="rect">
+            <a:avLst/>
+          </a:prstGeom>
+          <a:noFill/>
+        </p:spPr>
+        <p:txBody>
+          <a:bodyPr wrap="square" lIns="54864" rIns="54864" tIns="27432" bIns="18288">
+            <a:spAutoFit/>
+          </a:bodyPr>
+          <a:lstStyle/>
+          <a:p>
+            <a:pPr algn="l">
+              <a:spcBef>
+                <a:spcPts val="0"/>
+              </a:spcBef>
+              <a:spcAft>
+                <a:spcPts val="0"/>
+              </a:spcAft>
+            </a:pPr>
+            <a:r>
+              <a:rPr sz="2500" b="1" i="0">
+                <a:solidFill>
+                  <a:srgbClr val="FFFFFF"/>
+                </a:solidFill>
+                <a:latin typeface="Calibri"/>
+              </a:rPr>
+              <a:t>From one cell to many</a:t>
+            </a:r>
+          </a:p>
+        </p:txBody>
+      </p:sp>
+      <p:sp>
+        <p:nvSpPr>
+          <p:cNvPr id="6" name="Rectangle 5"/>
+          <p:cNvSpPr/>
+          <p:nvPr/>
+        </p:nvSpPr>
+        <p:spPr>
+          <a:xfrm>
+            <a:off x="0" y="6601968"/>
+            <a:ext cx="12191695" cy="256032"/>
+          </a:xfrm>
+          <a:prstGeom prst="rect">
+            <a:avLst/>
+          </a:prstGeom>
+          <a:solidFill>
+            <a:srgbClr val="F3F6F9"/>
+          </a:solidFill>
+          <a:ln>
+            <a:noFill/>
+          </a:ln>
+          <a:effectLst/>
+        </p:spPr>
+        <p:style>
+          <a:lnRef idx="1">
+            <a:schemeClr val="accent1"/>
+          </a:lnRef>
+          <a:fillRef idx="3">
+            <a:schemeClr val="accent1"/>
+          </a:fillRef>
+          <a:effectRef idx="2">
+            <a:schemeClr val="accent1"/>
+          </a:effectRef>
+          <a:fontRef idx="minor">
+            <a:schemeClr val="lt1"/>
+          </a:fontRef>
+        </p:style>
+        <p:txBody>
+          <a:bodyPr rtlCol="0" anchor="ctr"/>
+          <a:lstStyle/>
+          <a:p>
+            <a:pPr algn="ctr"/>
+          </a:p>
+        </p:txBody>
+      </p:sp>
+      <p:sp>
+        <p:nvSpPr>
+          <p:cNvPr id="7" name="TextBox 6"/>
+          <p:cNvSpPr txBox="1"/>
+          <p:nvPr/>
+        </p:nvSpPr>
+        <p:spPr>
+          <a:xfrm>
+            <a:off x="320040" y="6601968"/>
+            <a:ext cx="9601200" cy="237744"/>
+          </a:xfrm>
+          <a:prstGeom prst="rect">
+            <a:avLst/>
+          </a:prstGeom>
+          <a:noFill/>
+        </p:spPr>
+        <p:txBody>
+          <a:bodyPr wrap="square" lIns="54864" rIns="54864" tIns="27432" bIns="18288">
+            <a:spAutoFit/>
+          </a:bodyPr>
+          <a:lstStyle/>
+          <a:p>
+            <a:pPr algn="l">
+              <a:spcBef>
+                <a:spcPts val="0"/>
+              </a:spcBef>
+              <a:spcAft>
+                <a:spcPts val="0"/>
+              </a:spcAft>
+            </a:pPr>
+            <a:r>
+              <a:rPr sz="1100" b="0" i="0">
+                <a:solidFill>
+                  <a:srgbClr val="4B5563"/>
+                </a:solidFill>
+                <a:latin typeface="Calibri"/>
+              </a:rPr>
+              <a:t>PYD411  ·  Mid-term  ·  Dept of Physics, IIT Delhi  ·  Siddharth Kumar &amp; Soumik Roy</a:t>
+            </a:r>
+          </a:p>
+        </p:txBody>
+      </p:sp>
+      <p:sp>
+        <p:nvSpPr>
+          <p:cNvPr id="8" name="TextBox 7"/>
+          <p:cNvSpPr txBox="1"/>
+          <p:nvPr/>
+        </p:nvSpPr>
+        <p:spPr>
+          <a:xfrm>
+            <a:off x="10607040" y="6601968"/>
+            <a:ext cx="1280160" cy="237744"/>
+          </a:xfrm>
+          <a:prstGeom prst="rect">
+            <a:avLst/>
+          </a:prstGeom>
+          <a:noFill/>
+        </p:spPr>
+        <p:txBody>
+          <a:bodyPr wrap="square" lIns="54864" rIns="54864" tIns="27432" bIns="18288">
+            <a:spAutoFit/>
+          </a:bodyPr>
+          <a:lstStyle/>
+          <a:p>
+            <a:pPr algn="r">
+              <a:spcBef>
+                <a:spcPts val="0"/>
+              </a:spcBef>
+              <a:spcAft>
+                <a:spcPts val="0"/>
+              </a:spcAft>
+            </a:pPr>
+            <a:r>
+              <a:rPr sz="1100" b="0" i="0">
+                <a:solidFill>
+                  <a:srgbClr val="4B5563"/>
+                </a:solidFill>
+                <a:latin typeface="Calibri"/>
+              </a:rPr>
+              <a:t>10 / 10</a:t>
+            </a:r>
+          </a:p>
+        </p:txBody>
+      </p:sp>
+      <p:sp>
+        <p:nvSpPr>
+          <p:cNvPr id="9" name="Rounded Rectangle 8"/>
+          <p:cNvSpPr/>
+          <p:nvPr/>
+        </p:nvSpPr>
+        <p:spPr>
+          <a:xfrm>
+            <a:off x="292608" y="1051560"/>
+            <a:ext cx="2267712" cy="2148840"/>
+          </a:xfrm>
+          <a:prstGeom prst="roundRect">
+            <a:avLst>
+              <a:gd name="adj" fmla="val 8000"/>
+            </a:avLst>
+          </a:prstGeom>
+          <a:solidFill>
+            <a:srgbClr val="F3F6F9"/>
+          </a:solidFill>
+          <a:ln>
+            <a:noFill/>
+          </a:ln>
+          <a:effectLst/>
+        </p:spPr>
+        <p:style>
+          <a:lnRef idx="1">
+            <a:schemeClr val="accent1"/>
+          </a:lnRef>
+          <a:fillRef idx="3">
+            <a:schemeClr val="accent1"/>
+          </a:fillRef>
+          <a:effectRef idx="2">
+            <a:schemeClr val="accent1"/>
+          </a:effectRef>
+          <a:fontRef idx="minor">
+            <a:schemeClr val="lt1"/>
+          </a:fontRef>
+        </p:style>
+        <p:txBody>
+          <a:bodyPr rtlCol="0" anchor="ctr"/>
+          <a:lstStyle/>
+          <a:p>
+            <a:pPr algn="ctr"/>
+          </a:p>
+        </p:txBody>
+      </p:sp>
+      <p:sp>
+        <p:nvSpPr>
+          <p:cNvPr id="10" name="TextBox 9"/>
+          <p:cNvSpPr txBox="1"/>
+          <p:nvPr/>
+        </p:nvSpPr>
+        <p:spPr>
+          <a:xfrm>
+            <a:off x="384048" y="1143000"/>
+            <a:ext cx="2084831" cy="1965960"/>
+          </a:xfrm>
+          <a:prstGeom prst="rect">
+            <a:avLst/>
+          </a:prstGeom>
+          <a:noFill/>
+        </p:spPr>
+        <p:txBody>
+          <a:bodyPr wrap="square" lIns="54864" rIns="54864" tIns="27432" bIns="18288">
+            <a:spAutoFit/>
+          </a:bodyPr>
+          <a:lstStyle/>
+          <a:p>
+            <a:pPr algn="l">
+              <a:spcBef>
+                <a:spcPts val="0"/>
+              </a:spcBef>
+              <a:spcAft>
+                <a:spcPts val="800"/>
+              </a:spcAft>
+            </a:pPr>
+            <a:r>
+              <a:rPr sz="1600" b="1" i="0">
+                <a:solidFill>
+                  <a:srgbClr val="1A7A6D"/>
+                </a:solidFill>
+                <a:latin typeface="Calibri"/>
+              </a:rPr>
+              <a:t>1  Two cells</a:t>
+            </a:r>
+          </a:p>
+          <a:p>
+            <a:pPr algn="l">
+              <a:spcBef>
+                <a:spcPts val="0"/>
+              </a:spcBef>
+              <a:spcAft>
+                <a:spcPts val="600"/>
+              </a:spcAft>
+            </a:pPr>
+            <a:r>
+              <a:rPr sz="1250" b="0" i="0">
+                <a:solidFill>
+                  <a:srgbClr val="1F2937"/>
+                </a:solidFill>
+                <a:latin typeface="Calibri"/>
+              </a:rPr>
+              <a:t>One field pair per cell + repulsive overlap.</a:t>
+            </a:r>
+          </a:p>
+        </p:txBody>
+      </p:sp>
+      <p:sp>
+        <p:nvSpPr>
+          <p:cNvPr id="11" name="Rounded Rectangle 10"/>
+          <p:cNvSpPr/>
+          <p:nvPr/>
+        </p:nvSpPr>
+        <p:spPr>
+          <a:xfrm>
+            <a:off x="2651760" y="1051560"/>
+            <a:ext cx="2267712" cy="2148840"/>
+          </a:xfrm>
+          <a:prstGeom prst="roundRect">
+            <a:avLst>
+              <a:gd name="adj" fmla="val 8000"/>
+            </a:avLst>
+          </a:prstGeom>
+          <a:solidFill>
+            <a:srgbClr val="F3F6F9"/>
+          </a:solidFill>
+          <a:ln>
+            <a:noFill/>
+          </a:ln>
+          <a:effectLst/>
+        </p:spPr>
+        <p:style>
+          <a:lnRef idx="1">
+            <a:schemeClr val="accent1"/>
+          </a:lnRef>
+          <a:fillRef idx="3">
+            <a:schemeClr val="accent1"/>
+          </a:fillRef>
+          <a:effectRef idx="2">
+            <a:schemeClr val="accent1"/>
+          </a:effectRef>
+          <a:fontRef idx="minor">
+            <a:schemeClr val="lt1"/>
+          </a:fontRef>
+        </p:style>
+        <p:txBody>
+          <a:bodyPr rtlCol="0" anchor="ctr"/>
+          <a:lstStyle/>
+          <a:p>
+            <a:pPr algn="ctr"/>
+          </a:p>
+        </p:txBody>
+      </p:sp>
+      <p:sp>
+        <p:nvSpPr>
+          <p:cNvPr id="12" name="TextBox 11"/>
+          <p:cNvSpPr txBox="1"/>
+          <p:nvPr/>
+        </p:nvSpPr>
+        <p:spPr>
+          <a:xfrm>
+            <a:off x="2743200" y="1143000"/>
+            <a:ext cx="2084831" cy="1965960"/>
+          </a:xfrm>
+          <a:prstGeom prst="rect">
+            <a:avLst/>
+          </a:prstGeom>
+          <a:noFill/>
+        </p:spPr>
+        <p:txBody>
+          <a:bodyPr wrap="square" lIns="54864" rIns="54864" tIns="27432" bIns="18288">
+            <a:spAutoFit/>
+          </a:bodyPr>
+          <a:lstStyle/>
+          <a:p>
+            <a:pPr algn="l">
+              <a:spcBef>
+                <a:spcPts val="0"/>
+              </a:spcBef>
+              <a:spcAft>
+                <a:spcPts val="800"/>
+              </a:spcAft>
+            </a:pPr>
+            <a:r>
+              <a:rPr sz="1600" b="1" i="0">
+                <a:solidFill>
+                  <a:srgbClr val="1A7A6D"/>
+                </a:solidFill>
+                <a:latin typeface="Calibri"/>
+              </a:rPr>
+              <a:t>2  Collisions</a:t>
+            </a:r>
+          </a:p>
+          <a:p>
+            <a:pPr algn="l">
+              <a:spcBef>
+                <a:spcPts val="0"/>
+              </a:spcBef>
+              <a:spcAft>
+                <a:spcPts val="600"/>
+              </a:spcAft>
+            </a:pPr>
+            <a:r>
+              <a:rPr sz="1250" b="0" i="0">
+                <a:solidFill>
+                  <a:srgbClr val="1F2937"/>
+                </a:solidFill>
+                <a:latin typeface="Calibri"/>
+              </a:rPr>
+              <a:t>Head-on and glancing interactions.</a:t>
+            </a:r>
+          </a:p>
+        </p:txBody>
+      </p:sp>
+      <p:sp>
+        <p:nvSpPr>
+          <p:cNvPr id="13" name="Rounded Rectangle 12"/>
+          <p:cNvSpPr/>
+          <p:nvPr/>
+        </p:nvSpPr>
+        <p:spPr>
+          <a:xfrm>
+            <a:off x="5010912" y="1051560"/>
+            <a:ext cx="2267712" cy="2148840"/>
+          </a:xfrm>
+          <a:prstGeom prst="roundRect">
+            <a:avLst>
+              <a:gd name="adj" fmla="val 8000"/>
+            </a:avLst>
+          </a:prstGeom>
+          <a:solidFill>
+            <a:srgbClr val="F3F6F9"/>
+          </a:solidFill>
+          <a:ln>
+            <a:noFill/>
+          </a:ln>
+          <a:effectLst/>
+        </p:spPr>
+        <p:style>
+          <a:lnRef idx="1">
+            <a:schemeClr val="accent1"/>
+          </a:lnRef>
+          <a:fillRef idx="3">
+            <a:schemeClr val="accent1"/>
+          </a:fillRef>
+          <a:effectRef idx="2">
+            <a:schemeClr val="accent1"/>
+          </a:effectRef>
+          <a:fontRef idx="minor">
+            <a:schemeClr val="lt1"/>
+          </a:fontRef>
+        </p:style>
+        <p:txBody>
+          <a:bodyPr rtlCol="0" anchor="ctr"/>
+          <a:lstStyle/>
+          <a:p>
+            <a:pPr algn="ctr"/>
+          </a:p>
+        </p:txBody>
+      </p:sp>
+      <p:sp>
+        <p:nvSpPr>
+          <p:cNvPr id="14" name="TextBox 13"/>
+          <p:cNvSpPr txBox="1"/>
+          <p:nvPr/>
+        </p:nvSpPr>
+        <p:spPr>
+          <a:xfrm>
+            <a:off x="5102352" y="1143000"/>
+            <a:ext cx="2084831" cy="1965960"/>
+          </a:xfrm>
+          <a:prstGeom prst="rect">
+            <a:avLst/>
+          </a:prstGeom>
+          <a:noFill/>
+        </p:spPr>
+        <p:txBody>
+          <a:bodyPr wrap="square" lIns="54864" rIns="54864" tIns="27432" bIns="18288">
+            <a:spAutoFit/>
+          </a:bodyPr>
+          <a:lstStyle/>
+          <a:p>
+            <a:pPr algn="l">
+              <a:spcBef>
+                <a:spcPts val="0"/>
+              </a:spcBef>
+              <a:spcAft>
+                <a:spcPts val="800"/>
+              </a:spcAft>
+            </a:pPr>
+            <a:r>
+              <a:rPr sz="1600" b="1" i="0">
+                <a:solidFill>
+                  <a:srgbClr val="1A7A6D"/>
+                </a:solidFill>
+                <a:latin typeface="Calibri"/>
+              </a:rPr>
+              <a:t>3  Polarity</a:t>
+            </a:r>
+          </a:p>
+          <a:p>
+            <a:pPr algn="l">
+              <a:spcBef>
+                <a:spcPts val="0"/>
+              </a:spcBef>
+              <a:spcAft>
+                <a:spcPts val="600"/>
+              </a:spcAft>
+            </a:pPr>
+            <a:r>
+              <a:rPr sz="1250" b="0" i="0">
+                <a:solidFill>
+                  <a:srgbClr val="1F2937"/>
+                </a:solidFill>
+                <a:latin typeface="Calibri"/>
+              </a:rPr>
+              <a:t>Allow cells to choose their own direction.</a:t>
+            </a:r>
+          </a:p>
+        </p:txBody>
+      </p:sp>
+      <p:sp>
+        <p:nvSpPr>
+          <p:cNvPr id="15" name="Rounded Rectangle 14"/>
+          <p:cNvSpPr/>
+          <p:nvPr/>
+        </p:nvSpPr>
+        <p:spPr>
+          <a:xfrm>
+            <a:off x="7370064" y="1051560"/>
+            <a:ext cx="2267712" cy="2148840"/>
+          </a:xfrm>
+          <a:prstGeom prst="roundRect">
+            <a:avLst>
+              <a:gd name="adj" fmla="val 8000"/>
+            </a:avLst>
+          </a:prstGeom>
+          <a:solidFill>
+            <a:srgbClr val="F3F6F9"/>
+          </a:solidFill>
+          <a:ln>
+            <a:noFill/>
+          </a:ln>
+          <a:effectLst/>
+        </p:spPr>
+        <p:style>
+          <a:lnRef idx="1">
+            <a:schemeClr val="accent1"/>
+          </a:lnRef>
+          <a:fillRef idx="3">
+            <a:schemeClr val="accent1"/>
+          </a:fillRef>
+          <a:effectRef idx="2">
+            <a:schemeClr val="accent1"/>
+          </a:effectRef>
+          <a:fontRef idx="minor">
+            <a:schemeClr val="lt1"/>
+          </a:fontRef>
+        </p:style>
+        <p:txBody>
+          <a:bodyPr rtlCol="0" anchor="ctr"/>
+          <a:lstStyle/>
+          <a:p>
+            <a:pPr algn="ctr"/>
+          </a:p>
+        </p:txBody>
+      </p:sp>
+      <p:sp>
+        <p:nvSpPr>
+          <p:cNvPr id="16" name="TextBox 15"/>
+          <p:cNvSpPr txBox="1"/>
+          <p:nvPr/>
+        </p:nvSpPr>
+        <p:spPr>
+          <a:xfrm>
+            <a:off x="7461504" y="1143000"/>
+            <a:ext cx="2084831" cy="1965960"/>
+          </a:xfrm>
+          <a:prstGeom prst="rect">
+            <a:avLst/>
+          </a:prstGeom>
+          <a:noFill/>
+        </p:spPr>
+        <p:txBody>
+          <a:bodyPr wrap="square" lIns="54864" rIns="54864" tIns="27432" bIns="18288">
+            <a:spAutoFit/>
+          </a:bodyPr>
+          <a:lstStyle/>
+          <a:p>
+            <a:pPr algn="l">
+              <a:spcBef>
+                <a:spcPts val="0"/>
+              </a:spcBef>
+              <a:spcAft>
+                <a:spcPts val="800"/>
+              </a:spcAft>
+            </a:pPr>
+            <a:r>
+              <a:rPr sz="1600" b="1" i="0">
+                <a:solidFill>
+                  <a:srgbClr val="1A7A6D"/>
+                </a:solidFill>
+                <a:latin typeface="Calibri"/>
+              </a:rPr>
+              <a:t>4  Adhesion</a:t>
+            </a:r>
+          </a:p>
+          <a:p>
+            <a:pPr algn="l">
+              <a:spcBef>
+                <a:spcPts val="0"/>
+              </a:spcBef>
+              <a:spcAft>
+                <a:spcPts val="600"/>
+              </a:spcAft>
+            </a:pPr>
+            <a:r>
+              <a:rPr sz="1250" b="0" i="0">
+                <a:solidFill>
+                  <a:srgbClr val="1F2937"/>
+                </a:solidFill>
+                <a:latin typeface="Calibri"/>
+              </a:rPr>
+              <a:t>Load-dependent friction ξ.</a:t>
+            </a:r>
+          </a:p>
+        </p:txBody>
+      </p:sp>
+      <p:sp>
+        <p:nvSpPr>
+          <p:cNvPr id="17" name="Rounded Rectangle 16"/>
+          <p:cNvSpPr/>
+          <p:nvPr/>
+        </p:nvSpPr>
+        <p:spPr>
+          <a:xfrm>
+            <a:off x="9729216" y="1051560"/>
+            <a:ext cx="2267712" cy="2148840"/>
+          </a:xfrm>
+          <a:prstGeom prst="roundRect">
+            <a:avLst>
+              <a:gd name="adj" fmla="val 8000"/>
+            </a:avLst>
+          </a:prstGeom>
+          <a:solidFill>
+            <a:srgbClr val="F3F6F9"/>
+          </a:solidFill>
+          <a:ln>
+            <a:noFill/>
+          </a:ln>
+          <a:effectLst/>
+        </p:spPr>
+        <p:style>
+          <a:lnRef idx="1">
+            <a:schemeClr val="accent1"/>
+          </a:lnRef>
+          <a:fillRef idx="3">
+            <a:schemeClr val="accent1"/>
+          </a:fillRef>
+          <a:effectRef idx="2">
+            <a:schemeClr val="accent1"/>
+          </a:effectRef>
+          <a:fontRef idx="minor">
+            <a:schemeClr val="lt1"/>
+          </a:fontRef>
+        </p:style>
+        <p:txBody>
+          <a:bodyPr rtlCol="0" anchor="ctr"/>
+          <a:lstStyle/>
+          <a:p>
+            <a:pPr algn="ctr"/>
+          </a:p>
+        </p:txBody>
+      </p:sp>
+      <p:sp>
+        <p:nvSpPr>
+          <p:cNvPr id="18" name="TextBox 17"/>
+          <p:cNvSpPr txBox="1"/>
+          <p:nvPr/>
+        </p:nvSpPr>
+        <p:spPr>
+          <a:xfrm>
+            <a:off x="9820656" y="1143000"/>
+            <a:ext cx="2084831" cy="1965960"/>
+          </a:xfrm>
+          <a:prstGeom prst="rect">
+            <a:avLst/>
+          </a:prstGeom>
+          <a:noFill/>
+        </p:spPr>
+        <p:txBody>
+          <a:bodyPr wrap="square" lIns="54864" rIns="54864" tIns="27432" bIns="18288">
+            <a:spAutoFit/>
+          </a:bodyPr>
+          <a:lstStyle/>
+          <a:p>
+            <a:pPr algn="l">
+              <a:spcBef>
+                <a:spcPts val="0"/>
+              </a:spcBef>
+              <a:spcAft>
+                <a:spcPts val="800"/>
+              </a:spcAft>
+            </a:pPr>
+            <a:r>
+              <a:rPr sz="1600" b="1" i="0">
+                <a:solidFill>
+                  <a:srgbClr val="1A7A6D"/>
+                </a:solidFill>
+                <a:latin typeface="Calibri"/>
+              </a:rPr>
+              <a:t>5  Collectives</a:t>
+            </a:r>
+          </a:p>
+          <a:p>
+            <a:pPr algn="l">
+              <a:spcBef>
+                <a:spcPts val="0"/>
+              </a:spcBef>
+              <a:spcAft>
+                <a:spcPts val="600"/>
+              </a:spcAft>
+            </a:pPr>
+            <a:r>
+              <a:rPr sz="1250" b="0" i="0">
+                <a:solidFill>
+                  <a:srgbClr val="1F2937"/>
+                </a:solidFill>
+                <a:latin typeface="Calibri"/>
+              </a:rPr>
+              <a:t>Tens of cells: jamming and neighbour alignment.</a:t>
+            </a:r>
+          </a:p>
+        </p:txBody>
+      </p:sp>
+      <p:sp>
+        <p:nvSpPr>
+          <p:cNvPr id="19" name="Rounded Rectangle 18"/>
+          <p:cNvSpPr/>
+          <p:nvPr/>
+        </p:nvSpPr>
+        <p:spPr>
+          <a:xfrm>
+            <a:off x="292608" y="3429000"/>
+            <a:ext cx="11594592" cy="2926080"/>
+          </a:xfrm>
+          <a:prstGeom prst="roundRect">
+            <a:avLst>
+              <a:gd name="adj" fmla="val 8000"/>
+            </a:avLst>
+          </a:prstGeom>
+          <a:solidFill>
+            <a:srgbClr val="0B3D5C"/>
+          </a:solidFill>
+          <a:ln>
+            <a:noFill/>
+          </a:ln>
+          <a:effectLst/>
+        </p:spPr>
+        <p:style>
+          <a:lnRef idx="1">
+            <a:schemeClr val="accent1"/>
+          </a:lnRef>
+          <a:fillRef idx="3">
+            <a:schemeClr val="accent1"/>
+          </a:fillRef>
+          <a:effectRef idx="2">
+            <a:schemeClr val="accent1"/>
+          </a:effectRef>
+          <a:fontRef idx="minor">
+            <a:schemeClr val="lt1"/>
+          </a:fontRef>
+        </p:style>
+        <p:txBody>
+          <a:bodyPr rtlCol="0" anchor="ctr"/>
+          <a:lstStyle/>
+          <a:p>
+            <a:pPr algn="ctr"/>
+          </a:p>
+        </p:txBody>
+      </p:sp>
+      <p:sp>
+        <p:nvSpPr>
+          <p:cNvPr id="20" name="TextBox 19"/>
+          <p:cNvSpPr txBox="1"/>
+          <p:nvPr/>
+        </p:nvSpPr>
+        <p:spPr>
+          <a:xfrm>
+            <a:off x="548640" y="3611880"/>
+            <a:ext cx="11109960" cy="2606040"/>
+          </a:xfrm>
+          <a:prstGeom prst="rect">
+            <a:avLst/>
+          </a:prstGeom>
+          <a:noFill/>
+        </p:spPr>
+        <p:txBody>
+          <a:bodyPr wrap="square" lIns="54864" rIns="54864" tIns="27432" bIns="18288">
+            <a:spAutoFit/>
+          </a:bodyPr>
+          <a:lstStyle/>
+          <a:p>
+            <a:pPr algn="l">
+              <a:spcBef>
+                <a:spcPts val="0"/>
+              </a:spcBef>
+              <a:spcAft>
+                <a:spcPts val="1600"/>
+              </a:spcAft>
+            </a:pPr>
+            <a:r>
+              <a:rPr sz="3200" b="1" i="0">
+                <a:solidFill>
+                  <a:srgbClr val="FFFFFF"/>
+                </a:solidFill>
+                <a:latin typeface="Calibri"/>
+              </a:rPr>
+              <a:t>Thank you — Questions</a:t>
+            </a:r>
+          </a:p>
+          <a:p>
+            <a:pPr algn="l">
+              <a:spcBef>
+                <a:spcPts val="0"/>
+              </a:spcBef>
+              <a:spcAft>
+                <a:spcPts val="800"/>
+              </a:spcAft>
+            </a:pPr>
+            <a:r>
+              <a:rPr sz="1600" b="0" i="0">
+                <a:solidFill>
+                  <a:srgbClr val="FFFFFF"/>
+                </a:solidFill>
+                <a:latin typeface="Calibri"/>
+              </a:rPr>
+              <a:t>Siddharth Kumar  (2023PH10741)     ·     Soumik Roy  (2023PH10756)</a:t>
+            </a:r>
+          </a:p>
+          <a:p>
+            <a:pPr algn="l">
+              <a:spcBef>
+                <a:spcPts val="0"/>
+              </a:spcBef>
+              <a:spcAft>
+                <a:spcPts val="600"/>
+              </a:spcAft>
+            </a:pPr>
+            <a:r>
+              <a:rPr sz="1500" b="0" i="0">
+                <a:solidFill>
+                  <a:srgbClr val="C5D4DE"/>
+                </a:solidFill>
+                <a:latin typeface="Calibri"/>
+              </a:rPr>
+              <a:t>Adviser: Prof. Sujin B. Babu     ·     Department of Physics, IIT Delhi</a:t>
             </a:r>
           </a:p>
         </p:txBody>
@@ -4810,7 +5862,7 @@
                 </a:solidFill>
                 <a:latin typeface="Calibri"/>
               </a:rPr>
-              <a:t>2 / 9</a:t>
+              <a:t>2 / 10</a:t>
             </a:r>
           </a:p>
         </p:txBody>
@@ -6672,7 +7724,7 @@
                 </a:solidFill>
                 <a:latin typeface="Calibri"/>
               </a:rPr>
-              <a:t>3 / 9</a:t>
+              <a:t>3 / 10</a:t>
             </a:r>
           </a:p>
         </p:txBody>
@@ -8272,7 +9324,7 @@
                 </a:solidFill>
                 <a:latin typeface="Calibri"/>
               </a:rPr>
-              <a:t>4 / 9</a:t>
+              <a:t>4 / 10</a:t>
             </a:r>
           </a:p>
         </p:txBody>
@@ -10614,7 +11666,7 @@
                 </a:solidFill>
                 <a:latin typeface="Calibri"/>
               </a:rPr>
-              <a:t>5 / 9</a:t>
+              <a:t>5 / 10</a:t>
             </a:r>
           </a:p>
         </p:txBody>
@@ -11842,7 +12894,7 @@
                 </a:solidFill>
                 <a:latin typeface="Calibri"/>
               </a:rPr>
-              <a:t>6 / 9</a:t>
+              <a:t>6 / 10</a:t>
             </a:r>
           </a:p>
         </p:txBody>
@@ -13080,7 +14132,7 @@
                 </a:solidFill>
                 <a:latin typeface="Calibri"/>
               </a:rPr>
-              <a:t>7 / 9</a:t>
+              <a:t>7 / 10</a:t>
             </a:r>
           </a:p>
         </p:txBody>
@@ -14546,14 +15598,56 @@
                 </a:solidFill>
                 <a:latin typeface="Calibri"/>
               </a:rPr>
-              <a:t>What the simulations establish</a:t>
-            </a:r>
-          </a:p>
-        </p:txBody>
-      </p:sp>
-      <p:sp>
-        <p:nvSpPr>
-          <p:cNvPr id="6" name="Rectangle 5"/>
+              <a:t>Already underway: a first two-cell experiment</a:t>
+            </a:r>
+          </a:p>
+        </p:txBody>
+      </p:sp>
+      <p:sp>
+        <p:nvSpPr>
+          <p:cNvPr id="6" name="TextBox 5"/>
+          <p:cNvSpPr txBox="1"/>
+          <p:nvPr/>
+        </p:nvSpPr>
+        <p:spPr>
+          <a:xfrm>
+            <a:off x="365760" y="457200"/>
+            <a:ext cx="11338560" cy="292608"/>
+          </a:xfrm>
+          <a:prstGeom prst="rect">
+            <a:avLst/>
+          </a:prstGeom>
+          <a:noFill/>
+        </p:spPr>
+        <p:txBody>
+          <a:bodyPr wrap="square" lIns="54864" rIns="54864" tIns="27432" bIns="18288">
+            <a:spAutoFit/>
+          </a:bodyPr>
+          <a:lstStyle/>
+          <a:p>
+            <a:pPr algn="l">
+              <a:spcBef>
+                <a:spcPts val="0"/>
+              </a:spcBef>
+              <a:spcAft>
+                <a:spcPts val="0"/>
+              </a:spcAft>
+            </a:pPr>
+            <a:r>
+              <a:rPr sz="1250" b="0" i="0">
+                <a:solidFill>
+                  <a:srgbClr val="C5D4DE"/>
+                </a:solidFill>
+                <a:latin typeface="Calibri"/>
+              </a:rPr>
+              <a:t>Same Version 4 physics per cell, one new free-energy term couples them</a:t>
+            </a:r>
+          </a:p>
+        </p:txBody>
+      </p:sp>
+      <p:sp>
+        <p:nvSpPr>
+          <p:cNvPr id="7" name="Rectangle 6"/>
           <p:cNvSpPr/>
           <p:nvPr/>
         </p:nvSpPr>
@@ -14597,7 +15691,7 @@
       </p:sp>
       <p:sp>
         <p:nvSpPr>
-          <p:cNvPr id="7" name="TextBox 6"/>
+          <p:cNvPr id="8" name="TextBox 7"/>
           <p:cNvSpPr txBox="1"/>
           <p:nvPr/>
         </p:nvSpPr>
@@ -14639,7 +15733,7 @@
       </p:sp>
       <p:sp>
         <p:nvSpPr>
-          <p:cNvPr id="8" name="TextBox 7"/>
+          <p:cNvPr id="9" name="TextBox 8"/>
           <p:cNvSpPr txBox="1"/>
           <p:nvPr/>
         </p:nvSpPr>
@@ -14674,21 +15768,140 @@
                 </a:solidFill>
                 <a:latin typeface="Calibri"/>
               </a:rPr>
-              <a:t>8 / 9</a:t>
-            </a:r>
-          </a:p>
-        </p:txBody>
-      </p:sp>
-      <p:sp>
-        <p:nvSpPr>
-          <p:cNvPr id="9" name="Rounded Rectangle 8"/>
+              <a:t>8 / 10</a:t>
+            </a:r>
+          </a:p>
+        </p:txBody>
+      </p:sp>
+      <p:pic>
+        <p:nvPicPr>
+          <p:cNvPr id="10" name="two_cell_collision.mp4">
+            <a:hlinkClick r:id="" action="ppaction://media"/>
+          </p:cNvPr>
+          <p:cNvPicPr>
+            <a:picLocks noChangeAspect="1"/>
+          </p:cNvPicPr>
+          <p:nvPr>
+            <a:videoFile r:link="rId3"/>
+            <p:extLst>
+              <p:ext uri="{DAA4B4D4-6D71-4841-9C94-3DE7FCFB9230}">
+                <p14:media xmlns:p14="http://schemas.microsoft.com/office/powerpoint/2010/main" r:embed="rId2"/>
+              </p:ext>
+            </p:extLst>
+          </p:nvPr>
+        </p:nvPicPr>
+        <p:blipFill>
+          <a:blip r:embed="rId4"/>
+          <a:stretch>
+            <a:fillRect/>
+          </a:stretch>
+        </p:blipFill>
+        <p:spPr>
+          <a:xfrm>
+            <a:off x="411480" y="1051560"/>
+            <a:ext cx="4617720" cy="4617720"/>
+          </a:xfrm>
+          <a:prstGeom prst="rect">
+            <a:avLst/>
+          </a:prstGeom>
+        </p:spPr>
+      </p:pic>
+      <p:sp>
+        <p:nvSpPr>
+          <p:cNvPr id="11" name="Rectangle 10"/>
           <p:cNvSpPr/>
           <p:nvPr/>
         </p:nvSpPr>
         <p:spPr>
           <a:xfrm>
-            <a:off x="365760" y="1051560"/>
-            <a:ext cx="11430000" cy="969264"/>
+            <a:off x="411480" y="5705856"/>
+            <a:ext cx="4617720" cy="914"/>
+          </a:xfrm>
+          <a:prstGeom prst="rect">
+            <a:avLst/>
+          </a:prstGeom>
+          <a:solidFill>
+            <a:srgbClr val="FFFFFF"/>
+          </a:solidFill>
+          <a:ln>
+            <a:noFill/>
+          </a:ln>
+          <a:effectLst/>
+        </p:spPr>
+        <p:style>
+          <a:lnRef idx="1">
+            <a:schemeClr val="accent1"/>
+          </a:lnRef>
+          <a:fillRef idx="3">
+            <a:schemeClr val="accent1"/>
+          </a:fillRef>
+          <a:effectRef idx="2">
+            <a:schemeClr val="accent1"/>
+          </a:effectRef>
+          <a:fontRef idx="minor">
+            <a:schemeClr val="lt1"/>
+          </a:fontRef>
+        </p:style>
+        <p:txBody>
+          <a:bodyPr rtlCol="0" anchor="ctr"/>
+          <a:lstStyle/>
+          <a:p>
+            <a:pPr algn="ctr"/>
+          </a:p>
+        </p:txBody>
+      </p:sp>
+      <p:sp>
+        <p:nvSpPr>
+          <p:cNvPr id="12" name="TextBox 11"/>
+          <p:cNvSpPr txBox="1"/>
+          <p:nvPr/>
+        </p:nvSpPr>
+        <p:spPr>
+          <a:xfrm>
+            <a:off x="411480" y="5724144"/>
+            <a:ext cx="4617720" cy="292608"/>
+          </a:xfrm>
+          <a:prstGeom prst="rect">
+            <a:avLst/>
+          </a:prstGeom>
+          <a:noFill/>
+        </p:spPr>
+        <p:txBody>
+          <a:bodyPr wrap="square" lIns="54864" rIns="54864" tIns="27432" bIns="18288">
+            <a:spAutoFit/>
+          </a:bodyPr>
+          <a:lstStyle/>
+          <a:p>
+            <a:pPr algn="ctr">
+              <a:spcBef>
+                <a:spcPts val="0"/>
+              </a:spcBef>
+              <a:spcAft>
+                <a:spcPts val="0"/>
+              </a:spcAft>
+            </a:pPr>
+            <a:r>
+              <a:rPr sz="1150" b="0" i="0">
+                <a:solidFill>
+                  <a:srgbClr val="4B5563"/>
+                </a:solidFill>
+                <a:latin typeface="Calibri"/>
+              </a:rPr>
+              <a:t>3 s clip — click to play in Slide Show mode</a:t>
+            </a:r>
+          </a:p>
+        </p:txBody>
+      </p:sp>
+      <p:sp>
+        <p:nvSpPr>
+          <p:cNvPr id="13" name="Rounded Rectangle 12"/>
+          <p:cNvSpPr/>
+          <p:nvPr/>
+        </p:nvSpPr>
+        <p:spPr>
+          <a:xfrm>
+            <a:off x="5349240" y="1051560"/>
+            <a:ext cx="6522415" cy="4846320"/>
           </a:xfrm>
           <a:prstGeom prst="roundRect">
             <a:avLst>
@@ -14727,58 +15940,14 @@
       </p:sp>
       <p:sp>
         <p:nvSpPr>
-          <p:cNvPr id="10" name="Rectangle 9"/>
-          <p:cNvSpPr/>
-          <p:nvPr/>
-        </p:nvSpPr>
-        <p:spPr>
-          <a:xfrm>
-            <a:off x="365760" y="1051560"/>
-            <a:ext cx="109728" cy="969264"/>
-          </a:xfrm>
-          <a:prstGeom prst="rect">
-            <a:avLst/>
-          </a:prstGeom>
-          <a:solidFill>
-            <a:srgbClr val="1A7A6D"/>
-          </a:solidFill>
-          <a:ln>
-            <a:noFill/>
-          </a:ln>
-          <a:effectLst/>
-        </p:spPr>
-        <p:style>
-          <a:lnRef idx="1">
-            <a:schemeClr val="accent1"/>
-          </a:lnRef>
-          <a:fillRef idx="3">
-            <a:schemeClr val="accent1"/>
-          </a:fillRef>
-          <a:effectRef idx="2">
-            <a:schemeClr val="accent1"/>
-          </a:effectRef>
-          <a:fontRef idx="minor">
-            <a:schemeClr val="lt1"/>
-          </a:fontRef>
-        </p:style>
-        <p:txBody>
-          <a:bodyPr rtlCol="0" anchor="ctr"/>
-          <a:lstStyle/>
-          <a:p>
-            <a:pPr algn="ctr"/>
-          </a:p>
-        </p:txBody>
-      </p:sp>
-      <p:sp>
-        <p:nvSpPr>
-          <p:cNvPr id="11" name="TextBox 10"/>
+          <p:cNvPr id="14" name="TextBox 13"/>
           <p:cNvSpPr txBox="1"/>
           <p:nvPr/>
         </p:nvSpPr>
         <p:spPr>
           <a:xfrm>
-            <a:off x="594360" y="1106424"/>
-            <a:ext cx="640080" cy="822960"/>
+            <a:off x="5550408" y="1170432"/>
+            <a:ext cx="6120079" cy="4617720"/>
           </a:xfrm>
           <a:prstGeom prst="rect">
             <a:avLst/>
@@ -14790,67 +15959,6 @@
             <a:spAutoFit/>
           </a:bodyPr>
           <a:lstStyle/>
-          <a:p>
-            <a:pPr algn="l">
-              <a:spcBef>
-                <a:spcPts val="0"/>
-              </a:spcBef>
-              <a:spcAft>
-                <a:spcPts val="0"/>
-              </a:spcAft>
-            </a:pPr>
-            <a:r>
-              <a:rPr sz="2200" b="1" i="0">
-                <a:solidFill>
-                  <a:srgbClr val="1A7A6D"/>
-                </a:solidFill>
-                <a:latin typeface="Calibri"/>
-              </a:rPr>
-              <a:t>01</a:t>
-            </a:r>
-          </a:p>
-        </p:txBody>
-      </p:sp>
-      <p:sp>
-        <p:nvSpPr>
-          <p:cNvPr id="12" name="TextBox 11"/>
-          <p:cNvSpPr txBox="1"/>
-          <p:nvPr/>
-        </p:nvSpPr>
-        <p:spPr>
-          <a:xfrm>
-            <a:off x="1280160" y="1124712"/>
-            <a:ext cx="10287000" cy="822960"/>
-          </a:xfrm>
-          <a:prstGeom prst="rect">
-            <a:avLst/>
-          </a:prstGeom>
-          <a:noFill/>
-        </p:spPr>
-        <p:txBody>
-          <a:bodyPr wrap="square" lIns="54864" rIns="54864" tIns="27432" bIns="18288">
-            <a:spAutoFit/>
-          </a:bodyPr>
-          <a:lstStyle/>
-          <a:p>
-            <a:pPr algn="l">
-              <a:spcBef>
-                <a:spcPts val="0"/>
-              </a:spcBef>
-              <a:spcAft>
-                <a:spcPts val="400"/>
-              </a:spcAft>
-            </a:pPr>
-            <a:r>
-              <a:rPr sz="1600" b="1" i="0">
-                <a:solidFill>
-                  <a:srgbClr val="0B3D5C"/>
-                </a:solidFill>
-                <a:latin typeface="Calibri"/>
-              </a:rPr>
-              <a:t>A spatial gradient in treadmilling can generate a leading protrusion.</a:t>
-            </a:r>
-          </a:p>
           <a:p>
             <a:pPr algn="l">
               <a:spcBef>
@@ -14861,187 +15969,132 @@
               </a:spcAft>
             </a:pPr>
             <a:r>
-              <a:rPr sz="1250" b="0" i="0">
-                <a:solidFill>
-                  <a:srgbClr val="4B5563"/>
+              <a:rPr sz="1600" b="1" i="0">
+                <a:solidFill>
+                  <a:srgbClr val="0B3D5C"/>
                 </a:solidFill>
                 <a:latin typeface="Calibri"/>
               </a:rPr>
-              <a:t>V2</a:t>
-            </a:r>
-          </a:p>
-        </p:txBody>
-      </p:sp>
-      <p:sp>
-        <p:nvSpPr>
-          <p:cNvPr id="13" name="Rounded Rectangle 12"/>
-          <p:cNvSpPr/>
-          <p:nvPr/>
-        </p:nvSpPr>
-        <p:spPr>
-          <a:xfrm>
-            <a:off x="365760" y="2130552"/>
-            <a:ext cx="11430000" cy="969264"/>
-          </a:xfrm>
-          <a:prstGeom prst="roundRect">
-            <a:avLst>
-              <a:gd name="adj" fmla="val 8000"/>
-            </a:avLst>
-          </a:prstGeom>
-          <a:solidFill>
-            <a:srgbClr val="F3F6F9"/>
-          </a:solidFill>
-          <a:ln>
-            <a:noFill/>
-          </a:ln>
-          <a:effectLst/>
-        </p:spPr>
-        <p:style>
-          <a:lnRef idx="1">
-            <a:schemeClr val="accent1"/>
-          </a:lnRef>
-          <a:fillRef idx="3">
-            <a:schemeClr val="accent1"/>
-          </a:fillRef>
-          <a:effectRef idx="2">
-            <a:schemeClr val="accent1"/>
-          </a:effectRef>
-          <a:fontRef idx="minor">
-            <a:schemeClr val="lt1"/>
-          </a:fontRef>
-        </p:style>
-        <p:txBody>
-          <a:bodyPr rtlCol="0" anchor="ctr"/>
-          <a:lstStyle/>
-          <a:p>
-            <a:pPr algn="ctr"/>
-          </a:p>
-        </p:txBody>
-      </p:sp>
-      <p:sp>
-        <p:nvSpPr>
-          <p:cNvPr id="14" name="Rectangle 13"/>
-          <p:cNvSpPr/>
-          <p:nvPr/>
-        </p:nvSpPr>
-        <p:spPr>
-          <a:xfrm>
-            <a:off x="365760" y="2130552"/>
-            <a:ext cx="109728" cy="969264"/>
-          </a:xfrm>
-          <a:prstGeom prst="rect">
-            <a:avLst/>
-          </a:prstGeom>
-          <a:solidFill>
-            <a:srgbClr val="1A7A6D"/>
-          </a:solidFill>
-          <a:ln>
-            <a:noFill/>
-          </a:ln>
-          <a:effectLst/>
-        </p:spPr>
-        <p:style>
-          <a:lnRef idx="1">
-            <a:schemeClr val="accent1"/>
-          </a:lnRef>
-          <a:fillRef idx="3">
-            <a:schemeClr val="accent1"/>
-          </a:fillRef>
-          <a:effectRef idx="2">
-            <a:schemeClr val="accent1"/>
-          </a:effectRef>
-          <a:fontRef idx="minor">
-            <a:schemeClr val="lt1"/>
-          </a:fontRef>
-        </p:style>
-        <p:txBody>
-          <a:bodyPr rtlCol="0" anchor="ctr"/>
-          <a:lstStyle/>
-          <a:p>
-            <a:pPr algn="ctr"/>
-          </a:p>
-        </p:txBody>
-      </p:sp>
-      <p:sp>
-        <p:nvSpPr>
-          <p:cNvPr id="15" name="TextBox 14"/>
-          <p:cNvSpPr txBox="1"/>
-          <p:nvPr/>
-        </p:nvSpPr>
-        <p:spPr>
-          <a:xfrm>
-            <a:off x="594360" y="2185416"/>
-            <a:ext cx="640080" cy="822960"/>
-          </a:xfrm>
-          <a:prstGeom prst="rect">
-            <a:avLst/>
-          </a:prstGeom>
-          <a:noFill/>
-        </p:spPr>
-        <p:txBody>
-          <a:bodyPr wrap="square" lIns="54864" rIns="54864" tIns="27432" bIns="18288">
-            <a:spAutoFit/>
-          </a:bodyPr>
-          <a:lstStyle/>
+              <a:t>One new term</a:t>
+            </a:r>
+          </a:p>
           <a:p>
             <a:pPr algn="l">
               <a:spcBef>
                 <a:spcPts val="0"/>
               </a:spcBef>
               <a:spcAft>
-                <a:spcPts val="0"/>
+                <a:spcPts val="800"/>
               </a:spcAft>
             </a:pPr>
             <a:r>
-              <a:rPr sz="2200" b="1" i="0">
-                <a:solidFill>
-                  <a:srgbClr val="1A7A6D"/>
-                </a:solidFill>
-                <a:latin typeface="Calibri"/>
-              </a:rPr>
-              <a:t>02</a:t>
-            </a:r>
-          </a:p>
-        </p:txBody>
-      </p:sp>
-      <p:sp>
-        <p:nvSpPr>
-          <p:cNvPr id="16" name="TextBox 15"/>
-          <p:cNvSpPr txBox="1"/>
-          <p:nvPr/>
-        </p:nvSpPr>
-        <p:spPr>
-          <a:xfrm>
-            <a:off x="1280160" y="2203704"/>
-            <a:ext cx="10287000" cy="822960"/>
-          </a:xfrm>
-          <a:prstGeom prst="rect">
-            <a:avLst/>
-          </a:prstGeom>
-          <a:noFill/>
-        </p:spPr>
-        <p:txBody>
-          <a:bodyPr wrap="square" lIns="54864" rIns="54864" tIns="27432" bIns="18288">
-            <a:spAutoFit/>
-          </a:bodyPr>
-          <a:lstStyle/>
+              <a:rPr sz="1600" b="0" i="0">
+                <a:solidFill>
+                  <a:srgbClr val="0B3D5C"/>
+                </a:solidFill>
+                <a:latin typeface="Cambria Math"/>
+              </a:rPr>
+              <a:t>F</a:t>
+            </a:r>
+            <a:r>
+              <a:rPr sz="1600" b="0" i="0" baseline="-25000">
+                <a:solidFill>
+                  <a:srgbClr val="0B3D5C"/>
+                </a:solidFill>
+                <a:latin typeface="Cambria Math"/>
+              </a:rPr>
+              <a:t>rep</a:t>
+            </a:r>
+            <a:r>
+              <a:rPr sz="1600" b="0" i="0">
+                <a:solidFill>
+                  <a:srgbClr val="0B3D5C"/>
+                </a:solidFill>
+                <a:latin typeface="Cambria Math"/>
+              </a:rPr>
+              <a:t> = k</a:t>
+            </a:r>
+            <a:r>
+              <a:rPr sz="1600" b="0" i="0" baseline="-25000">
+                <a:solidFill>
+                  <a:srgbClr val="0B3D5C"/>
+                </a:solidFill>
+                <a:latin typeface="Cambria Math"/>
+              </a:rPr>
+              <a:t>rep</a:t>
+            </a:r>
+            <a:r>
+              <a:rPr sz="1600" b="0" i="0">
+                <a:solidFill>
+                  <a:srgbClr val="0B3D5C"/>
+                </a:solidFill>
+                <a:latin typeface="Cambria Math"/>
+              </a:rPr>
+              <a:t> ∫ φ</a:t>
+            </a:r>
+            <a:r>
+              <a:rPr sz="1600" b="0" i="0" baseline="-25000">
+                <a:solidFill>
+                  <a:srgbClr val="0B3D5C"/>
+                </a:solidFill>
+                <a:latin typeface="Cambria Math"/>
+              </a:rPr>
+              <a:t>1</a:t>
+            </a:r>
+            <a:r>
+              <a:rPr sz="1600" b="0" i="0" baseline="30000">
+                <a:solidFill>
+                  <a:srgbClr val="0B3D5C"/>
+                </a:solidFill>
+                <a:latin typeface="Cambria Math"/>
+              </a:rPr>
+              <a:t>2</a:t>
+            </a:r>
+            <a:r>
+              <a:rPr sz="1600" b="0" i="0">
+                <a:solidFill>
+                  <a:srgbClr val="0B3D5C"/>
+                </a:solidFill>
+                <a:latin typeface="Cambria Math"/>
+              </a:rPr>
+              <a:t> φ</a:t>
+            </a:r>
+            <a:r>
+              <a:rPr sz="1600" b="0" i="0" baseline="-25000">
+                <a:solidFill>
+                  <a:srgbClr val="0B3D5C"/>
+                </a:solidFill>
+                <a:latin typeface="Cambria Math"/>
+              </a:rPr>
+              <a:t>2</a:t>
+            </a:r>
+            <a:r>
+              <a:rPr sz="1600" b="0" i="0" baseline="30000">
+                <a:solidFill>
+                  <a:srgbClr val="0B3D5C"/>
+                </a:solidFill>
+                <a:latin typeface="Cambria Math"/>
+              </a:rPr>
+              <a:t>2</a:t>
+            </a:r>
+          </a:p>
           <a:p>
             <a:pPr algn="l">
               <a:spcBef>
                 <a:spcPts val="0"/>
               </a:spcBef>
               <a:spcAft>
-                <a:spcPts val="400"/>
+                <a:spcPts val="1200"/>
               </a:spcAft>
             </a:pPr>
             <a:r>
-              <a:rPr sz="1600" b="1" i="0">
-                <a:solidFill>
-                  <a:srgbClr val="0B3D5C"/>
+              <a:rPr sz="1300" b="0" i="0">
+                <a:solidFill>
+                  <a:srgbClr val="1F2937"/>
                 </a:solidFill>
                 <a:latin typeface="Calibri"/>
               </a:rPr>
-              <a:t>Planar morphology is controlled mainly by polarization anchoring.</a:t>
+              <a:t>Costs energy only where both cells' φ are simultaneously ≈ 1 — i.e. right at contact. Adds one line, 2kᵣₑₚφᵢφⱼ², to each cell's own μᵢ. Everything else — the Darcy law, the P equation — is untouched: still local, still no global solve.</a:t>
             </a:r>
           </a:p>
           <a:p>
@@ -15054,470 +16107,79 @@
               </a:spcAft>
             </a:pPr>
             <a:r>
-              <a:rPr sz="1250" b="0" i="0">
-                <a:solidFill>
-                  <a:srgbClr val="4B5563"/>
+              <a:rPr sz="1500" b="1" i="0">
+                <a:solidFill>
+                  <a:srgbClr val="1A7A6D"/>
                 </a:solidFill>
                 <a:latin typeface="Calibri"/>
               </a:rPr>
-              <a:t>V3  ·  flow adds ~2%</a:t>
-            </a:r>
-          </a:p>
-        </p:txBody>
-      </p:sp>
-      <p:sp>
-        <p:nvSpPr>
-          <p:cNvPr id="17" name="Rounded Rectangle 16"/>
-          <p:cNvSpPr/>
-          <p:nvPr/>
-        </p:nvSpPr>
-        <p:spPr>
-          <a:xfrm>
-            <a:off x="365760" y="3209544"/>
-            <a:ext cx="11430000" cy="969264"/>
-          </a:xfrm>
-          <a:prstGeom prst="roundRect">
-            <a:avLst>
-              <a:gd name="adj" fmla="val 8000"/>
-            </a:avLst>
-          </a:prstGeom>
-          <a:solidFill>
-            <a:srgbClr val="F3F6F9"/>
-          </a:solidFill>
-          <a:ln>
-            <a:noFill/>
-          </a:ln>
-          <a:effectLst/>
-        </p:spPr>
-        <p:style>
-          <a:lnRef idx="1">
-            <a:schemeClr val="accent1"/>
-          </a:lnRef>
-          <a:fillRef idx="3">
-            <a:schemeClr val="accent1"/>
-          </a:fillRef>
-          <a:effectRef idx="2">
-            <a:schemeClr val="accent1"/>
-          </a:effectRef>
-          <a:fontRef idx="minor">
-            <a:schemeClr val="lt1"/>
-          </a:fontRef>
-        </p:style>
-        <p:txBody>
-          <a:bodyPr rtlCol="0" anchor="ctr"/>
-          <a:lstStyle/>
-          <a:p>
-            <a:pPr algn="ctr"/>
-          </a:p>
-        </p:txBody>
-      </p:sp>
-      <p:sp>
-        <p:nvSpPr>
-          <p:cNvPr id="18" name="Rectangle 17"/>
-          <p:cNvSpPr/>
-          <p:nvPr/>
-        </p:nvSpPr>
-        <p:spPr>
-          <a:xfrm>
-            <a:off x="365760" y="3209544"/>
-            <a:ext cx="109728" cy="969264"/>
-          </a:xfrm>
-          <a:prstGeom prst="rect">
-            <a:avLst/>
-          </a:prstGeom>
-          <a:solidFill>
-            <a:srgbClr val="1A7A6D"/>
-          </a:solidFill>
-          <a:ln>
-            <a:noFill/>
-          </a:ln>
-          <a:effectLst/>
-        </p:spPr>
-        <p:style>
-          <a:lnRef idx="1">
-            <a:schemeClr val="accent1"/>
-          </a:lnRef>
-          <a:fillRef idx="3">
-            <a:schemeClr val="accent1"/>
-          </a:fillRef>
-          <a:effectRef idx="2">
-            <a:schemeClr val="accent1"/>
-          </a:effectRef>
-          <a:fontRef idx="minor">
-            <a:schemeClr val="lt1"/>
-          </a:fontRef>
-        </p:style>
-        <p:txBody>
-          <a:bodyPr rtlCol="0" anchor="ctr"/>
-          <a:lstStyle/>
-          <a:p>
-            <a:pPr algn="ctr"/>
-          </a:p>
-        </p:txBody>
-      </p:sp>
-      <p:sp>
-        <p:nvSpPr>
-          <p:cNvPr id="19" name="TextBox 18"/>
-          <p:cNvSpPr txBox="1"/>
-          <p:nvPr/>
-        </p:nvSpPr>
-        <p:spPr>
-          <a:xfrm>
-            <a:off x="594360" y="3264408"/>
-            <a:ext cx="640080" cy="822960"/>
-          </a:xfrm>
-          <a:prstGeom prst="rect">
-            <a:avLst/>
-          </a:prstGeom>
-          <a:noFill/>
-        </p:spPr>
-        <p:txBody>
-          <a:bodyPr wrap="square" lIns="54864" rIns="54864" tIns="27432" bIns="18288">
-            <a:spAutoFit/>
-          </a:bodyPr>
-          <a:lstStyle/>
-          <a:p>
-            <a:pPr algn="l">
-              <a:spcBef>
-                <a:spcPts val="0"/>
-              </a:spcBef>
-              <a:spcAft>
-                <a:spcPts val="0"/>
-              </a:spcAft>
-            </a:pPr>
-            <a:r>
-              <a:rPr sz="2200" b="1" i="0">
-                <a:solidFill>
-                  <a:srgbClr val="1A7A6D"/>
-                </a:solidFill>
-                <a:latin typeface="Calibri"/>
-              </a:rPr>
-              <a:t>03</a:t>
-            </a:r>
-          </a:p>
-        </p:txBody>
-      </p:sp>
-      <p:sp>
-        <p:nvSpPr>
-          <p:cNvPr id="20" name="TextBox 19"/>
-          <p:cNvSpPr txBox="1"/>
-          <p:nvPr/>
-        </p:nvSpPr>
-        <p:spPr>
-          <a:xfrm>
-            <a:off x="1280160" y="3282696"/>
-            <a:ext cx="10287000" cy="822960"/>
-          </a:xfrm>
-          <a:prstGeom prst="rect">
-            <a:avLst/>
-          </a:prstGeom>
-          <a:noFill/>
-        </p:spPr>
-        <p:txBody>
-          <a:bodyPr wrap="square" lIns="54864" rIns="54864" tIns="27432" bIns="18288">
-            <a:spAutoFit/>
-          </a:bodyPr>
-          <a:lstStyle/>
-          <a:p>
-            <a:pPr algn="l">
-              <a:spcBef>
-                <a:spcPts val="0"/>
-              </a:spcBef>
+              <a:t>First experiment: a glancing collision</a:t>
+            </a:r>
+          </a:p>
+          <a:p>
+            <a:pPr>
               <a:spcAft>
                 <a:spcPts val="400"/>
               </a:spcAft>
             </a:pPr>
             <a:r>
-              <a:rPr sz="1600" b="1" i="0">
-                <a:solidFill>
-                  <a:srgbClr val="0B3D5C"/>
+              <a:rPr sz="1250" b="0" i="0">
+                <a:solidFill>
+                  <a:srgbClr val="1F2937"/>
                 </a:solidFill>
                 <a:latin typeface="Calibri"/>
               </a:rPr>
-              <a:t>The friction-dominated model retains crawling behaviour.</a:t>
-            </a:r>
-          </a:p>
-          <a:p>
-            <a:pPr algn="l">
-              <a:spcBef>
-                <a:spcPts val="0"/>
-              </a:spcBef>
-              <a:spcAft>
-                <a:spcPts val="600"/>
-              </a:spcAft>
-            </a:pPr>
-            <a:r>
-              <a:rPr sz="1250" b="0" i="0">
-                <a:solidFill>
-                  <a:srgbClr val="4B5563"/>
-                </a:solidFill>
-                <a:latin typeface="Calibri"/>
-              </a:rPr>
-              <a:t>V4  ·  speed 0.801  ·  0.2% agreement  ·  ~5× faster  ·  local</a:t>
-            </a:r>
-          </a:p>
-        </p:txBody>
-      </p:sp>
-      <p:sp>
-        <p:nvSpPr>
-          <p:cNvPr id="21" name="Rounded Rectangle 20"/>
-          <p:cNvSpPr/>
-          <p:nvPr/>
-        </p:nvSpPr>
-        <p:spPr>
-          <a:xfrm>
-            <a:off x="365760" y="4288536"/>
-            <a:ext cx="11430000" cy="969264"/>
-          </a:xfrm>
-          <a:prstGeom prst="roundRect">
-            <a:avLst>
-              <a:gd name="adj" fmla="val 8000"/>
-            </a:avLst>
-          </a:prstGeom>
-          <a:solidFill>
-            <a:srgbClr val="F3F6F9"/>
-          </a:solidFill>
-          <a:ln>
-            <a:noFill/>
-          </a:ln>
-          <a:effectLst/>
-        </p:spPr>
-        <p:style>
-          <a:lnRef idx="1">
-            <a:schemeClr val="accent1"/>
-          </a:lnRef>
-          <a:fillRef idx="3">
-            <a:schemeClr val="accent1"/>
-          </a:fillRef>
-          <a:effectRef idx="2">
-            <a:schemeClr val="accent1"/>
-          </a:effectRef>
-          <a:fontRef idx="minor">
-            <a:schemeClr val="lt1"/>
-          </a:fontRef>
-        </p:style>
-        <p:txBody>
-          <a:bodyPr rtlCol="0" anchor="ctr"/>
-          <a:lstStyle/>
-          <a:p>
-            <a:pPr algn="ctr"/>
-          </a:p>
-        </p:txBody>
-      </p:sp>
-      <p:sp>
-        <p:nvSpPr>
-          <p:cNvPr id="22" name="Rectangle 21"/>
-          <p:cNvSpPr/>
-          <p:nvPr/>
-        </p:nvSpPr>
-        <p:spPr>
-          <a:xfrm>
-            <a:off x="365760" y="4288536"/>
-            <a:ext cx="109728" cy="969264"/>
-          </a:xfrm>
-          <a:prstGeom prst="rect">
-            <a:avLst/>
-          </a:prstGeom>
-          <a:solidFill>
-            <a:srgbClr val="1A7A6D"/>
-          </a:solidFill>
-          <a:ln>
-            <a:noFill/>
-          </a:ln>
-          <a:effectLst/>
-        </p:spPr>
-        <p:style>
-          <a:lnRef idx="1">
-            <a:schemeClr val="accent1"/>
-          </a:lnRef>
-          <a:fillRef idx="3">
-            <a:schemeClr val="accent1"/>
-          </a:fillRef>
-          <a:effectRef idx="2">
-            <a:schemeClr val="accent1"/>
-          </a:effectRef>
-          <a:fontRef idx="minor">
-            <a:schemeClr val="lt1"/>
-          </a:fontRef>
-        </p:style>
-        <p:txBody>
-          <a:bodyPr rtlCol="0" anchor="ctr"/>
-          <a:lstStyle/>
-          <a:p>
-            <a:pPr algn="ctr"/>
-          </a:p>
-        </p:txBody>
-      </p:sp>
-      <p:sp>
-        <p:nvSpPr>
-          <p:cNvPr id="23" name="TextBox 22"/>
-          <p:cNvSpPr txBox="1"/>
-          <p:nvPr/>
-        </p:nvSpPr>
-        <p:spPr>
-          <a:xfrm>
-            <a:off x="594360" y="4343400"/>
-            <a:ext cx="640080" cy="822960"/>
-          </a:xfrm>
-          <a:prstGeom prst="rect">
-            <a:avLst/>
-          </a:prstGeom>
-          <a:noFill/>
-        </p:spPr>
-        <p:txBody>
-          <a:bodyPr wrap="square" lIns="54864" rIns="54864" tIns="27432" bIns="18288">
-            <a:spAutoFit/>
-          </a:bodyPr>
-          <a:lstStyle/>
-          <a:p>
-            <a:pPr algn="l">
-              <a:spcBef>
-                <a:spcPts val="0"/>
-              </a:spcBef>
-              <a:spcAft>
-                <a:spcPts val="0"/>
-              </a:spcAft>
-            </a:pPr>
-            <a:r>
-              <a:rPr sz="2200" b="1" i="0">
-                <a:solidFill>
-                  <a:srgbClr val="1A7A6D"/>
-                </a:solidFill>
-                <a:latin typeface="Calibri"/>
-              </a:rPr>
-              <a:t>04</a:t>
-            </a:r>
-          </a:p>
-        </p:txBody>
-      </p:sp>
-      <p:sp>
-        <p:nvSpPr>
-          <p:cNvPr id="24" name="TextBox 23"/>
-          <p:cNvSpPr txBox="1"/>
-          <p:nvPr/>
-        </p:nvSpPr>
-        <p:spPr>
-          <a:xfrm>
-            <a:off x="1280160" y="4361688"/>
-            <a:ext cx="10287000" cy="822960"/>
-          </a:xfrm>
-          <a:prstGeom prst="rect">
-            <a:avLst/>
-          </a:prstGeom>
-          <a:noFill/>
-        </p:spPr>
-        <p:txBody>
-          <a:bodyPr wrap="square" lIns="54864" rIns="54864" tIns="27432" bIns="18288">
-            <a:spAutoFit/>
-          </a:bodyPr>
-          <a:lstStyle/>
-          <a:p>
-            <a:pPr algn="l">
-              <a:spcBef>
-                <a:spcPts val="0"/>
-              </a:spcBef>
+              <a:t>•  Cells offset in y, polarised toward each other</a:t>
+            </a:r>
+          </a:p>
+          <a:p>
+            <a:pPr>
               <a:spcAft>
                 <a:spcPts val="400"/>
               </a:spcAft>
             </a:pPr>
             <a:r>
-              <a:rPr sz="1600" b="1" i="0">
-                <a:solidFill>
-                  <a:srgbClr val="0B3D5C"/>
+              <a:rPr sz="1250" b="0" i="0">
+                <a:solidFill>
+                  <a:srgbClr val="1F2937"/>
                 </a:solidFill>
                 <a:latin typeface="Calibri"/>
               </a:rPr>
-              <a:t>Volume conservation is more appropriate than rigid projected-area conservation.</a:t>
-            </a:r>
-          </a:p>
-          <a:p>
-            <a:pPr algn="l">
-              <a:spcBef>
-                <a:spcPts val="0"/>
-              </a:spcBef>
+              <a:t>•  Approach → brief contact → clean scatter apart</a:t>
+            </a:r>
+          </a:p>
+          <a:p>
+            <a:pPr>
               <a:spcAft>
-                <a:spcPts val="600"/>
+                <a:spcPts val="400"/>
               </a:spcAft>
             </a:pPr>
             <a:r>
               <a:rPr sz="1250" b="0" i="0">
                 <a:solidFill>
-                  <a:srgbClr val="4B5563"/>
+                  <a:srgbClr val="1F2937"/>
                 </a:solidFill>
                 <a:latin typeface="Calibri"/>
               </a:rPr>
-              <a:t>kₐ = 5: area +15%      kₐ = 0: inflation, crawling lost</a:t>
-            </a:r>
-          </a:p>
-        </p:txBody>
-      </p:sp>
-      <p:sp>
-        <p:nvSpPr>
-          <p:cNvPr id="25" name="Rounded Rectangle 24"/>
-          <p:cNvSpPr/>
-          <p:nvPr/>
-        </p:nvSpPr>
-        <p:spPr>
-          <a:xfrm>
-            <a:off x="365760" y="5468112"/>
-            <a:ext cx="11430000" cy="960120"/>
-          </a:xfrm>
-          <a:prstGeom prst="roundRect">
-            <a:avLst>
-              <a:gd name="adj" fmla="val 8000"/>
-            </a:avLst>
-          </a:prstGeom>
-          <a:solidFill>
-            <a:srgbClr val="0B3D5C"/>
-          </a:solidFill>
-          <a:ln>
-            <a:noFill/>
-          </a:ln>
-          <a:effectLst/>
-        </p:spPr>
-        <p:style>
-          <a:lnRef idx="1">
-            <a:schemeClr val="accent1"/>
-          </a:lnRef>
-          <a:fillRef idx="3">
-            <a:schemeClr val="accent1"/>
-          </a:fillRef>
-          <a:effectRef idx="2">
-            <a:schemeClr val="accent1"/>
-          </a:effectRef>
-          <a:fontRef idx="minor">
-            <a:schemeClr val="lt1"/>
-          </a:fontRef>
-        </p:style>
-        <p:txBody>
-          <a:bodyPr rtlCol="0" anchor="ctr"/>
-          <a:lstStyle/>
-          <a:p>
-            <a:pPr algn="ctr"/>
-          </a:p>
-        </p:txBody>
-      </p:sp>
-      <p:sp>
-        <p:nvSpPr>
-          <p:cNvPr id="26" name="TextBox 25"/>
-          <p:cNvSpPr txBox="1"/>
-          <p:nvPr/>
-        </p:nvSpPr>
-        <p:spPr>
-          <a:xfrm>
-            <a:off x="548640" y="5577840"/>
-            <a:ext cx="11064240" cy="777240"/>
-          </a:xfrm>
-          <a:prstGeom prst="rect">
-            <a:avLst/>
-          </a:prstGeom>
-          <a:noFill/>
-        </p:spPr>
-        <p:txBody>
-          <a:bodyPr wrap="square" lIns="54864" rIns="54864" tIns="27432" bIns="18288">
-            <a:spAutoFit/>
-          </a:bodyPr>
-          <a:lstStyle/>
+              <a:t>•  Contact overlap peaks at 2.1, well under the 8.7 a non-interacting pair would show at nominal touching</a:t>
+            </a:r>
+          </a:p>
+          <a:p>
+            <a:pPr>
+              <a:spcAft>
+                <a:spcPts val="1000"/>
+              </a:spcAft>
+            </a:pPr>
+            <a:r>
+              <a:rPr sz="1250" b="0" i="0">
+                <a:solidFill>
+                  <a:srgbClr val="1F2937"/>
+                </a:solidFill>
+                <a:latin typeface="Calibri"/>
+              </a:rPr>
+              <a:t>•  No merging, no numerical blow-up, healthy interiors throughout</a:t>
+            </a:r>
+          </a:p>
           <a:p>
             <a:pPr algn="l">
               <a:lnSpc>
@@ -15531,13 +16193,13 @@
               </a:spcAft>
             </a:pPr>
             <a:r>
-              <a:rPr sz="1600" b="1" i="0">
-                <a:solidFill>
-                  <a:srgbClr val="FFFFFF"/>
+              <a:rPr sz="1200" b="0" i="0">
+                <a:solidFill>
+                  <a:srgbClr val="4B5563"/>
                 </a:solidFill>
                 <a:latin typeface="Calibri"/>
               </a:rPr>
-              <a:t>Take-home: a verified local single-cell model now reproduces crawling without a global Stokes solve — providing a computational base for many-cell simulations.</a:t>
+              <a:t>Head-on collisions (both cells pointed straight at each other) are a harder, still-open case — noted honestly, not hidden.</a:t>
             </a:r>
           </a:p>
         </p:txBody>
@@ -15547,6 +16209,28 @@
   <p:clrMapOvr>
     <a:masterClrMapping/>
   </p:clrMapOvr>
+  <p:timing>
+    <p:tnLst>
+      <p:par>
+        <p:cTn id="1" dur="indefinite" restart="never" nodeType="tmRoot">
+          <p:childTnLst>
+            <p:video>
+              <p:cMediaNode vol="80000">
+                <p:cTn id="2" fill="hold" display="0">
+                  <p:stCondLst>
+                    <p:cond delay="indefinite"/>
+                  </p:stCondLst>
+                </p:cTn>
+                <p:tgtEl>
+                  <p:spTgt spid="10"/>
+                </p:tgtEl>
+              </p:cMediaNode>
+            </p:video>
+          </p:childTnLst>
+        </p:cTn>
+      </p:par>
+    </p:tnLst>
+  </p:timing>
 </p:sld>
 </file>
 
@@ -15729,7 +16413,7 @@
                 </a:solidFill>
                 <a:latin typeface="Calibri"/>
               </a:rPr>
-              <a:t>From one cell to many</a:t>
+              <a:t>What the simulations establish</a:t>
             </a:r>
           </a:p>
         </p:txBody>
@@ -15857,7 +16541,7 @@
                 </a:solidFill>
                 <a:latin typeface="Calibri"/>
               </a:rPr>
-              <a:t>9 / 9</a:t>
+              <a:t>9 / 10</a:t>
             </a:r>
           </a:p>
         </p:txBody>
@@ -15870,8 +16554,8 @@
         </p:nvSpPr>
         <p:spPr>
           <a:xfrm>
-            <a:off x="292608" y="1051560"/>
-            <a:ext cx="2267712" cy="2148840"/>
+            <a:off x="365760" y="1051560"/>
+            <a:ext cx="11430000" cy="969264"/>
           </a:xfrm>
           <a:prstGeom prst="roundRect">
             <a:avLst>
@@ -15910,14 +16594,58 @@
       </p:sp>
       <p:sp>
         <p:nvSpPr>
-          <p:cNvPr id="10" name="TextBox 9"/>
+          <p:cNvPr id="10" name="Rectangle 9"/>
+          <p:cNvSpPr/>
+          <p:nvPr/>
+        </p:nvSpPr>
+        <p:spPr>
+          <a:xfrm>
+            <a:off x="365760" y="1051560"/>
+            <a:ext cx="109728" cy="969264"/>
+          </a:xfrm>
+          <a:prstGeom prst="rect">
+            <a:avLst/>
+          </a:prstGeom>
+          <a:solidFill>
+            <a:srgbClr val="1A7A6D"/>
+          </a:solidFill>
+          <a:ln>
+            <a:noFill/>
+          </a:ln>
+          <a:effectLst/>
+        </p:spPr>
+        <p:style>
+          <a:lnRef idx="1">
+            <a:schemeClr val="accent1"/>
+          </a:lnRef>
+          <a:fillRef idx="3">
+            <a:schemeClr val="accent1"/>
+          </a:fillRef>
+          <a:effectRef idx="2">
+            <a:schemeClr val="accent1"/>
+          </a:effectRef>
+          <a:fontRef idx="minor">
+            <a:schemeClr val="lt1"/>
+          </a:fontRef>
+        </p:style>
+        <p:txBody>
+          <a:bodyPr rtlCol="0" anchor="ctr"/>
+          <a:lstStyle/>
+          <a:p>
+            <a:pPr algn="ctr"/>
+          </a:p>
+        </p:txBody>
+      </p:sp>
+      <p:sp>
+        <p:nvSpPr>
+          <p:cNvPr id="11" name="TextBox 10"/>
           <p:cNvSpPr txBox="1"/>
           <p:nvPr/>
         </p:nvSpPr>
         <p:spPr>
           <a:xfrm>
-            <a:off x="384048" y="1143000"/>
-            <a:ext cx="2084831" cy="1965960"/>
+            <a:off x="594360" y="1106424"/>
+            <a:ext cx="640080" cy="822960"/>
           </a:xfrm>
           <a:prstGeom prst="rect">
             <a:avLst/>
@@ -15935,17 +16663,59 @@
                 <a:spcPts val="0"/>
               </a:spcBef>
               <a:spcAft>
-                <a:spcPts val="800"/>
+                <a:spcPts val="0"/>
               </a:spcAft>
             </a:pPr>
             <a:r>
+              <a:rPr sz="2200" b="1" i="0">
+                <a:solidFill>
+                  <a:srgbClr val="1A7A6D"/>
+                </a:solidFill>
+                <a:latin typeface="Calibri"/>
+              </a:rPr>
+              <a:t>01</a:t>
+            </a:r>
+          </a:p>
+        </p:txBody>
+      </p:sp>
+      <p:sp>
+        <p:nvSpPr>
+          <p:cNvPr id="12" name="TextBox 11"/>
+          <p:cNvSpPr txBox="1"/>
+          <p:nvPr/>
+        </p:nvSpPr>
+        <p:spPr>
+          <a:xfrm>
+            <a:off x="1280160" y="1124712"/>
+            <a:ext cx="10287000" cy="822960"/>
+          </a:xfrm>
+          <a:prstGeom prst="rect">
+            <a:avLst/>
+          </a:prstGeom>
+          <a:noFill/>
+        </p:spPr>
+        <p:txBody>
+          <a:bodyPr wrap="square" lIns="54864" rIns="54864" tIns="27432" bIns="18288">
+            <a:spAutoFit/>
+          </a:bodyPr>
+          <a:lstStyle/>
+          <a:p>
+            <a:pPr algn="l">
+              <a:spcBef>
+                <a:spcPts val="0"/>
+              </a:spcBef>
+              <a:spcAft>
+                <a:spcPts val="400"/>
+              </a:spcAft>
+            </a:pPr>
+            <a:r>
               <a:rPr sz="1600" b="1" i="0">
                 <a:solidFill>
-                  <a:srgbClr val="1A7A6D"/>
+                  <a:srgbClr val="0B3D5C"/>
                 </a:solidFill>
                 <a:latin typeface="Calibri"/>
               </a:rPr>
-              <a:t>1  Two cells</a:t>
+              <a:t>A spatial gradient in treadmilling can generate a leading protrusion.</a:t>
             </a:r>
           </a:p>
           <a:p>
@@ -15960,25 +16730,25 @@
             <a:r>
               <a:rPr sz="1250" b="0" i="0">
                 <a:solidFill>
-                  <a:srgbClr val="1F2937"/>
+                  <a:srgbClr val="4B5563"/>
                 </a:solidFill>
                 <a:latin typeface="Calibri"/>
               </a:rPr>
-              <a:t>One field pair per cell + repulsive overlap.</a:t>
-            </a:r>
-          </a:p>
-        </p:txBody>
-      </p:sp>
-      <p:sp>
-        <p:nvSpPr>
-          <p:cNvPr id="11" name="Rounded Rectangle 10"/>
+              <a:t>V2</a:t>
+            </a:r>
+          </a:p>
+        </p:txBody>
+      </p:sp>
+      <p:sp>
+        <p:nvSpPr>
+          <p:cNvPr id="13" name="Rounded Rectangle 12"/>
           <p:cNvSpPr/>
           <p:nvPr/>
         </p:nvSpPr>
         <p:spPr>
           <a:xfrm>
-            <a:off x="2651760" y="1051560"/>
-            <a:ext cx="2267712" cy="2148840"/>
+            <a:off x="365760" y="2130552"/>
+            <a:ext cx="11430000" cy="969264"/>
           </a:xfrm>
           <a:prstGeom prst="roundRect">
             <a:avLst>
@@ -16017,14 +16787,58 @@
       </p:sp>
       <p:sp>
         <p:nvSpPr>
-          <p:cNvPr id="12" name="TextBox 11"/>
+          <p:cNvPr id="14" name="Rectangle 13"/>
+          <p:cNvSpPr/>
+          <p:nvPr/>
+        </p:nvSpPr>
+        <p:spPr>
+          <a:xfrm>
+            <a:off x="365760" y="2130552"/>
+            <a:ext cx="109728" cy="969264"/>
+          </a:xfrm>
+          <a:prstGeom prst="rect">
+            <a:avLst/>
+          </a:prstGeom>
+          <a:solidFill>
+            <a:srgbClr val="1A7A6D"/>
+          </a:solidFill>
+          <a:ln>
+            <a:noFill/>
+          </a:ln>
+          <a:effectLst/>
+        </p:spPr>
+        <p:style>
+          <a:lnRef idx="1">
+            <a:schemeClr val="accent1"/>
+          </a:lnRef>
+          <a:fillRef idx="3">
+            <a:schemeClr val="accent1"/>
+          </a:fillRef>
+          <a:effectRef idx="2">
+            <a:schemeClr val="accent1"/>
+          </a:effectRef>
+          <a:fontRef idx="minor">
+            <a:schemeClr val="lt1"/>
+          </a:fontRef>
+        </p:style>
+        <p:txBody>
+          <a:bodyPr rtlCol="0" anchor="ctr"/>
+          <a:lstStyle/>
+          <a:p>
+            <a:pPr algn="ctr"/>
+          </a:p>
+        </p:txBody>
+      </p:sp>
+      <p:sp>
+        <p:nvSpPr>
+          <p:cNvPr id="15" name="TextBox 14"/>
           <p:cNvSpPr txBox="1"/>
           <p:nvPr/>
         </p:nvSpPr>
         <p:spPr>
           <a:xfrm>
-            <a:off x="2743200" y="1143000"/>
-            <a:ext cx="2084831" cy="1965960"/>
+            <a:off x="594360" y="2185416"/>
+            <a:ext cx="640080" cy="822960"/>
           </a:xfrm>
           <a:prstGeom prst="rect">
             <a:avLst/>
@@ -16042,17 +16856,59 @@
                 <a:spcPts val="0"/>
               </a:spcBef>
               <a:spcAft>
-                <a:spcPts val="800"/>
+                <a:spcPts val="0"/>
               </a:spcAft>
             </a:pPr>
             <a:r>
+              <a:rPr sz="2200" b="1" i="0">
+                <a:solidFill>
+                  <a:srgbClr val="1A7A6D"/>
+                </a:solidFill>
+                <a:latin typeface="Calibri"/>
+              </a:rPr>
+              <a:t>02</a:t>
+            </a:r>
+          </a:p>
+        </p:txBody>
+      </p:sp>
+      <p:sp>
+        <p:nvSpPr>
+          <p:cNvPr id="16" name="TextBox 15"/>
+          <p:cNvSpPr txBox="1"/>
+          <p:nvPr/>
+        </p:nvSpPr>
+        <p:spPr>
+          <a:xfrm>
+            <a:off x="1280160" y="2203704"/>
+            <a:ext cx="10287000" cy="822960"/>
+          </a:xfrm>
+          <a:prstGeom prst="rect">
+            <a:avLst/>
+          </a:prstGeom>
+          <a:noFill/>
+        </p:spPr>
+        <p:txBody>
+          <a:bodyPr wrap="square" lIns="54864" rIns="54864" tIns="27432" bIns="18288">
+            <a:spAutoFit/>
+          </a:bodyPr>
+          <a:lstStyle/>
+          <a:p>
+            <a:pPr algn="l">
+              <a:spcBef>
+                <a:spcPts val="0"/>
+              </a:spcBef>
+              <a:spcAft>
+                <a:spcPts val="400"/>
+              </a:spcAft>
+            </a:pPr>
+            <a:r>
               <a:rPr sz="1600" b="1" i="0">
                 <a:solidFill>
-                  <a:srgbClr val="1A7A6D"/>
+                  <a:srgbClr val="0B3D5C"/>
                 </a:solidFill>
                 <a:latin typeface="Calibri"/>
               </a:rPr>
-              <a:t>2  Collisions</a:t>
+              <a:t>Planar morphology is controlled mainly by polarization anchoring.</a:t>
             </a:r>
           </a:p>
           <a:p>
@@ -16067,25 +16923,25 @@
             <a:r>
               <a:rPr sz="1250" b="0" i="0">
                 <a:solidFill>
-                  <a:srgbClr val="1F2937"/>
+                  <a:srgbClr val="4B5563"/>
                 </a:solidFill>
                 <a:latin typeface="Calibri"/>
               </a:rPr>
-              <a:t>Head-on and glancing interactions.</a:t>
-            </a:r>
-          </a:p>
-        </p:txBody>
-      </p:sp>
-      <p:sp>
-        <p:nvSpPr>
-          <p:cNvPr id="13" name="Rounded Rectangle 12"/>
+              <a:t>V3  ·  flow adds ~2%</a:t>
+            </a:r>
+          </a:p>
+        </p:txBody>
+      </p:sp>
+      <p:sp>
+        <p:nvSpPr>
+          <p:cNvPr id="17" name="Rounded Rectangle 16"/>
           <p:cNvSpPr/>
           <p:nvPr/>
         </p:nvSpPr>
         <p:spPr>
           <a:xfrm>
-            <a:off x="5010912" y="1051560"/>
-            <a:ext cx="2267712" cy="2148840"/>
+            <a:off x="365760" y="3209544"/>
+            <a:ext cx="11430000" cy="969264"/>
           </a:xfrm>
           <a:prstGeom prst="roundRect">
             <a:avLst>
@@ -16124,14 +16980,58 @@
       </p:sp>
       <p:sp>
         <p:nvSpPr>
-          <p:cNvPr id="14" name="TextBox 13"/>
+          <p:cNvPr id="18" name="Rectangle 17"/>
+          <p:cNvSpPr/>
+          <p:nvPr/>
+        </p:nvSpPr>
+        <p:spPr>
+          <a:xfrm>
+            <a:off x="365760" y="3209544"/>
+            <a:ext cx="109728" cy="969264"/>
+          </a:xfrm>
+          <a:prstGeom prst="rect">
+            <a:avLst/>
+          </a:prstGeom>
+          <a:solidFill>
+            <a:srgbClr val="1A7A6D"/>
+          </a:solidFill>
+          <a:ln>
+            <a:noFill/>
+          </a:ln>
+          <a:effectLst/>
+        </p:spPr>
+        <p:style>
+          <a:lnRef idx="1">
+            <a:schemeClr val="accent1"/>
+          </a:lnRef>
+          <a:fillRef idx="3">
+            <a:schemeClr val="accent1"/>
+          </a:fillRef>
+          <a:effectRef idx="2">
+            <a:schemeClr val="accent1"/>
+          </a:effectRef>
+          <a:fontRef idx="minor">
+            <a:schemeClr val="lt1"/>
+          </a:fontRef>
+        </p:style>
+        <p:txBody>
+          <a:bodyPr rtlCol="0" anchor="ctr"/>
+          <a:lstStyle/>
+          <a:p>
+            <a:pPr algn="ctr"/>
+          </a:p>
+        </p:txBody>
+      </p:sp>
+      <p:sp>
+        <p:nvSpPr>
+          <p:cNvPr id="19" name="TextBox 18"/>
           <p:cNvSpPr txBox="1"/>
           <p:nvPr/>
         </p:nvSpPr>
         <p:spPr>
           <a:xfrm>
-            <a:off x="5102352" y="1143000"/>
-            <a:ext cx="2084831" cy="1965960"/>
+            <a:off x="594360" y="3264408"/>
+            <a:ext cx="640080" cy="822960"/>
           </a:xfrm>
           <a:prstGeom prst="rect">
             <a:avLst/>
@@ -16149,17 +17049,59 @@
                 <a:spcPts val="0"/>
               </a:spcBef>
               <a:spcAft>
-                <a:spcPts val="800"/>
+                <a:spcPts val="0"/>
               </a:spcAft>
             </a:pPr>
             <a:r>
+              <a:rPr sz="2200" b="1" i="0">
+                <a:solidFill>
+                  <a:srgbClr val="1A7A6D"/>
+                </a:solidFill>
+                <a:latin typeface="Calibri"/>
+              </a:rPr>
+              <a:t>03</a:t>
+            </a:r>
+          </a:p>
+        </p:txBody>
+      </p:sp>
+      <p:sp>
+        <p:nvSpPr>
+          <p:cNvPr id="20" name="TextBox 19"/>
+          <p:cNvSpPr txBox="1"/>
+          <p:nvPr/>
+        </p:nvSpPr>
+        <p:spPr>
+          <a:xfrm>
+            <a:off x="1280160" y="3282696"/>
+            <a:ext cx="10287000" cy="822960"/>
+          </a:xfrm>
+          <a:prstGeom prst="rect">
+            <a:avLst/>
+          </a:prstGeom>
+          <a:noFill/>
+        </p:spPr>
+        <p:txBody>
+          <a:bodyPr wrap="square" lIns="54864" rIns="54864" tIns="27432" bIns="18288">
+            <a:spAutoFit/>
+          </a:bodyPr>
+          <a:lstStyle/>
+          <a:p>
+            <a:pPr algn="l">
+              <a:spcBef>
+                <a:spcPts val="0"/>
+              </a:spcBef>
+              <a:spcAft>
+                <a:spcPts val="400"/>
+              </a:spcAft>
+            </a:pPr>
+            <a:r>
               <a:rPr sz="1600" b="1" i="0">
                 <a:solidFill>
-                  <a:srgbClr val="1A7A6D"/>
+                  <a:srgbClr val="0B3D5C"/>
                 </a:solidFill>
                 <a:latin typeface="Calibri"/>
               </a:rPr>
-              <a:t>3  Polarity</a:t>
+              <a:t>The friction-dominated model retains crawling behaviour.</a:t>
             </a:r>
           </a:p>
           <a:p>
@@ -16174,25 +17116,25 @@
             <a:r>
               <a:rPr sz="1250" b="0" i="0">
                 <a:solidFill>
-                  <a:srgbClr val="1F2937"/>
+                  <a:srgbClr val="4B5563"/>
                 </a:solidFill>
                 <a:latin typeface="Calibri"/>
               </a:rPr>
-              <a:t>Allow cells to choose their own direction.</a:t>
-            </a:r>
-          </a:p>
-        </p:txBody>
-      </p:sp>
-      <p:sp>
-        <p:nvSpPr>
-          <p:cNvPr id="15" name="Rounded Rectangle 14"/>
+              <a:t>V4  ·  speed 0.801  ·  0.2% agreement  ·  ~5× faster  ·  local</a:t>
+            </a:r>
+          </a:p>
+        </p:txBody>
+      </p:sp>
+      <p:sp>
+        <p:nvSpPr>
+          <p:cNvPr id="21" name="Rounded Rectangle 20"/>
           <p:cNvSpPr/>
           <p:nvPr/>
         </p:nvSpPr>
         <p:spPr>
           <a:xfrm>
-            <a:off x="7370064" y="1051560"/>
-            <a:ext cx="2267712" cy="2148840"/>
+            <a:off x="365760" y="4288536"/>
+            <a:ext cx="11430000" cy="969264"/>
           </a:xfrm>
           <a:prstGeom prst="roundRect">
             <a:avLst>
@@ -16231,14 +17173,58 @@
       </p:sp>
       <p:sp>
         <p:nvSpPr>
-          <p:cNvPr id="16" name="TextBox 15"/>
+          <p:cNvPr id="22" name="Rectangle 21"/>
+          <p:cNvSpPr/>
+          <p:nvPr/>
+        </p:nvSpPr>
+        <p:spPr>
+          <a:xfrm>
+            <a:off x="365760" y="4288536"/>
+            <a:ext cx="109728" cy="969264"/>
+          </a:xfrm>
+          <a:prstGeom prst="rect">
+            <a:avLst/>
+          </a:prstGeom>
+          <a:solidFill>
+            <a:srgbClr val="1A7A6D"/>
+          </a:solidFill>
+          <a:ln>
+            <a:noFill/>
+          </a:ln>
+          <a:effectLst/>
+        </p:spPr>
+        <p:style>
+          <a:lnRef idx="1">
+            <a:schemeClr val="accent1"/>
+          </a:lnRef>
+          <a:fillRef idx="3">
+            <a:schemeClr val="accent1"/>
+          </a:fillRef>
+          <a:effectRef idx="2">
+            <a:schemeClr val="accent1"/>
+          </a:effectRef>
+          <a:fontRef idx="minor">
+            <a:schemeClr val="lt1"/>
+          </a:fontRef>
+        </p:style>
+        <p:txBody>
+          <a:bodyPr rtlCol="0" anchor="ctr"/>
+          <a:lstStyle/>
+          <a:p>
+            <a:pPr algn="ctr"/>
+          </a:p>
+        </p:txBody>
+      </p:sp>
+      <p:sp>
+        <p:nvSpPr>
+          <p:cNvPr id="23" name="TextBox 22"/>
           <p:cNvSpPr txBox="1"/>
           <p:nvPr/>
         </p:nvSpPr>
         <p:spPr>
           <a:xfrm>
-            <a:off x="7461504" y="1143000"/>
-            <a:ext cx="2084831" cy="1965960"/>
+            <a:off x="594360" y="4343400"/>
+            <a:ext cx="640080" cy="822960"/>
           </a:xfrm>
           <a:prstGeom prst="rect">
             <a:avLst/>
@@ -16256,17 +17242,59 @@
                 <a:spcPts val="0"/>
               </a:spcBef>
               <a:spcAft>
-                <a:spcPts val="800"/>
+                <a:spcPts val="0"/>
               </a:spcAft>
             </a:pPr>
             <a:r>
+              <a:rPr sz="2200" b="1" i="0">
+                <a:solidFill>
+                  <a:srgbClr val="1A7A6D"/>
+                </a:solidFill>
+                <a:latin typeface="Calibri"/>
+              </a:rPr>
+              <a:t>04</a:t>
+            </a:r>
+          </a:p>
+        </p:txBody>
+      </p:sp>
+      <p:sp>
+        <p:nvSpPr>
+          <p:cNvPr id="24" name="TextBox 23"/>
+          <p:cNvSpPr txBox="1"/>
+          <p:nvPr/>
+        </p:nvSpPr>
+        <p:spPr>
+          <a:xfrm>
+            <a:off x="1280160" y="4361688"/>
+            <a:ext cx="10287000" cy="822960"/>
+          </a:xfrm>
+          <a:prstGeom prst="rect">
+            <a:avLst/>
+          </a:prstGeom>
+          <a:noFill/>
+        </p:spPr>
+        <p:txBody>
+          <a:bodyPr wrap="square" lIns="54864" rIns="54864" tIns="27432" bIns="18288">
+            <a:spAutoFit/>
+          </a:bodyPr>
+          <a:lstStyle/>
+          <a:p>
+            <a:pPr algn="l">
+              <a:spcBef>
+                <a:spcPts val="0"/>
+              </a:spcBef>
+              <a:spcAft>
+                <a:spcPts val="400"/>
+              </a:spcAft>
+            </a:pPr>
+            <a:r>
               <a:rPr sz="1600" b="1" i="0">
                 <a:solidFill>
-                  <a:srgbClr val="1A7A6D"/>
+                  <a:srgbClr val="0B3D5C"/>
                 </a:solidFill>
                 <a:latin typeface="Calibri"/>
               </a:rPr>
-              <a:t>4  Adhesion</a:t>
+              <a:t>Volume conservation is more appropriate than rigid projected-area conservation.</a:t>
             </a:r>
           </a:p>
           <a:p>
@@ -16281,132 +17309,25 @@
             <a:r>
               <a:rPr sz="1250" b="0" i="0">
                 <a:solidFill>
-                  <a:srgbClr val="1F2937"/>
+                  <a:srgbClr val="4B5563"/>
                 </a:solidFill>
                 <a:latin typeface="Calibri"/>
               </a:rPr>
-              <a:t>Load-dependent friction ξ.</a:t>
-            </a:r>
-          </a:p>
-        </p:txBody>
-      </p:sp>
-      <p:sp>
-        <p:nvSpPr>
-          <p:cNvPr id="17" name="Rounded Rectangle 16"/>
+              <a:t>kₐ = 5: area +15%      kₐ = 0: inflation, crawling lost</a:t>
+            </a:r>
+          </a:p>
+        </p:txBody>
+      </p:sp>
+      <p:sp>
+        <p:nvSpPr>
+          <p:cNvPr id="25" name="Rounded Rectangle 24"/>
           <p:cNvSpPr/>
           <p:nvPr/>
         </p:nvSpPr>
         <p:spPr>
           <a:xfrm>
-            <a:off x="9729216" y="1051560"/>
-            <a:ext cx="2267712" cy="2148840"/>
-          </a:xfrm>
-          <a:prstGeom prst="roundRect">
-            <a:avLst>
-              <a:gd name="adj" fmla="val 8000"/>
-            </a:avLst>
-          </a:prstGeom>
-          <a:solidFill>
-            <a:srgbClr val="F3F6F9"/>
-          </a:solidFill>
-          <a:ln>
-            <a:noFill/>
-          </a:ln>
-          <a:effectLst/>
-        </p:spPr>
-        <p:style>
-          <a:lnRef idx="1">
-            <a:schemeClr val="accent1"/>
-          </a:lnRef>
-          <a:fillRef idx="3">
-            <a:schemeClr val="accent1"/>
-          </a:fillRef>
-          <a:effectRef idx="2">
-            <a:schemeClr val="accent1"/>
-          </a:effectRef>
-          <a:fontRef idx="minor">
-            <a:schemeClr val="lt1"/>
-          </a:fontRef>
-        </p:style>
-        <p:txBody>
-          <a:bodyPr rtlCol="0" anchor="ctr"/>
-          <a:lstStyle/>
-          <a:p>
-            <a:pPr algn="ctr"/>
-          </a:p>
-        </p:txBody>
-      </p:sp>
-      <p:sp>
-        <p:nvSpPr>
-          <p:cNvPr id="18" name="TextBox 17"/>
-          <p:cNvSpPr txBox="1"/>
-          <p:nvPr/>
-        </p:nvSpPr>
-        <p:spPr>
-          <a:xfrm>
-            <a:off x="9820656" y="1143000"/>
-            <a:ext cx="2084831" cy="1965960"/>
-          </a:xfrm>
-          <a:prstGeom prst="rect">
-            <a:avLst/>
-          </a:prstGeom>
-          <a:noFill/>
-        </p:spPr>
-        <p:txBody>
-          <a:bodyPr wrap="square" lIns="54864" rIns="54864" tIns="27432" bIns="18288">
-            <a:spAutoFit/>
-          </a:bodyPr>
-          <a:lstStyle/>
-          <a:p>
-            <a:pPr algn="l">
-              <a:spcBef>
-                <a:spcPts val="0"/>
-              </a:spcBef>
-              <a:spcAft>
-                <a:spcPts val="800"/>
-              </a:spcAft>
-            </a:pPr>
-            <a:r>
-              <a:rPr sz="1600" b="1" i="0">
-                <a:solidFill>
-                  <a:srgbClr val="1A7A6D"/>
-                </a:solidFill>
-                <a:latin typeface="Calibri"/>
-              </a:rPr>
-              <a:t>5  Collectives</a:t>
-            </a:r>
-          </a:p>
-          <a:p>
-            <a:pPr algn="l">
-              <a:spcBef>
-                <a:spcPts val="0"/>
-              </a:spcBef>
-              <a:spcAft>
-                <a:spcPts val="600"/>
-              </a:spcAft>
-            </a:pPr>
-            <a:r>
-              <a:rPr sz="1250" b="0" i="0">
-                <a:solidFill>
-                  <a:srgbClr val="1F2937"/>
-                </a:solidFill>
-                <a:latin typeface="Calibri"/>
-              </a:rPr>
-              <a:t>Tens of cells: jamming and neighbour alignment.</a:t>
-            </a:r>
-          </a:p>
-        </p:txBody>
-      </p:sp>
-      <p:sp>
-        <p:nvSpPr>
-          <p:cNvPr id="19" name="Rounded Rectangle 18"/>
-          <p:cNvSpPr/>
-          <p:nvPr/>
-        </p:nvSpPr>
-        <p:spPr>
-          <a:xfrm>
-            <a:off x="292608" y="3429000"/>
-            <a:ext cx="11594592" cy="2926080"/>
+            <a:off x="365760" y="5468112"/>
+            <a:ext cx="11430000" cy="960120"/>
           </a:xfrm>
           <a:prstGeom prst="roundRect">
             <a:avLst>
@@ -16445,14 +17366,14 @@
       </p:sp>
       <p:sp>
         <p:nvSpPr>
-          <p:cNvPr id="20" name="TextBox 19"/>
+          <p:cNvPr id="26" name="TextBox 25"/>
           <p:cNvSpPr txBox="1"/>
           <p:nvPr/>
         </p:nvSpPr>
         <p:spPr>
           <a:xfrm>
-            <a:off x="548640" y="3611880"/>
-            <a:ext cx="11109960" cy="2606040"/>
+            <a:off x="548640" y="5577840"/>
+            <a:ext cx="11064240" cy="777240"/>
           </a:xfrm>
           <a:prstGeom prst="rect">
             <a:avLst/>
@@ -16466,59 +17387,24 @@
           <a:lstStyle/>
           <a:p>
             <a:pPr algn="l">
+              <a:lnSpc>
+                <a:spcPct val="105000"/>
+              </a:lnSpc>
               <a:spcBef>
                 <a:spcPts val="0"/>
               </a:spcBef>
               <a:spcAft>
-                <a:spcPts val="1600"/>
+                <a:spcPts val="0"/>
               </a:spcAft>
             </a:pPr>
             <a:r>
-              <a:rPr sz="3200" b="1" i="0">
+              <a:rPr sz="1600" b="1" i="0">
                 <a:solidFill>
                   <a:srgbClr val="FFFFFF"/>
                 </a:solidFill>
                 <a:latin typeface="Calibri"/>
               </a:rPr>
-              <a:t>Thank you — Questions</a:t>
-            </a:r>
-          </a:p>
-          <a:p>
-            <a:pPr algn="l">
-              <a:spcBef>
-                <a:spcPts val="0"/>
-              </a:spcBef>
-              <a:spcAft>
-                <a:spcPts val="800"/>
-              </a:spcAft>
-            </a:pPr>
-            <a:r>
-              <a:rPr sz="1600" b="0" i="0">
-                <a:solidFill>
-                  <a:srgbClr val="FFFFFF"/>
-                </a:solidFill>
-                <a:latin typeface="Calibri"/>
-              </a:rPr>
-              <a:t>Siddharth Kumar  (2023PH10741)     ·     Soumik Roy  (2023PH10756)</a:t>
-            </a:r>
-          </a:p>
-          <a:p>
-            <a:pPr algn="l">
-              <a:spcBef>
-                <a:spcPts val="0"/>
-              </a:spcBef>
-              <a:spcAft>
-                <a:spcPts val="600"/>
-              </a:spcAft>
-            </a:pPr>
-            <a:r>
-              <a:rPr sz="1500" b="0" i="0">
-                <a:solidFill>
-                  <a:srgbClr val="C5D4DE"/>
-                </a:solidFill>
-                <a:latin typeface="Calibri"/>
-              </a:rPr>
-              <a:t>Adviser: Prof. Sujin B. Babu     ·     Department of Physics, IIT Delhi</a:t>
+              <a:t>Take-home: a verified local single-cell model now reproduces crawling without a global Stokes solve — providing a computational base for many-cell simulations.</a:t>
             </a:r>
           </a:p>
         </p:txBody>
